--- a/downloads/slides/Lesson13_Slides.pptx
+++ b/downloads/slides/Lesson13_Slides.pptx
@@ -1815,7 +1815,7 @@
           <a:p>
             <a:r>
               <a:rPr lang="en-US" dirty="0"/>
-              <a:t>Step 3 · 6:18–6:30 · Listening + "Say it" (L13_listening.mp3, about 1:30). Audio: L13_listening.mp3 (about 1:30). The audio plays once, play again if needed. Audio coming soon: until it is ready, read the script with a volunteer learner.</a:t>
+              <a:t>Step 3 · 6:18–6:30 · Listening + "Say it" (L13_listening.mp3, about 0:59). Audio: L13_listening.mp3 (about 0:59). The audio plays once, play again if needed. No speaker? Read the script with a volunteer learner.</a:t>
             </a:r>
           </a:p>
           <a:p>
@@ -3174,6 +3174,1203 @@
 </file>
 
 <file path=ppt/slides/slide10.xml><?xml version="1.0" encoding="utf-8"?>
+<p:sld xmlns:a="http://schemas.openxmlformats.org/drawingml/2006/main" xmlns:r="http://schemas.openxmlformats.org/officeDocument/2006/relationships" xmlns:p="http://schemas.openxmlformats.org/presentationml/2006/main">
+  <p:cSld name="Slide 4">
+    <p:bg>
+      <p:bgPr>
+        <a:solidFill>
+          <a:srgbClr val="F1F5FB"/>
+        </a:solidFill>
+      </p:bgPr>
+    </p:bg>
+    <p:spTree>
+      <p:nvGrpSpPr>
+        <p:cNvPr id="1" name=""/>
+        <p:cNvGrpSpPr/>
+        <p:nvPr/>
+      </p:nvGrpSpPr>
+      <p:grpSpPr>
+        <a:xfrm>
+          <a:off x="0" y="0"/>
+          <a:ext cx="0" cy="0"/>
+          <a:chOff x="0" y="0"/>
+          <a:chExt cx="0" cy="0"/>
+        </a:xfrm>
+      </p:grpSpPr>
+      <p:sp>
+        <p:nvSpPr>
+          <p:cNvPr id="2" name="Shape 0"/>
+          <p:cNvSpPr/>
+          <p:nvPr/>
+        </p:nvSpPr>
+        <p:spPr>
+          <a:xfrm>
+            <a:off x="6742786" y="3649370"/>
+            <a:ext cx="4912157" cy="2561234"/>
+          </a:xfrm>
+          <a:prstGeom prst="round1Rect">
+            <a:avLst>
+              <a:gd name="adj" fmla="val 23087"/>
+            </a:avLst>
+          </a:prstGeom>
+          <a:solidFill>
+            <a:srgbClr val="B9D2F7"/>
+          </a:solidFill>
+          <a:ln w="76200">
+            <a:solidFill>
+              <a:srgbClr val="FFFFFF"/>
+            </a:solidFill>
+            <a:prstDash val="solid"/>
+          </a:ln>
+        </p:spPr>
+        <p:txBody>
+          <a:bodyPr/>
+          <a:p/>
+        </p:txBody>
+      </p:sp>
+      <p:sp>
+        <p:nvSpPr>
+          <p:cNvPr id="5" name="Shape 3"/>
+          <p:cNvSpPr/>
+          <p:nvPr/>
+        </p:nvSpPr>
+        <p:spPr>
+          <a:xfrm>
+            <a:off x="560116" y="1350752"/>
+            <a:ext cx="5663794" cy="1566367"/>
+          </a:xfrm>
+          <a:prstGeom prst="roundRect">
+            <a:avLst>
+              <a:gd name="adj" fmla="val 16667"/>
+            </a:avLst>
+          </a:prstGeom>
+          <a:solidFill>
+            <a:srgbClr val="8FAFE3"/>
+          </a:solidFill>
+          <a:ln/>
+        </p:spPr>
+        <p:txBody>
+          <a:bodyPr/>
+          <a:p/>
+        </p:txBody>
+      </p:sp>
+      <p:sp>
+        <p:nvSpPr>
+          <p:cNvPr id="6" name="Shape 4"/>
+          <p:cNvSpPr/>
+          <p:nvPr/>
+        </p:nvSpPr>
+        <p:spPr>
+          <a:xfrm>
+            <a:off x="593446" y="1286561"/>
+            <a:ext cx="5663794" cy="1566367"/>
+          </a:xfrm>
+          <a:prstGeom prst="roundRect">
+            <a:avLst>
+              <a:gd name="adj" fmla="val 16667"/>
+            </a:avLst>
+          </a:prstGeom>
+          <a:solidFill>
+            <a:srgbClr val="FFFFFF"/>
+          </a:solidFill>
+          <a:ln/>
+        </p:spPr>
+        <p:txBody>
+          <a:bodyPr/>
+          <a:p/>
+        </p:txBody>
+      </p:sp>
+      <p:sp>
+        <p:nvSpPr>
+          <p:cNvPr id="7" name="Text 5"/>
+          <p:cNvSpPr/>
+          <p:nvPr/>
+        </p:nvSpPr>
+        <p:spPr>
+          <a:xfrm>
+            <a:off x="832104" y="1371600"/>
+            <a:ext cx="5257800" cy="1417320"/>
+          </a:xfrm>
+          <a:prstGeom prst="rect">
+            <a:avLst/>
+          </a:prstGeom>
+          <a:noFill/>
+          <a:ln/>
+        </p:spPr>
+        <p:txBody>
+          <a:bodyPr wrap="square" rtlCol="0" anchor="ctr"/>
+          <a:lstStyle/>
+          <a:p>
+            <a:pPr algn="l" indent="0" marL="0">
+              <a:buNone/>
+            </a:pPr>
+            <a:r>
+              <a:rPr lang="en-US" sz="2000" dirty="0" b="1">
+                <a:solidFill>
+                  <a:srgbClr val="5B3FC4"/>
+                </a:solidFill>
+                <a:latin typeface="Lexend Deca" pitchFamily="34" charset="0"/>
+                <a:ea typeface="Lexend Deca" pitchFamily="34" charset="-122"/>
+                <a:cs typeface="Lexend Deca" pitchFamily="34" charset="-120"/>
+              </a:rPr>
+              <a:t>Grammar Box 2</a:t>
+            </a:r>
+            <a:endParaRPr lang="en-US" sz="2000" dirty="0"/>
+          </a:p>
+          <a:p>
+            <a:pPr algn="l" indent="0" marL="0">
+              <a:buNone/>
+            </a:pPr>
+            <a:r>
+              <a:rPr lang="en-US" sz="3200" dirty="0" b="1">
+                <a:solidFill>
+                  <a:srgbClr val="1B2236"/>
+                </a:solidFill>
+                <a:latin typeface="Lexend Deca" pitchFamily="34" charset="0"/>
+                <a:ea typeface="Lexend Deca" pitchFamily="34" charset="-122"/>
+                <a:cs typeface="Lexend Deca" pitchFamily="34" charset="-120"/>
+              </a:rPr>
+              <a:t>Feelings Then</a:t>
+            </a:r>
+            <a:endParaRPr lang="en-US" sz="3200" dirty="0"/>
+          </a:p>
+          <a:p>
+            <a:pPr algn="l" indent="0" marL="0">
+              <a:buNone/>
+            </a:pPr>
+            <a:r>
+              <a:rPr lang="en-US" sz="3200" dirty="0" b="1">
+                <a:solidFill>
+                  <a:srgbClr val="1B2236"/>
+                </a:solidFill>
+                <a:latin typeface="Lexend Deca" pitchFamily="34" charset="0"/>
+                <a:ea typeface="Lexend Deca" pitchFamily="34" charset="-122"/>
+                <a:cs typeface="Lexend Deca" pitchFamily="34" charset="-120"/>
+              </a:rPr>
+              <a:t>and Now</a:t>
+            </a:r>
+            <a:endParaRPr lang="en-US" sz="3200" dirty="0"/>
+          </a:p>
+        </p:txBody>
+      </p:sp>
+      <p:sp>
+        <p:nvSpPr>
+          <p:cNvPr id="8" name="Shape 6"/>
+          <p:cNvSpPr/>
+          <p:nvPr/>
+        </p:nvSpPr>
+        <p:spPr>
+          <a:xfrm>
+            <a:off x="1305763" y="3649370"/>
+            <a:ext cx="4790542" cy="2599639"/>
+          </a:xfrm>
+          <a:prstGeom prst="round1Rect">
+            <a:avLst>
+              <a:gd name="adj" fmla="val 23087"/>
+            </a:avLst>
+          </a:prstGeom>
+          <a:solidFill>
+            <a:srgbClr val="FFFFFF"/>
+          </a:solidFill>
+          <a:ln w="25400">
+            <a:solidFill>
+              <a:srgbClr val="8FAFE3"/>
+            </a:solidFill>
+            <a:prstDash val="solid"/>
+          </a:ln>
+        </p:spPr>
+        <p:txBody>
+          <a:bodyPr/>
+          <a:p/>
+        </p:txBody>
+      </p:sp>
+      <p:sp>
+        <p:nvSpPr>
+          <p:cNvPr id="15" name="Shape 13"/>
+          <p:cNvSpPr/>
+          <p:nvPr/>
+        </p:nvSpPr>
+        <p:spPr>
+          <a:xfrm>
+            <a:off x="741578" y="3253435"/>
+            <a:ext cx="1024128" cy="967435"/>
+          </a:xfrm>
+          <a:prstGeom prst="star10">
+            <a:avLst/>
+          </a:prstGeom>
+          <a:solidFill>
+            <a:srgbClr val="8FAFE3"/>
+          </a:solidFill>
+          <a:ln/>
+        </p:spPr>
+        <p:txBody>
+          <a:bodyPr/>
+          <a:p/>
+        </p:txBody>
+      </p:sp>
+      <p:sp>
+        <p:nvSpPr>
+          <p:cNvPr id="16" name="Shape 14"/>
+          <p:cNvSpPr/>
+          <p:nvPr/>
+        </p:nvSpPr>
+        <p:spPr>
+          <a:xfrm>
+            <a:off x="823874" y="3240634"/>
+            <a:ext cx="1042416" cy="1042416"/>
+          </a:xfrm>
+          <a:prstGeom prst="star10">
+            <a:avLst/>
+          </a:prstGeom>
+          <a:solidFill>
+            <a:srgbClr val="FFE28C"/>
+          </a:solidFill>
+          <a:ln/>
+        </p:spPr>
+        <p:txBody>
+          <a:bodyPr/>
+          <a:p/>
+        </p:txBody>
+      </p:sp>
+      <p:sp>
+        <p:nvSpPr>
+          <p:cNvPr id="17" name="Shape 15"/>
+          <p:cNvSpPr/>
+          <p:nvPr/>
+        </p:nvSpPr>
+        <p:spPr>
+          <a:xfrm rot="900000">
+            <a:off x="1107338" y="3539642"/>
+            <a:ext cx="445313" cy="445313"/>
+          </a:xfrm>
+          <a:prstGeom prst="mathPlus">
+            <a:avLst/>
+          </a:prstGeom>
+          <a:solidFill>
+            <a:srgbClr val="1B2236"/>
+          </a:solidFill>
+          <a:ln/>
+        </p:spPr>
+        <p:txBody>
+          <a:bodyPr/>
+          <a:p/>
+        </p:txBody>
+      </p:sp>
+      <p:pic>
+        <p:nvPicPr>
+          <p:cNvPr id="42" name="Picture 42" descr="L13_proud.png"/>
+          <p:cNvPicPr>
+            <a:picLocks noChangeAspect="1"/>
+          </p:cNvPicPr>
+          <p:nvPr/>
+        </p:nvPicPr>
+        <p:blipFill>
+          <a:blip r:embed="rIdQ1"/>
+          <a:stretch>
+            <a:fillRect/>
+          </a:stretch>
+        </p:blipFill>
+        <p:spPr>
+          <a:xfrm>
+            <a:off x="7598664" y="1216152"/>
+            <a:ext cx="3254350" cy="2278045"/>
+          </a:xfrm>
+          <a:prstGeom prst="rect">
+            <a:avLst/>
+          </a:prstGeom>
+        </p:spPr>
+      </p:pic>
+      <p:sp>
+        <p:nvSpPr>
+          <p:cNvPr id="43" name="Q head"/>
+          <p:cNvSpPr/>
+          <p:nvPr/>
+        </p:nvSpPr>
+        <p:spPr>
+          <a:xfrm>
+            <a:off x="1920240" y="3794760"/>
+            <a:ext cx="4023360" cy="457200"/>
+          </a:xfrm>
+          <a:prstGeom prst="rect">
+            <a:avLst/>
+          </a:prstGeom>
+          <a:noFill/>
+          <a:ln w="38100">
+            <a:noFill/>
+          </a:ln>
+        </p:spPr>
+        <p:txBody>
+          <a:bodyPr wrap="square" lIns="73152" tIns="36576" rIns="73152" bIns="36576" rtlCol="0" anchor="ctr">
+            <a:noAutofit/>
+          </a:bodyPr>
+          <a:lstStyle/>
+          <a:p>
+            <a:pPr algn="l" indent="0" marL="0">
+              <a:buNone/>
+            </a:pPr>
+            <a:r>
+              <a:rPr lang="en-US" sz="2000" dirty="0" b="1">
+                <a:solidFill>
+                  <a:srgbClr val="5B3FC4"/>
+                </a:solidFill>
+                <a:latin typeface="Lexend Deca" pitchFamily="34" charset="0"/>
+                <a:ea typeface="Lexend Deca" pitchFamily="34" charset="-122"/>
+                <a:cs typeface="Lexend Deca" pitchFamily="34" charset="-120"/>
+              </a:rPr>
+              <a:t>QUESTION</a:t>
+            </a:r>
+            <a:endParaRPr lang="en-US" sz="2000" dirty="0"/>
+          </a:p>
+        </p:txBody>
+      </p:sp>
+      <p:sp>
+        <p:nvSpPr>
+          <p:cNvPr id="44" name="A head"/>
+          <p:cNvSpPr/>
+          <p:nvPr/>
+        </p:nvSpPr>
+        <p:spPr>
+          <a:xfrm>
+            <a:off x="7040880" y="3794760"/>
+            <a:ext cx="4480560" cy="457200"/>
+          </a:xfrm>
+          <a:prstGeom prst="rect">
+            <a:avLst/>
+          </a:prstGeom>
+          <a:noFill/>
+          <a:ln w="38100">
+            <a:noFill/>
+          </a:ln>
+        </p:spPr>
+        <p:txBody>
+          <a:bodyPr wrap="square" lIns="73152" tIns="36576" rIns="73152" bIns="36576" rtlCol="0" anchor="ctr">
+            <a:noAutofit/>
+          </a:bodyPr>
+          <a:lstStyle/>
+          <a:p>
+            <a:pPr algn="l" indent="0" marL="0">
+              <a:buNone/>
+            </a:pPr>
+            <a:r>
+              <a:rPr lang="en-US" sz="2000" dirty="0" b="1">
+                <a:solidFill>
+                  <a:srgbClr val="5B3FC4"/>
+                </a:solidFill>
+                <a:latin typeface="Lexend Deca" pitchFamily="34" charset="0"/>
+                <a:ea typeface="Lexend Deca" pitchFamily="34" charset="-122"/>
+                <a:cs typeface="Lexend Deca" pitchFamily="34" charset="-120"/>
+              </a:rPr>
+              <a:t>ANSWER</a:t>
+            </a:r>
+            <a:endParaRPr lang="en-US" sz="2000" dirty="0"/>
+          </a:p>
+        </p:txBody>
+      </p:sp>
+      <p:sp>
+        <p:nvSpPr>
+          <p:cNvPr id="45" name="Highlight"/>
+          <p:cNvSpPr/>
+          <p:nvPr/>
+        </p:nvSpPr>
+        <p:spPr>
+          <a:xfrm>
+            <a:off x="1481328" y="4453128"/>
+            <a:ext cx="1188720" cy="548640"/>
+          </a:xfrm>
+          <a:prstGeom prst="roundRect">
+            <a:avLst>
+              <a:gd name="adj" fmla="val 22000"/>
+            </a:avLst>
+          </a:prstGeom>
+          <a:solidFill>
+            <a:srgbClr val="FFE28C"/>
+          </a:solidFill>
+          <a:ln w="38100">
+            <a:noFill/>
+          </a:ln>
+        </p:spPr>
+        <p:txBody>
+          <a:bodyPr wrap="square" lIns="73152" tIns="36576" rIns="73152" bIns="36576" rtlCol="0" anchor="ctr">
+            <a:noAutofit/>
+          </a:bodyPr>
+          <a:lstStyle/>
+          <a:p>
+            <a:pPr algn="l" indent="0" marL="0">
+              <a:buNone/>
+            </a:pPr>
+            <a:r>
+              <a:rPr lang="en-US" sz="2000" dirty="0">
+                <a:solidFill>
+                  <a:srgbClr val="1B2236"/>
+                </a:solidFill>
+                <a:latin typeface="Lexend Deca" pitchFamily="34" charset="0"/>
+                <a:ea typeface="Lexend Deca" pitchFamily="34" charset="-122"/>
+                <a:cs typeface="Lexend Deca" pitchFamily="34" charset="-120"/>
+              </a:rPr>
+              <a:t/>
+            </a:r>
+            <a:endParaRPr lang="en-US" sz="2000" dirty="0"/>
+          </a:p>
+        </p:txBody>
+      </p:sp>
+      <p:sp>
+        <p:nvSpPr>
+          <p:cNvPr id="46" name="Helper"/>
+          <p:cNvSpPr/>
+          <p:nvPr/>
+        </p:nvSpPr>
+        <p:spPr>
+          <a:xfrm>
+            <a:off x="1481328" y="4315968"/>
+            <a:ext cx="1188720" cy="822960"/>
+          </a:xfrm>
+          <a:prstGeom prst="rect">
+            <a:avLst/>
+          </a:prstGeom>
+          <a:noFill/>
+          <a:ln w="38100">
+            <a:noFill/>
+          </a:ln>
+        </p:spPr>
+        <p:txBody>
+          <a:bodyPr wrap="square" lIns="73152" tIns="36576" rIns="73152" bIns="36576" rtlCol="0" anchor="ctr">
+            <a:noAutofit/>
+          </a:bodyPr>
+          <a:lstStyle/>
+          <a:p>
+            <a:pPr algn="ctr" indent="0" marL="0">
+              <a:buNone/>
+            </a:pPr>
+            <a:r>
+              <a:rPr lang="en-US" sz="2600" dirty="0" b="1">
+                <a:solidFill>
+                  <a:srgbClr val="1B2236"/>
+                </a:solidFill>
+                <a:latin typeface="Lexend Deca" pitchFamily="34" charset="0"/>
+                <a:ea typeface="Lexend Deca" pitchFamily="34" charset="-122"/>
+                <a:cs typeface="Lexend Deca" pitchFamily="34" charset="-120"/>
+              </a:rPr>
+              <a:t>How</a:t>
+            </a:r>
+            <a:endParaRPr lang="en-US" sz="2600" dirty="0"/>
+          </a:p>
+        </p:txBody>
+      </p:sp>
+      <p:sp>
+        <p:nvSpPr>
+          <p:cNvPr id="47" name="Question"/>
+          <p:cNvSpPr/>
+          <p:nvPr/>
+        </p:nvSpPr>
+        <p:spPr>
+          <a:xfrm>
+            <a:off x="2697480" y="4315968"/>
+            <a:ext cx="3291840" cy="822960"/>
+          </a:xfrm>
+          <a:prstGeom prst="rect">
+            <a:avLst/>
+          </a:prstGeom>
+          <a:noFill/>
+          <a:ln w="38100">
+            <a:noFill/>
+          </a:ln>
+        </p:spPr>
+        <p:txBody>
+          <a:bodyPr wrap="square" lIns="73152" tIns="36576" rIns="73152" bIns="36576" rtlCol="0" anchor="ctr">
+            <a:noAutofit/>
+          </a:bodyPr>
+          <a:lstStyle/>
+          <a:p>
+            <a:pPr algn="l" indent="0" marL="0">
+              <a:buNone/>
+            </a:pPr>
+            <a:r>
+              <a:rPr lang="en-US" sz="2200" dirty="0" b="1">
+                <a:solidFill>
+                  <a:srgbClr val="1B2236"/>
+                </a:solidFill>
+                <a:latin typeface="Lexend Deca" pitchFamily="34" charset="0"/>
+                <a:ea typeface="Lexend Deca" pitchFamily="34" charset="-122"/>
+                <a:cs typeface="Lexend Deca" pitchFamily="34" charset="-120"/>
+              </a:rPr>
+              <a:t>did</a:t>
+            </a:r>
+            <a:r>
+              <a:rPr lang="en-US" sz="2200" dirty="0">
+                <a:solidFill>
+                  <a:srgbClr val="1B2236"/>
+                </a:solidFill>
+                <a:latin typeface="Lexend Deca" pitchFamily="34" charset="0"/>
+                <a:ea typeface="Lexend Deca" pitchFamily="34" charset="-122"/>
+                <a:cs typeface="Lexend Deca" pitchFamily="34" charset="-120"/>
+              </a:rPr>
+              <a:t> you feel in the first class?</a:t>
+            </a:r>
+            <a:endParaRPr lang="en-US" sz="2200" dirty="0"/>
+          </a:p>
+        </p:txBody>
+      </p:sp>
+      <p:sp>
+        <p:nvSpPr>
+          <p:cNvPr id="49" name="Answer bg"/>
+          <p:cNvSpPr/>
+          <p:nvPr/>
+        </p:nvSpPr>
+        <p:spPr>
+          <a:xfrm>
+            <a:off x="6949440" y="4334256"/>
+            <a:ext cx="4526280" cy="786384"/>
+          </a:xfrm>
+          <a:prstGeom prst="roundRect">
+            <a:avLst>
+              <a:gd name="adj" fmla="val 22000"/>
+            </a:avLst>
+          </a:prstGeom>
+          <a:solidFill>
+            <a:srgbClr val="FFFFFF"/>
+          </a:solidFill>
+          <a:ln w="38100">
+            <a:noFill/>
+          </a:ln>
+        </p:spPr>
+        <p:txBody>
+          <a:bodyPr wrap="square" lIns="73152" tIns="36576" rIns="73152" bIns="36576" rtlCol="0" anchor="ctr">
+            <a:noAutofit/>
+          </a:bodyPr>
+          <a:lstStyle/>
+          <a:p>
+            <a:pPr algn="l" indent="0" marL="0">
+              <a:buNone/>
+            </a:pPr>
+            <a:r>
+              <a:rPr lang="en-US" sz="2000" dirty="0">
+                <a:solidFill>
+                  <a:srgbClr val="1B2236"/>
+                </a:solidFill>
+                <a:latin typeface="Lexend Deca" pitchFamily="34" charset="0"/>
+                <a:ea typeface="Lexend Deca" pitchFamily="34" charset="-122"/>
+                <a:cs typeface="Lexend Deca" pitchFamily="34" charset="-120"/>
+              </a:rPr>
+              <a:t/>
+            </a:r>
+            <a:endParaRPr lang="en-US" sz="2000" dirty="0"/>
+          </a:p>
+        </p:txBody>
+      </p:sp>
+      <p:sp>
+        <p:nvSpPr>
+          <p:cNvPr id="48" name="Answer"/>
+          <p:cNvSpPr/>
+          <p:nvPr/>
+        </p:nvSpPr>
+        <p:spPr>
+          <a:xfrm>
+            <a:off x="6949440" y="4315968"/>
+            <a:ext cx="4526280" cy="822960"/>
+          </a:xfrm>
+          <a:prstGeom prst="rect">
+            <a:avLst/>
+          </a:prstGeom>
+          <a:noFill/>
+          <a:ln w="38100">
+            <a:noFill/>
+          </a:ln>
+        </p:spPr>
+        <p:txBody>
+          <a:bodyPr wrap="square" lIns="73152" tIns="36576" rIns="73152" bIns="36576" rtlCol="0" anchor="ctr">
+            <a:noAutofit/>
+          </a:bodyPr>
+          <a:lstStyle/>
+          <a:p>
+            <a:pPr algn="l" indent="0" marL="0">
+              <a:buNone/>
+            </a:pPr>
+            <a:r>
+              <a:rPr lang="en-US" sz="2200" dirty="0">
+                <a:solidFill>
+                  <a:srgbClr val="1B2236"/>
+                </a:solidFill>
+                <a:latin typeface="Lexend Deca" pitchFamily="34" charset="0"/>
+                <a:ea typeface="Lexend Deca" pitchFamily="34" charset="-122"/>
+                <a:cs typeface="Lexend Deca" pitchFamily="34" charset="-120"/>
+              </a:rPr>
+              <a:t>I </a:t>
+            </a:r>
+            <a:r>
+              <a:rPr lang="en-US" sz="2200" dirty="0" b="1">
+                <a:solidFill>
+                  <a:srgbClr val="1B2236"/>
+                </a:solidFill>
+                <a:latin typeface="Lexend Deca" pitchFamily="34" charset="0"/>
+                <a:ea typeface="Lexend Deca" pitchFamily="34" charset="-122"/>
+                <a:cs typeface="Lexend Deca" pitchFamily="34" charset="-120"/>
+              </a:rPr>
+              <a:t>felt</a:t>
+            </a:r>
+            <a:r>
+              <a:rPr lang="en-US" sz="2200" dirty="0">
+                <a:solidFill>
+                  <a:srgbClr val="1B2236"/>
+                </a:solidFill>
+                <a:latin typeface="Lexend Deca" pitchFamily="34" charset="0"/>
+                <a:ea typeface="Lexend Deca" pitchFamily="34" charset="-122"/>
+                <a:cs typeface="Lexend Deca" pitchFamily="34" charset="-120"/>
+              </a:rPr>
+              <a:t> nervous.</a:t>
+            </a:r>
+            <a:endParaRPr lang="en-US" sz="2200" dirty="0"/>
+          </a:p>
+          <a:p>
+            <a:pPr algn="l" indent="0" marL="0">
+              <a:buNone/>
+            </a:pPr>
+            <a:r>
+              <a:rPr lang="en-US" sz="2200" dirty="0">
+                <a:solidFill>
+                  <a:srgbClr val="1B2236"/>
+                </a:solidFill>
+                <a:latin typeface="Lexend Deca" pitchFamily="34" charset="0"/>
+                <a:ea typeface="Lexend Deca" pitchFamily="34" charset="-122"/>
+                <a:cs typeface="Lexend Deca" pitchFamily="34" charset="-120"/>
+              </a:rPr>
+              <a:t>I </a:t>
+            </a:r>
+            <a:r>
+              <a:rPr lang="en-US" sz="2200" dirty="0" b="1">
+                <a:solidFill>
+                  <a:srgbClr val="1B2236"/>
+                </a:solidFill>
+                <a:latin typeface="Lexend Deca" pitchFamily="34" charset="0"/>
+                <a:ea typeface="Lexend Deca" pitchFamily="34" charset="-122"/>
+                <a:cs typeface="Lexend Deca" pitchFamily="34" charset="-120"/>
+              </a:rPr>
+              <a:t>was</a:t>
+            </a:r>
+            <a:r>
+              <a:rPr lang="en-US" sz="2200" dirty="0">
+                <a:solidFill>
+                  <a:srgbClr val="1B2236"/>
+                </a:solidFill>
+                <a:latin typeface="Lexend Deca" pitchFamily="34" charset="0"/>
+                <a:ea typeface="Lexend Deca" pitchFamily="34" charset="-122"/>
+                <a:cs typeface="Lexend Deca" pitchFamily="34" charset="-120"/>
+              </a:rPr>
+              <a:t> shy.</a:t>
+            </a:r>
+            <a:endParaRPr lang="en-US" sz="2200" dirty="0"/>
+          </a:p>
+        </p:txBody>
+      </p:sp>
+      <p:sp>
+        <p:nvSpPr>
+          <p:cNvPr id="50" name="Highlight"/>
+          <p:cNvSpPr/>
+          <p:nvPr/>
+        </p:nvSpPr>
+        <p:spPr>
+          <a:xfrm>
+            <a:off x="1481328" y="5367528"/>
+            <a:ext cx="1188720" cy="548640"/>
+          </a:xfrm>
+          <a:prstGeom prst="roundRect">
+            <a:avLst>
+              <a:gd name="adj" fmla="val 22000"/>
+            </a:avLst>
+          </a:prstGeom>
+          <a:solidFill>
+            <a:srgbClr val="FFE28C"/>
+          </a:solidFill>
+          <a:ln w="38100">
+            <a:noFill/>
+          </a:ln>
+        </p:spPr>
+        <p:txBody>
+          <a:bodyPr wrap="square" lIns="73152" tIns="36576" rIns="73152" bIns="36576" rtlCol="0" anchor="ctr">
+            <a:noAutofit/>
+          </a:bodyPr>
+          <a:lstStyle/>
+          <a:p>
+            <a:pPr algn="l" indent="0" marL="0">
+              <a:buNone/>
+            </a:pPr>
+            <a:r>
+              <a:rPr lang="en-US" sz="2000" dirty="0">
+                <a:solidFill>
+                  <a:srgbClr val="1B2236"/>
+                </a:solidFill>
+                <a:latin typeface="Lexend Deca" pitchFamily="34" charset="0"/>
+                <a:ea typeface="Lexend Deca" pitchFamily="34" charset="-122"/>
+                <a:cs typeface="Lexend Deca" pitchFamily="34" charset="-120"/>
+              </a:rPr>
+              <a:t/>
+            </a:r>
+            <a:endParaRPr lang="en-US" sz="2000" dirty="0"/>
+          </a:p>
+        </p:txBody>
+      </p:sp>
+      <p:sp>
+        <p:nvSpPr>
+          <p:cNvPr id="51" name="Helper"/>
+          <p:cNvSpPr/>
+          <p:nvPr/>
+        </p:nvSpPr>
+        <p:spPr>
+          <a:xfrm>
+            <a:off x="1481328" y="5230368"/>
+            <a:ext cx="1188720" cy="822960"/>
+          </a:xfrm>
+          <a:prstGeom prst="rect">
+            <a:avLst/>
+          </a:prstGeom>
+          <a:noFill/>
+          <a:ln w="38100">
+            <a:noFill/>
+          </a:ln>
+        </p:spPr>
+        <p:txBody>
+          <a:bodyPr wrap="square" lIns="73152" tIns="36576" rIns="73152" bIns="36576" rtlCol="0" anchor="ctr">
+            <a:noAutofit/>
+          </a:bodyPr>
+          <a:lstStyle/>
+          <a:p>
+            <a:pPr algn="ctr" indent="0" marL="0">
+              <a:buNone/>
+            </a:pPr>
+            <a:r>
+              <a:rPr lang="en-US" sz="2600" dirty="0" b="1">
+                <a:solidFill>
+                  <a:srgbClr val="1B2236"/>
+                </a:solidFill>
+                <a:latin typeface="Lexend Deca" pitchFamily="34" charset="0"/>
+                <a:ea typeface="Lexend Deca" pitchFamily="34" charset="-122"/>
+                <a:cs typeface="Lexend Deca" pitchFamily="34" charset="-120"/>
+              </a:rPr>
+              <a:t>How</a:t>
+            </a:r>
+            <a:endParaRPr lang="en-US" sz="2600" dirty="0"/>
+          </a:p>
+        </p:txBody>
+      </p:sp>
+      <p:sp>
+        <p:nvSpPr>
+          <p:cNvPr id="52" name="Question"/>
+          <p:cNvSpPr/>
+          <p:nvPr/>
+        </p:nvSpPr>
+        <p:spPr>
+          <a:xfrm>
+            <a:off x="2697480" y="5230368"/>
+            <a:ext cx="3291840" cy="822960"/>
+          </a:xfrm>
+          <a:prstGeom prst="rect">
+            <a:avLst/>
+          </a:prstGeom>
+          <a:noFill/>
+          <a:ln w="38100">
+            <a:noFill/>
+          </a:ln>
+        </p:spPr>
+        <p:txBody>
+          <a:bodyPr wrap="square" lIns="73152" tIns="36576" rIns="73152" bIns="36576" rtlCol="0" anchor="ctr">
+            <a:noAutofit/>
+          </a:bodyPr>
+          <a:lstStyle/>
+          <a:p>
+            <a:pPr algn="l" indent="0" marL="0">
+              <a:buNone/>
+            </a:pPr>
+            <a:r>
+              <a:rPr lang="en-US" sz="2200" dirty="0" b="1">
+                <a:solidFill>
+                  <a:srgbClr val="1B2236"/>
+                </a:solidFill>
+                <a:latin typeface="Lexend Deca" pitchFamily="34" charset="0"/>
+                <a:ea typeface="Lexend Deca" pitchFamily="34" charset="-122"/>
+                <a:cs typeface="Lexend Deca" pitchFamily="34" charset="-120"/>
+              </a:rPr>
+              <a:t>do</a:t>
+            </a:r>
+            <a:r>
+              <a:rPr lang="en-US" sz="2200" dirty="0">
+                <a:solidFill>
+                  <a:srgbClr val="1B2236"/>
+                </a:solidFill>
+                <a:latin typeface="Lexend Deca" pitchFamily="34" charset="0"/>
+                <a:ea typeface="Lexend Deca" pitchFamily="34" charset="-122"/>
+                <a:cs typeface="Lexend Deca" pitchFamily="34" charset="-120"/>
+              </a:rPr>
+              <a:t> you feel now?</a:t>
+            </a:r>
+            <a:endParaRPr lang="en-US" sz="2200" dirty="0"/>
+          </a:p>
+        </p:txBody>
+      </p:sp>
+      <p:sp>
+        <p:nvSpPr>
+          <p:cNvPr id="54" name="Answer bg"/>
+          <p:cNvSpPr/>
+          <p:nvPr/>
+        </p:nvSpPr>
+        <p:spPr>
+          <a:xfrm>
+            <a:off x="6949440" y="5248656"/>
+            <a:ext cx="4526280" cy="786384"/>
+          </a:xfrm>
+          <a:prstGeom prst="roundRect">
+            <a:avLst>
+              <a:gd name="adj" fmla="val 22000"/>
+            </a:avLst>
+          </a:prstGeom>
+          <a:solidFill>
+            <a:srgbClr val="FFFFFF"/>
+          </a:solidFill>
+          <a:ln w="38100">
+            <a:noFill/>
+          </a:ln>
+        </p:spPr>
+        <p:txBody>
+          <a:bodyPr wrap="square" lIns="73152" tIns="36576" rIns="73152" bIns="36576" rtlCol="0" anchor="ctr">
+            <a:noAutofit/>
+          </a:bodyPr>
+          <a:lstStyle/>
+          <a:p>
+            <a:pPr algn="l" indent="0" marL="0">
+              <a:buNone/>
+            </a:pPr>
+            <a:r>
+              <a:rPr lang="en-US" sz="2000" dirty="0">
+                <a:solidFill>
+                  <a:srgbClr val="1B2236"/>
+                </a:solidFill>
+                <a:latin typeface="Lexend Deca" pitchFamily="34" charset="0"/>
+                <a:ea typeface="Lexend Deca" pitchFamily="34" charset="-122"/>
+                <a:cs typeface="Lexend Deca" pitchFamily="34" charset="-120"/>
+              </a:rPr>
+              <a:t/>
+            </a:r>
+            <a:endParaRPr lang="en-US" sz="2000" dirty="0"/>
+          </a:p>
+        </p:txBody>
+      </p:sp>
+      <p:sp>
+        <p:nvSpPr>
+          <p:cNvPr id="53" name="Answer"/>
+          <p:cNvSpPr/>
+          <p:nvPr/>
+        </p:nvSpPr>
+        <p:spPr>
+          <a:xfrm>
+            <a:off x="6949440" y="5230368"/>
+            <a:ext cx="4526280" cy="822960"/>
+          </a:xfrm>
+          <a:prstGeom prst="rect">
+            <a:avLst/>
+          </a:prstGeom>
+          <a:noFill/>
+          <a:ln w="38100">
+            <a:noFill/>
+          </a:ln>
+        </p:spPr>
+        <p:txBody>
+          <a:bodyPr wrap="square" lIns="73152" tIns="36576" rIns="73152" bIns="36576" rtlCol="0" anchor="ctr">
+            <a:noAutofit/>
+          </a:bodyPr>
+          <a:lstStyle/>
+          <a:p>
+            <a:pPr algn="l" indent="0" marL="0">
+              <a:buNone/>
+            </a:pPr>
+            <a:r>
+              <a:rPr lang="en-US" sz="2200" dirty="0">
+                <a:solidFill>
+                  <a:srgbClr val="1B2236"/>
+                </a:solidFill>
+                <a:latin typeface="Lexend Deca" pitchFamily="34" charset="0"/>
+                <a:ea typeface="Lexend Deca" pitchFamily="34" charset="-122"/>
+                <a:cs typeface="Lexend Deca" pitchFamily="34" charset="-120"/>
+              </a:rPr>
+              <a:t>I </a:t>
+            </a:r>
+            <a:r>
+              <a:rPr lang="en-US" sz="2200" dirty="0" b="1">
+                <a:solidFill>
+                  <a:srgbClr val="1B2236"/>
+                </a:solidFill>
+                <a:latin typeface="Lexend Deca" pitchFamily="34" charset="0"/>
+                <a:ea typeface="Lexend Deca" pitchFamily="34" charset="-122"/>
+                <a:cs typeface="Lexend Deca" pitchFamily="34" charset="-120"/>
+              </a:rPr>
+              <a:t>feel</a:t>
+            </a:r>
+            <a:r>
+              <a:rPr lang="en-US" sz="2200" dirty="0">
+                <a:solidFill>
+                  <a:srgbClr val="1B2236"/>
+                </a:solidFill>
+                <a:latin typeface="Lexend Deca" pitchFamily="34" charset="0"/>
+                <a:ea typeface="Lexend Deca" pitchFamily="34" charset="-122"/>
+                <a:cs typeface="Lexend Deca" pitchFamily="34" charset="-120"/>
+              </a:rPr>
+              <a:t> proud.</a:t>
+            </a:r>
+            <a:endParaRPr lang="en-US" sz="2200" dirty="0"/>
+          </a:p>
+          <a:p>
+            <a:pPr algn="l" indent="0" marL="0">
+              <a:buNone/>
+            </a:pPr>
+            <a:r>
+              <a:rPr lang="en-US" sz="2200" dirty="0">
+                <a:solidFill>
+                  <a:srgbClr val="1B2236"/>
+                </a:solidFill>
+                <a:latin typeface="Lexend Deca" pitchFamily="34" charset="0"/>
+                <a:ea typeface="Lexend Deca" pitchFamily="34" charset="-122"/>
+                <a:cs typeface="Lexend Deca" pitchFamily="34" charset="-120"/>
+              </a:rPr>
+              <a:t>I </a:t>
+            </a:r>
+            <a:r>
+              <a:rPr lang="en-US" sz="2200" dirty="0" b="1">
+                <a:solidFill>
+                  <a:srgbClr val="1B2236"/>
+                </a:solidFill>
+                <a:latin typeface="Lexend Deca" pitchFamily="34" charset="0"/>
+                <a:ea typeface="Lexend Deca" pitchFamily="34" charset="-122"/>
+                <a:cs typeface="Lexend Deca" pitchFamily="34" charset="-120"/>
+              </a:rPr>
+              <a:t>am</a:t>
+            </a:r>
+            <a:r>
+              <a:rPr lang="en-US" sz="2200" dirty="0">
+                <a:solidFill>
+                  <a:srgbClr val="1B2236"/>
+                </a:solidFill>
+                <a:latin typeface="Lexend Deca" pitchFamily="34" charset="0"/>
+                <a:ea typeface="Lexend Deca" pitchFamily="34" charset="-122"/>
+                <a:cs typeface="Lexend Deca" pitchFamily="34" charset="-120"/>
+              </a:rPr>
+              <a:t> happy.</a:t>
+            </a:r>
+            <a:endParaRPr lang="en-US" sz="2200" dirty="0"/>
+          </a:p>
+        </p:txBody>
+      </p:sp>
+    </p:spTree>
+  </p:cSld>
+  <p:clrMapOvr>
+    <a:masterClrMapping/>
+  </p:clrMapOvr>
+  <p:timing>
+    <p:tnLst>
+      <p:par>
+        <p:cTn id="1" dur="indefinite" restart="never" nodeType="tmRoot">
+          <p:childTnLst>
+            <p:seq concurrent="1" nextAc="seek">
+              <p:cTn id="2" dur="indefinite" nodeType="mainSeq">
+                <p:childTnLst>
+                  <p:par>
+                    <p:cTn id="3" fill="hold">
+                      <p:stCondLst>
+                        <p:cond delay="indefinite"/>
+                      </p:stCondLst>
+                      <p:childTnLst>
+                        <p:par>
+                          <p:cTn id="4" fill="hold">
+                            <p:stCondLst>
+                              <p:cond delay="0"/>
+                            </p:stCondLst>
+                            <p:childTnLst>
+                              <p:par>
+                                <p:cTn id="5" presetID="10" presetClass="entr" presetSubtype="0" fill="hold" nodeType="clickEffect">
+                                  <p:stCondLst>
+                                    <p:cond delay="0"/>
+                                  </p:stCondLst>
+                                  <p:childTnLst>
+                                    <p:set>
+                                      <p:cBhvr>
+                                        <p:cTn id="6" dur="1" fill="hold">
+                                          <p:stCondLst>
+                                            <p:cond delay="0"/>
+                                          </p:stCondLst>
+                                        </p:cTn>
+                                        <p:tgtEl>
+                                          <p:spTgt spid="45"/>
+                                        </p:tgtEl>
+                                        <p:attrNameLst>
+                                          <p:attrName>style.visibility</p:attrName>
+                                        </p:attrNameLst>
+                                      </p:cBhvr>
+                                      <p:to>
+                                        <p:strVal val="visible"/>
+                                      </p:to>
+                                    </p:set>
+                                    <p:animEffect transition="in" filter="fade">
+                                      <p:cBhvr>
+                                        <p:cTn id="7" dur="400"/>
+                                        <p:tgtEl>
+                                          <p:spTgt spid="45"/>
+                                        </p:tgtEl>
+                                      </p:cBhvr>
+                                    </p:animEffect>
+                                  </p:childTnLst>
+                                </p:cTn>
+                              </p:par>
+                              <p:par>
+                                <p:cTn id="8" presetID="10" presetClass="entr" presetSubtype="0" fill="hold" nodeType="withEffect">
+                                  <p:stCondLst>
+                                    <p:cond delay="0"/>
+                                  </p:stCondLst>
+                                  <p:childTnLst>
+                                    <p:set>
+                                      <p:cBhvr>
+                                        <p:cTn id="9" dur="1" fill="hold">
+                                          <p:stCondLst>
+                                            <p:cond delay="0"/>
+                                          </p:stCondLst>
+                                        </p:cTn>
+                                        <p:tgtEl>
+                                          <p:spTgt spid="49"/>
+                                        </p:tgtEl>
+                                        <p:attrNameLst>
+                                          <p:attrName>style.visibility</p:attrName>
+                                        </p:attrNameLst>
+                                      </p:cBhvr>
+                                      <p:to>
+                                        <p:strVal val="visible"/>
+                                      </p:to>
+                                    </p:set>
+                                    <p:animEffect transition="in" filter="fade">
+                                      <p:cBhvr>
+                                        <p:cTn id="10" dur="400"/>
+                                        <p:tgtEl>
+                                          <p:spTgt spid="49"/>
+                                        </p:tgtEl>
+                                      </p:cBhvr>
+                                    </p:animEffect>
+                                  </p:childTnLst>
+                                </p:cTn>
+                              </p:par>
+                            </p:childTnLst>
+                          </p:cTn>
+                        </p:par>
+                      </p:childTnLst>
+                    </p:cTn>
+                  </p:par>
+                  <p:par>
+                    <p:cTn id="11" fill="hold">
+                      <p:stCondLst>
+                        <p:cond delay="indefinite"/>
+                      </p:stCondLst>
+                      <p:childTnLst>
+                        <p:par>
+                          <p:cTn id="12" fill="hold">
+                            <p:stCondLst>
+                              <p:cond delay="0"/>
+                            </p:stCondLst>
+                            <p:childTnLst>
+                              <p:par>
+                                <p:cTn id="13" presetID="10" presetClass="entr" presetSubtype="0" fill="hold" nodeType="clickEffect">
+                                  <p:stCondLst>
+                                    <p:cond delay="0"/>
+                                  </p:stCondLst>
+                                  <p:childTnLst>
+                                    <p:set>
+                                      <p:cBhvr>
+                                        <p:cTn id="14" dur="1" fill="hold">
+                                          <p:stCondLst>
+                                            <p:cond delay="0"/>
+                                          </p:stCondLst>
+                                        </p:cTn>
+                                        <p:tgtEl>
+                                          <p:spTgt spid="50"/>
+                                        </p:tgtEl>
+                                        <p:attrNameLst>
+                                          <p:attrName>style.visibility</p:attrName>
+                                        </p:attrNameLst>
+                                      </p:cBhvr>
+                                      <p:to>
+                                        <p:strVal val="visible"/>
+                                      </p:to>
+                                    </p:set>
+                                    <p:animEffect transition="in" filter="fade">
+                                      <p:cBhvr>
+                                        <p:cTn id="15" dur="400"/>
+                                        <p:tgtEl>
+                                          <p:spTgt spid="50"/>
+                                        </p:tgtEl>
+                                      </p:cBhvr>
+                                    </p:animEffect>
+                                  </p:childTnLst>
+                                </p:cTn>
+                              </p:par>
+                              <p:par>
+                                <p:cTn id="16" presetID="10" presetClass="entr" presetSubtype="0" fill="hold" nodeType="withEffect">
+                                  <p:stCondLst>
+                                    <p:cond delay="0"/>
+                                  </p:stCondLst>
+                                  <p:childTnLst>
+                                    <p:set>
+                                      <p:cBhvr>
+                                        <p:cTn id="17" dur="1" fill="hold">
+                                          <p:stCondLst>
+                                            <p:cond delay="0"/>
+                                          </p:stCondLst>
+                                        </p:cTn>
+                                        <p:tgtEl>
+                                          <p:spTgt spid="54"/>
+                                        </p:tgtEl>
+                                        <p:attrNameLst>
+                                          <p:attrName>style.visibility</p:attrName>
+                                        </p:attrNameLst>
+                                      </p:cBhvr>
+                                      <p:to>
+                                        <p:strVal val="visible"/>
+                                      </p:to>
+                                    </p:set>
+                                    <p:animEffect transition="in" filter="fade">
+                                      <p:cBhvr>
+                                        <p:cTn id="18" dur="400"/>
+                                        <p:tgtEl>
+                                          <p:spTgt spid="54"/>
+                                        </p:tgtEl>
+                                      </p:cBhvr>
+                                    </p:animEffect>
+                                  </p:childTnLst>
+                                </p:cTn>
+                              </p:par>
+                            </p:childTnLst>
+                          </p:cTn>
+                        </p:par>
+                      </p:childTnLst>
+                    </p:cTn>
+                  </p:par>
+                </p:childTnLst>
+              </p:cTn>
+              <p:prevCondLst>
+                <p:cond evt="onPrev" delay="0">
+                  <p:tgtEl>
+                    <p:sldTgt/>
+                  </p:tgtEl>
+                </p:cond>
+              </p:prevCondLst>
+              <p:nextCondLst>
+                <p:cond evt="onNext" delay="0">
+                  <p:tgtEl>
+                    <p:sldTgt/>
+                  </p:tgtEl>
+                </p:cond>
+              </p:nextCondLst>
+            </p:seq>
+          </p:childTnLst>
+        </p:cTn>
+      </p:par>
+    </p:tnLst>
+  </p:timing>
+</p:sld>
+</file>
+
+<file path=ppt/slides/slide11.xml><?xml version="1.0" encoding="utf-8"?>
 <p:sld xmlns:a="http://schemas.openxmlformats.org/drawingml/2006/main" xmlns:r="http://schemas.openxmlformats.org/officeDocument/2006/relationships" xmlns:p="http://schemas.openxmlformats.org/presentationml/2006/main">
   <p:cSld name="Slide 5">
     <p:bg>
@@ -4534,1203 +5731,6 @@
                                         <p:cTn id="26" dur="400"/>
                                         <p:tgtEl>
                                           <p:spTgt spid="59"/>
-                                        </p:tgtEl>
-                                      </p:cBhvr>
-                                    </p:animEffect>
-                                  </p:childTnLst>
-                                </p:cTn>
-                              </p:par>
-                            </p:childTnLst>
-                          </p:cTn>
-                        </p:par>
-                      </p:childTnLst>
-                    </p:cTn>
-                  </p:par>
-                </p:childTnLst>
-              </p:cTn>
-              <p:prevCondLst>
-                <p:cond evt="onPrev" delay="0">
-                  <p:tgtEl>
-                    <p:sldTgt/>
-                  </p:tgtEl>
-                </p:cond>
-              </p:prevCondLst>
-              <p:nextCondLst>
-                <p:cond evt="onNext" delay="0">
-                  <p:tgtEl>
-                    <p:sldTgt/>
-                  </p:tgtEl>
-                </p:cond>
-              </p:nextCondLst>
-            </p:seq>
-          </p:childTnLst>
-        </p:cTn>
-      </p:par>
-    </p:tnLst>
-  </p:timing>
-</p:sld>
-</file>
-
-<file path=ppt/slides/slide11.xml><?xml version="1.0" encoding="utf-8"?>
-<p:sld xmlns:a="http://schemas.openxmlformats.org/drawingml/2006/main" xmlns:r="http://schemas.openxmlformats.org/officeDocument/2006/relationships" xmlns:p="http://schemas.openxmlformats.org/presentationml/2006/main">
-  <p:cSld name="Slide 4">
-    <p:bg>
-      <p:bgPr>
-        <a:solidFill>
-          <a:srgbClr val="F1F5FB"/>
-        </a:solidFill>
-      </p:bgPr>
-    </p:bg>
-    <p:spTree>
-      <p:nvGrpSpPr>
-        <p:cNvPr id="1" name=""/>
-        <p:cNvGrpSpPr/>
-        <p:nvPr/>
-      </p:nvGrpSpPr>
-      <p:grpSpPr>
-        <a:xfrm>
-          <a:off x="0" y="0"/>
-          <a:ext cx="0" cy="0"/>
-          <a:chOff x="0" y="0"/>
-          <a:chExt cx="0" cy="0"/>
-        </a:xfrm>
-      </p:grpSpPr>
-      <p:sp>
-        <p:nvSpPr>
-          <p:cNvPr id="2" name="Shape 0"/>
-          <p:cNvSpPr/>
-          <p:nvPr/>
-        </p:nvSpPr>
-        <p:spPr>
-          <a:xfrm>
-            <a:off x="6742786" y="3649370"/>
-            <a:ext cx="4912157" cy="2561234"/>
-          </a:xfrm>
-          <a:prstGeom prst="round1Rect">
-            <a:avLst>
-              <a:gd name="adj" fmla="val 23087"/>
-            </a:avLst>
-          </a:prstGeom>
-          <a:solidFill>
-            <a:srgbClr val="B9D2F7"/>
-          </a:solidFill>
-          <a:ln w="76200">
-            <a:solidFill>
-              <a:srgbClr val="FFFFFF"/>
-            </a:solidFill>
-            <a:prstDash val="solid"/>
-          </a:ln>
-        </p:spPr>
-        <p:txBody>
-          <a:bodyPr/>
-          <a:p/>
-        </p:txBody>
-      </p:sp>
-      <p:sp>
-        <p:nvSpPr>
-          <p:cNvPr id="5" name="Shape 3"/>
-          <p:cNvSpPr/>
-          <p:nvPr/>
-        </p:nvSpPr>
-        <p:spPr>
-          <a:xfrm>
-            <a:off x="560116" y="1350752"/>
-            <a:ext cx="5663794" cy="1566367"/>
-          </a:xfrm>
-          <a:prstGeom prst="roundRect">
-            <a:avLst>
-              <a:gd name="adj" fmla="val 16667"/>
-            </a:avLst>
-          </a:prstGeom>
-          <a:solidFill>
-            <a:srgbClr val="8FAFE3"/>
-          </a:solidFill>
-          <a:ln/>
-        </p:spPr>
-        <p:txBody>
-          <a:bodyPr/>
-          <a:p/>
-        </p:txBody>
-      </p:sp>
-      <p:sp>
-        <p:nvSpPr>
-          <p:cNvPr id="6" name="Shape 4"/>
-          <p:cNvSpPr/>
-          <p:nvPr/>
-        </p:nvSpPr>
-        <p:spPr>
-          <a:xfrm>
-            <a:off x="593446" y="1286561"/>
-            <a:ext cx="5663794" cy="1566367"/>
-          </a:xfrm>
-          <a:prstGeom prst="roundRect">
-            <a:avLst>
-              <a:gd name="adj" fmla="val 16667"/>
-            </a:avLst>
-          </a:prstGeom>
-          <a:solidFill>
-            <a:srgbClr val="FFFFFF"/>
-          </a:solidFill>
-          <a:ln/>
-        </p:spPr>
-        <p:txBody>
-          <a:bodyPr/>
-          <a:p/>
-        </p:txBody>
-      </p:sp>
-      <p:sp>
-        <p:nvSpPr>
-          <p:cNvPr id="7" name="Text 5"/>
-          <p:cNvSpPr/>
-          <p:nvPr/>
-        </p:nvSpPr>
-        <p:spPr>
-          <a:xfrm>
-            <a:off x="832104" y="1371600"/>
-            <a:ext cx="5257800" cy="1417320"/>
-          </a:xfrm>
-          <a:prstGeom prst="rect">
-            <a:avLst/>
-          </a:prstGeom>
-          <a:noFill/>
-          <a:ln/>
-        </p:spPr>
-        <p:txBody>
-          <a:bodyPr wrap="square" rtlCol="0" anchor="ctr"/>
-          <a:lstStyle/>
-          <a:p>
-            <a:pPr algn="l" indent="0" marL="0">
-              <a:buNone/>
-            </a:pPr>
-            <a:r>
-              <a:rPr lang="en-US" sz="2000" dirty="0" b="1">
-                <a:solidFill>
-                  <a:srgbClr val="5B3FC4"/>
-                </a:solidFill>
-                <a:latin typeface="Lexend Deca" pitchFamily="34" charset="0"/>
-                <a:ea typeface="Lexend Deca" pitchFamily="34" charset="-122"/>
-                <a:cs typeface="Lexend Deca" pitchFamily="34" charset="-120"/>
-              </a:rPr>
-              <a:t>Grammar Box 2</a:t>
-            </a:r>
-            <a:endParaRPr lang="en-US" sz="2000" dirty="0"/>
-          </a:p>
-          <a:p>
-            <a:pPr algn="l" indent="0" marL="0">
-              <a:buNone/>
-            </a:pPr>
-            <a:r>
-              <a:rPr lang="en-US" sz="3200" dirty="0" b="1">
-                <a:solidFill>
-                  <a:srgbClr val="1B2236"/>
-                </a:solidFill>
-                <a:latin typeface="Lexend Deca" pitchFamily="34" charset="0"/>
-                <a:ea typeface="Lexend Deca" pitchFamily="34" charset="-122"/>
-                <a:cs typeface="Lexend Deca" pitchFamily="34" charset="-120"/>
-              </a:rPr>
-              <a:t>Feelings Then</a:t>
-            </a:r>
-            <a:endParaRPr lang="en-US" sz="3200" dirty="0"/>
-          </a:p>
-          <a:p>
-            <a:pPr algn="l" indent="0" marL="0">
-              <a:buNone/>
-            </a:pPr>
-            <a:r>
-              <a:rPr lang="en-US" sz="3200" dirty="0" b="1">
-                <a:solidFill>
-                  <a:srgbClr val="1B2236"/>
-                </a:solidFill>
-                <a:latin typeface="Lexend Deca" pitchFamily="34" charset="0"/>
-                <a:ea typeface="Lexend Deca" pitchFamily="34" charset="-122"/>
-                <a:cs typeface="Lexend Deca" pitchFamily="34" charset="-120"/>
-              </a:rPr>
-              <a:t>and Now</a:t>
-            </a:r>
-            <a:endParaRPr lang="en-US" sz="3200" dirty="0"/>
-          </a:p>
-        </p:txBody>
-      </p:sp>
-      <p:sp>
-        <p:nvSpPr>
-          <p:cNvPr id="8" name="Shape 6"/>
-          <p:cNvSpPr/>
-          <p:nvPr/>
-        </p:nvSpPr>
-        <p:spPr>
-          <a:xfrm>
-            <a:off x="1305763" y="3649370"/>
-            <a:ext cx="4790542" cy="2599639"/>
-          </a:xfrm>
-          <a:prstGeom prst="round1Rect">
-            <a:avLst>
-              <a:gd name="adj" fmla="val 23087"/>
-            </a:avLst>
-          </a:prstGeom>
-          <a:solidFill>
-            <a:srgbClr val="FFFFFF"/>
-          </a:solidFill>
-          <a:ln w="25400">
-            <a:solidFill>
-              <a:srgbClr val="8FAFE3"/>
-            </a:solidFill>
-            <a:prstDash val="solid"/>
-          </a:ln>
-        </p:spPr>
-        <p:txBody>
-          <a:bodyPr/>
-          <a:p/>
-        </p:txBody>
-      </p:sp>
-      <p:sp>
-        <p:nvSpPr>
-          <p:cNvPr id="15" name="Shape 13"/>
-          <p:cNvSpPr/>
-          <p:nvPr/>
-        </p:nvSpPr>
-        <p:spPr>
-          <a:xfrm>
-            <a:off x="741578" y="3253435"/>
-            <a:ext cx="1024128" cy="967435"/>
-          </a:xfrm>
-          <a:prstGeom prst="star10">
-            <a:avLst/>
-          </a:prstGeom>
-          <a:solidFill>
-            <a:srgbClr val="8FAFE3"/>
-          </a:solidFill>
-          <a:ln/>
-        </p:spPr>
-        <p:txBody>
-          <a:bodyPr/>
-          <a:p/>
-        </p:txBody>
-      </p:sp>
-      <p:sp>
-        <p:nvSpPr>
-          <p:cNvPr id="16" name="Shape 14"/>
-          <p:cNvSpPr/>
-          <p:nvPr/>
-        </p:nvSpPr>
-        <p:spPr>
-          <a:xfrm>
-            <a:off x="823874" y="3240634"/>
-            <a:ext cx="1042416" cy="1042416"/>
-          </a:xfrm>
-          <a:prstGeom prst="star10">
-            <a:avLst/>
-          </a:prstGeom>
-          <a:solidFill>
-            <a:srgbClr val="FFE28C"/>
-          </a:solidFill>
-          <a:ln/>
-        </p:spPr>
-        <p:txBody>
-          <a:bodyPr/>
-          <a:p/>
-        </p:txBody>
-      </p:sp>
-      <p:sp>
-        <p:nvSpPr>
-          <p:cNvPr id="17" name="Shape 15"/>
-          <p:cNvSpPr/>
-          <p:nvPr/>
-        </p:nvSpPr>
-        <p:spPr>
-          <a:xfrm rot="900000">
-            <a:off x="1107338" y="3539642"/>
-            <a:ext cx="445313" cy="445313"/>
-          </a:xfrm>
-          <a:prstGeom prst="mathPlus">
-            <a:avLst/>
-          </a:prstGeom>
-          <a:solidFill>
-            <a:srgbClr val="1B2236"/>
-          </a:solidFill>
-          <a:ln/>
-        </p:spPr>
-        <p:txBody>
-          <a:bodyPr/>
-          <a:p/>
-        </p:txBody>
-      </p:sp>
-      <p:pic>
-        <p:nvPicPr>
-          <p:cNvPr id="42" name="Picture 42" descr="L13_proud.png"/>
-          <p:cNvPicPr>
-            <a:picLocks noChangeAspect="1"/>
-          </p:cNvPicPr>
-          <p:nvPr/>
-        </p:nvPicPr>
-        <p:blipFill>
-          <a:blip r:embed="rIdQ1"/>
-          <a:stretch>
-            <a:fillRect/>
-          </a:stretch>
-        </p:blipFill>
-        <p:spPr>
-          <a:xfrm>
-            <a:off x="7598664" y="1216152"/>
-            <a:ext cx="3254350" cy="2278045"/>
-          </a:xfrm>
-          <a:prstGeom prst="rect">
-            <a:avLst/>
-          </a:prstGeom>
-        </p:spPr>
-      </p:pic>
-      <p:sp>
-        <p:nvSpPr>
-          <p:cNvPr id="43" name="Q head"/>
-          <p:cNvSpPr/>
-          <p:nvPr/>
-        </p:nvSpPr>
-        <p:spPr>
-          <a:xfrm>
-            <a:off x="1920240" y="3794760"/>
-            <a:ext cx="4023360" cy="457200"/>
-          </a:xfrm>
-          <a:prstGeom prst="rect">
-            <a:avLst/>
-          </a:prstGeom>
-          <a:noFill/>
-          <a:ln w="38100">
-            <a:noFill/>
-          </a:ln>
-        </p:spPr>
-        <p:txBody>
-          <a:bodyPr wrap="square" lIns="73152" tIns="36576" rIns="73152" bIns="36576" rtlCol="0" anchor="ctr">
-            <a:noAutofit/>
-          </a:bodyPr>
-          <a:lstStyle/>
-          <a:p>
-            <a:pPr algn="l" indent="0" marL="0">
-              <a:buNone/>
-            </a:pPr>
-            <a:r>
-              <a:rPr lang="en-US" sz="2000" dirty="0" b="1">
-                <a:solidFill>
-                  <a:srgbClr val="5B3FC4"/>
-                </a:solidFill>
-                <a:latin typeface="Lexend Deca" pitchFamily="34" charset="0"/>
-                <a:ea typeface="Lexend Deca" pitchFamily="34" charset="-122"/>
-                <a:cs typeface="Lexend Deca" pitchFamily="34" charset="-120"/>
-              </a:rPr>
-              <a:t>QUESTION</a:t>
-            </a:r>
-            <a:endParaRPr lang="en-US" sz="2000" dirty="0"/>
-          </a:p>
-        </p:txBody>
-      </p:sp>
-      <p:sp>
-        <p:nvSpPr>
-          <p:cNvPr id="44" name="A head"/>
-          <p:cNvSpPr/>
-          <p:nvPr/>
-        </p:nvSpPr>
-        <p:spPr>
-          <a:xfrm>
-            <a:off x="7040880" y="3794760"/>
-            <a:ext cx="4480560" cy="457200"/>
-          </a:xfrm>
-          <a:prstGeom prst="rect">
-            <a:avLst/>
-          </a:prstGeom>
-          <a:noFill/>
-          <a:ln w="38100">
-            <a:noFill/>
-          </a:ln>
-        </p:spPr>
-        <p:txBody>
-          <a:bodyPr wrap="square" lIns="73152" tIns="36576" rIns="73152" bIns="36576" rtlCol="0" anchor="ctr">
-            <a:noAutofit/>
-          </a:bodyPr>
-          <a:lstStyle/>
-          <a:p>
-            <a:pPr algn="l" indent="0" marL="0">
-              <a:buNone/>
-            </a:pPr>
-            <a:r>
-              <a:rPr lang="en-US" sz="2000" dirty="0" b="1">
-                <a:solidFill>
-                  <a:srgbClr val="5B3FC4"/>
-                </a:solidFill>
-                <a:latin typeface="Lexend Deca" pitchFamily="34" charset="0"/>
-                <a:ea typeface="Lexend Deca" pitchFamily="34" charset="-122"/>
-                <a:cs typeface="Lexend Deca" pitchFamily="34" charset="-120"/>
-              </a:rPr>
-              <a:t>ANSWER</a:t>
-            </a:r>
-            <a:endParaRPr lang="en-US" sz="2000" dirty="0"/>
-          </a:p>
-        </p:txBody>
-      </p:sp>
-      <p:sp>
-        <p:nvSpPr>
-          <p:cNvPr id="45" name="Highlight"/>
-          <p:cNvSpPr/>
-          <p:nvPr/>
-        </p:nvSpPr>
-        <p:spPr>
-          <a:xfrm>
-            <a:off x="1481328" y="4453128"/>
-            <a:ext cx="1188720" cy="548640"/>
-          </a:xfrm>
-          <a:prstGeom prst="roundRect">
-            <a:avLst>
-              <a:gd name="adj" fmla="val 22000"/>
-            </a:avLst>
-          </a:prstGeom>
-          <a:solidFill>
-            <a:srgbClr val="FFE28C"/>
-          </a:solidFill>
-          <a:ln w="38100">
-            <a:noFill/>
-          </a:ln>
-        </p:spPr>
-        <p:txBody>
-          <a:bodyPr wrap="square" lIns="73152" tIns="36576" rIns="73152" bIns="36576" rtlCol="0" anchor="ctr">
-            <a:noAutofit/>
-          </a:bodyPr>
-          <a:lstStyle/>
-          <a:p>
-            <a:pPr algn="l" indent="0" marL="0">
-              <a:buNone/>
-            </a:pPr>
-            <a:r>
-              <a:rPr lang="en-US" sz="2000" dirty="0">
-                <a:solidFill>
-                  <a:srgbClr val="1B2236"/>
-                </a:solidFill>
-                <a:latin typeface="Lexend Deca" pitchFamily="34" charset="0"/>
-                <a:ea typeface="Lexend Deca" pitchFamily="34" charset="-122"/>
-                <a:cs typeface="Lexend Deca" pitchFamily="34" charset="-120"/>
-              </a:rPr>
-              <a:t/>
-            </a:r>
-            <a:endParaRPr lang="en-US" sz="2000" dirty="0"/>
-          </a:p>
-        </p:txBody>
-      </p:sp>
-      <p:sp>
-        <p:nvSpPr>
-          <p:cNvPr id="46" name="Helper"/>
-          <p:cNvSpPr/>
-          <p:nvPr/>
-        </p:nvSpPr>
-        <p:spPr>
-          <a:xfrm>
-            <a:off x="1481328" y="4315968"/>
-            <a:ext cx="1188720" cy="822960"/>
-          </a:xfrm>
-          <a:prstGeom prst="rect">
-            <a:avLst/>
-          </a:prstGeom>
-          <a:noFill/>
-          <a:ln w="38100">
-            <a:noFill/>
-          </a:ln>
-        </p:spPr>
-        <p:txBody>
-          <a:bodyPr wrap="square" lIns="73152" tIns="36576" rIns="73152" bIns="36576" rtlCol="0" anchor="ctr">
-            <a:noAutofit/>
-          </a:bodyPr>
-          <a:lstStyle/>
-          <a:p>
-            <a:pPr algn="ctr" indent="0" marL="0">
-              <a:buNone/>
-            </a:pPr>
-            <a:r>
-              <a:rPr lang="en-US" sz="2600" dirty="0" b="1">
-                <a:solidFill>
-                  <a:srgbClr val="1B2236"/>
-                </a:solidFill>
-                <a:latin typeface="Lexend Deca" pitchFamily="34" charset="0"/>
-                <a:ea typeface="Lexend Deca" pitchFamily="34" charset="-122"/>
-                <a:cs typeface="Lexend Deca" pitchFamily="34" charset="-120"/>
-              </a:rPr>
-              <a:t>How</a:t>
-            </a:r>
-            <a:endParaRPr lang="en-US" sz="2600" dirty="0"/>
-          </a:p>
-        </p:txBody>
-      </p:sp>
-      <p:sp>
-        <p:nvSpPr>
-          <p:cNvPr id="47" name="Question"/>
-          <p:cNvSpPr/>
-          <p:nvPr/>
-        </p:nvSpPr>
-        <p:spPr>
-          <a:xfrm>
-            <a:off x="2697480" y="4315968"/>
-            <a:ext cx="3291840" cy="822960"/>
-          </a:xfrm>
-          <a:prstGeom prst="rect">
-            <a:avLst/>
-          </a:prstGeom>
-          <a:noFill/>
-          <a:ln w="38100">
-            <a:noFill/>
-          </a:ln>
-        </p:spPr>
-        <p:txBody>
-          <a:bodyPr wrap="square" lIns="73152" tIns="36576" rIns="73152" bIns="36576" rtlCol="0" anchor="ctr">
-            <a:noAutofit/>
-          </a:bodyPr>
-          <a:lstStyle/>
-          <a:p>
-            <a:pPr algn="l" indent="0" marL="0">
-              <a:buNone/>
-            </a:pPr>
-            <a:r>
-              <a:rPr lang="en-US" sz="2200" dirty="0" b="1">
-                <a:solidFill>
-                  <a:srgbClr val="1B2236"/>
-                </a:solidFill>
-                <a:latin typeface="Lexend Deca" pitchFamily="34" charset="0"/>
-                <a:ea typeface="Lexend Deca" pitchFamily="34" charset="-122"/>
-                <a:cs typeface="Lexend Deca" pitchFamily="34" charset="-120"/>
-              </a:rPr>
-              <a:t>did</a:t>
-            </a:r>
-            <a:r>
-              <a:rPr lang="en-US" sz="2200" dirty="0">
-                <a:solidFill>
-                  <a:srgbClr val="1B2236"/>
-                </a:solidFill>
-                <a:latin typeface="Lexend Deca" pitchFamily="34" charset="0"/>
-                <a:ea typeface="Lexend Deca" pitchFamily="34" charset="-122"/>
-                <a:cs typeface="Lexend Deca" pitchFamily="34" charset="-120"/>
-              </a:rPr>
-              <a:t> you feel in the first class?</a:t>
-            </a:r>
-            <a:endParaRPr lang="en-US" sz="2200" dirty="0"/>
-          </a:p>
-        </p:txBody>
-      </p:sp>
-      <p:sp>
-        <p:nvSpPr>
-          <p:cNvPr id="49" name="Answer bg"/>
-          <p:cNvSpPr/>
-          <p:nvPr/>
-        </p:nvSpPr>
-        <p:spPr>
-          <a:xfrm>
-            <a:off x="6949440" y="4334256"/>
-            <a:ext cx="4526280" cy="786384"/>
-          </a:xfrm>
-          <a:prstGeom prst="roundRect">
-            <a:avLst>
-              <a:gd name="adj" fmla="val 22000"/>
-            </a:avLst>
-          </a:prstGeom>
-          <a:solidFill>
-            <a:srgbClr val="FFFFFF"/>
-          </a:solidFill>
-          <a:ln w="38100">
-            <a:noFill/>
-          </a:ln>
-        </p:spPr>
-        <p:txBody>
-          <a:bodyPr wrap="square" lIns="73152" tIns="36576" rIns="73152" bIns="36576" rtlCol="0" anchor="ctr">
-            <a:noAutofit/>
-          </a:bodyPr>
-          <a:lstStyle/>
-          <a:p>
-            <a:pPr algn="l" indent="0" marL="0">
-              <a:buNone/>
-            </a:pPr>
-            <a:r>
-              <a:rPr lang="en-US" sz="2000" dirty="0">
-                <a:solidFill>
-                  <a:srgbClr val="1B2236"/>
-                </a:solidFill>
-                <a:latin typeface="Lexend Deca" pitchFamily="34" charset="0"/>
-                <a:ea typeface="Lexend Deca" pitchFamily="34" charset="-122"/>
-                <a:cs typeface="Lexend Deca" pitchFamily="34" charset="-120"/>
-              </a:rPr>
-              <a:t/>
-            </a:r>
-            <a:endParaRPr lang="en-US" sz="2000" dirty="0"/>
-          </a:p>
-        </p:txBody>
-      </p:sp>
-      <p:sp>
-        <p:nvSpPr>
-          <p:cNvPr id="48" name="Answer"/>
-          <p:cNvSpPr/>
-          <p:nvPr/>
-        </p:nvSpPr>
-        <p:spPr>
-          <a:xfrm>
-            <a:off x="6949440" y="4315968"/>
-            <a:ext cx="4526280" cy="822960"/>
-          </a:xfrm>
-          <a:prstGeom prst="rect">
-            <a:avLst/>
-          </a:prstGeom>
-          <a:noFill/>
-          <a:ln w="38100">
-            <a:noFill/>
-          </a:ln>
-        </p:spPr>
-        <p:txBody>
-          <a:bodyPr wrap="square" lIns="73152" tIns="36576" rIns="73152" bIns="36576" rtlCol="0" anchor="ctr">
-            <a:noAutofit/>
-          </a:bodyPr>
-          <a:lstStyle/>
-          <a:p>
-            <a:pPr algn="l" indent="0" marL="0">
-              <a:buNone/>
-            </a:pPr>
-            <a:r>
-              <a:rPr lang="en-US" sz="2200" dirty="0">
-                <a:solidFill>
-                  <a:srgbClr val="1B2236"/>
-                </a:solidFill>
-                <a:latin typeface="Lexend Deca" pitchFamily="34" charset="0"/>
-                <a:ea typeface="Lexend Deca" pitchFamily="34" charset="-122"/>
-                <a:cs typeface="Lexend Deca" pitchFamily="34" charset="-120"/>
-              </a:rPr>
-              <a:t>I </a:t>
-            </a:r>
-            <a:r>
-              <a:rPr lang="en-US" sz="2200" dirty="0" b="1">
-                <a:solidFill>
-                  <a:srgbClr val="1B2236"/>
-                </a:solidFill>
-                <a:latin typeface="Lexend Deca" pitchFamily="34" charset="0"/>
-                <a:ea typeface="Lexend Deca" pitchFamily="34" charset="-122"/>
-                <a:cs typeface="Lexend Deca" pitchFamily="34" charset="-120"/>
-              </a:rPr>
-              <a:t>felt</a:t>
-            </a:r>
-            <a:r>
-              <a:rPr lang="en-US" sz="2200" dirty="0">
-                <a:solidFill>
-                  <a:srgbClr val="1B2236"/>
-                </a:solidFill>
-                <a:latin typeface="Lexend Deca" pitchFamily="34" charset="0"/>
-                <a:ea typeface="Lexend Deca" pitchFamily="34" charset="-122"/>
-                <a:cs typeface="Lexend Deca" pitchFamily="34" charset="-120"/>
-              </a:rPr>
-              <a:t> nervous.</a:t>
-            </a:r>
-            <a:endParaRPr lang="en-US" sz="2200" dirty="0"/>
-          </a:p>
-          <a:p>
-            <a:pPr algn="l" indent="0" marL="0">
-              <a:buNone/>
-            </a:pPr>
-            <a:r>
-              <a:rPr lang="en-US" sz="2200" dirty="0">
-                <a:solidFill>
-                  <a:srgbClr val="1B2236"/>
-                </a:solidFill>
-                <a:latin typeface="Lexend Deca" pitchFamily="34" charset="0"/>
-                <a:ea typeface="Lexend Deca" pitchFamily="34" charset="-122"/>
-                <a:cs typeface="Lexend Deca" pitchFamily="34" charset="-120"/>
-              </a:rPr>
-              <a:t>I </a:t>
-            </a:r>
-            <a:r>
-              <a:rPr lang="en-US" sz="2200" dirty="0" b="1">
-                <a:solidFill>
-                  <a:srgbClr val="1B2236"/>
-                </a:solidFill>
-                <a:latin typeface="Lexend Deca" pitchFamily="34" charset="0"/>
-                <a:ea typeface="Lexend Deca" pitchFamily="34" charset="-122"/>
-                <a:cs typeface="Lexend Deca" pitchFamily="34" charset="-120"/>
-              </a:rPr>
-              <a:t>was</a:t>
-            </a:r>
-            <a:r>
-              <a:rPr lang="en-US" sz="2200" dirty="0">
-                <a:solidFill>
-                  <a:srgbClr val="1B2236"/>
-                </a:solidFill>
-                <a:latin typeface="Lexend Deca" pitchFamily="34" charset="0"/>
-                <a:ea typeface="Lexend Deca" pitchFamily="34" charset="-122"/>
-                <a:cs typeface="Lexend Deca" pitchFamily="34" charset="-120"/>
-              </a:rPr>
-              <a:t> shy.</a:t>
-            </a:r>
-            <a:endParaRPr lang="en-US" sz="2200" dirty="0"/>
-          </a:p>
-        </p:txBody>
-      </p:sp>
-      <p:sp>
-        <p:nvSpPr>
-          <p:cNvPr id="50" name="Highlight"/>
-          <p:cNvSpPr/>
-          <p:nvPr/>
-        </p:nvSpPr>
-        <p:spPr>
-          <a:xfrm>
-            <a:off x="1481328" y="5367528"/>
-            <a:ext cx="1188720" cy="548640"/>
-          </a:xfrm>
-          <a:prstGeom prst="roundRect">
-            <a:avLst>
-              <a:gd name="adj" fmla="val 22000"/>
-            </a:avLst>
-          </a:prstGeom>
-          <a:solidFill>
-            <a:srgbClr val="FFE28C"/>
-          </a:solidFill>
-          <a:ln w="38100">
-            <a:noFill/>
-          </a:ln>
-        </p:spPr>
-        <p:txBody>
-          <a:bodyPr wrap="square" lIns="73152" tIns="36576" rIns="73152" bIns="36576" rtlCol="0" anchor="ctr">
-            <a:noAutofit/>
-          </a:bodyPr>
-          <a:lstStyle/>
-          <a:p>
-            <a:pPr algn="l" indent="0" marL="0">
-              <a:buNone/>
-            </a:pPr>
-            <a:r>
-              <a:rPr lang="en-US" sz="2000" dirty="0">
-                <a:solidFill>
-                  <a:srgbClr val="1B2236"/>
-                </a:solidFill>
-                <a:latin typeface="Lexend Deca" pitchFamily="34" charset="0"/>
-                <a:ea typeface="Lexend Deca" pitchFamily="34" charset="-122"/>
-                <a:cs typeface="Lexend Deca" pitchFamily="34" charset="-120"/>
-              </a:rPr>
-              <a:t/>
-            </a:r>
-            <a:endParaRPr lang="en-US" sz="2000" dirty="0"/>
-          </a:p>
-        </p:txBody>
-      </p:sp>
-      <p:sp>
-        <p:nvSpPr>
-          <p:cNvPr id="51" name="Helper"/>
-          <p:cNvSpPr/>
-          <p:nvPr/>
-        </p:nvSpPr>
-        <p:spPr>
-          <a:xfrm>
-            <a:off x="1481328" y="5230368"/>
-            <a:ext cx="1188720" cy="822960"/>
-          </a:xfrm>
-          <a:prstGeom prst="rect">
-            <a:avLst/>
-          </a:prstGeom>
-          <a:noFill/>
-          <a:ln w="38100">
-            <a:noFill/>
-          </a:ln>
-        </p:spPr>
-        <p:txBody>
-          <a:bodyPr wrap="square" lIns="73152" tIns="36576" rIns="73152" bIns="36576" rtlCol="0" anchor="ctr">
-            <a:noAutofit/>
-          </a:bodyPr>
-          <a:lstStyle/>
-          <a:p>
-            <a:pPr algn="ctr" indent="0" marL="0">
-              <a:buNone/>
-            </a:pPr>
-            <a:r>
-              <a:rPr lang="en-US" sz="2600" dirty="0" b="1">
-                <a:solidFill>
-                  <a:srgbClr val="1B2236"/>
-                </a:solidFill>
-                <a:latin typeface="Lexend Deca" pitchFamily="34" charset="0"/>
-                <a:ea typeface="Lexend Deca" pitchFamily="34" charset="-122"/>
-                <a:cs typeface="Lexend Deca" pitchFamily="34" charset="-120"/>
-              </a:rPr>
-              <a:t>How</a:t>
-            </a:r>
-            <a:endParaRPr lang="en-US" sz="2600" dirty="0"/>
-          </a:p>
-        </p:txBody>
-      </p:sp>
-      <p:sp>
-        <p:nvSpPr>
-          <p:cNvPr id="52" name="Question"/>
-          <p:cNvSpPr/>
-          <p:nvPr/>
-        </p:nvSpPr>
-        <p:spPr>
-          <a:xfrm>
-            <a:off x="2697480" y="5230368"/>
-            <a:ext cx="3291840" cy="822960"/>
-          </a:xfrm>
-          <a:prstGeom prst="rect">
-            <a:avLst/>
-          </a:prstGeom>
-          <a:noFill/>
-          <a:ln w="38100">
-            <a:noFill/>
-          </a:ln>
-        </p:spPr>
-        <p:txBody>
-          <a:bodyPr wrap="square" lIns="73152" tIns="36576" rIns="73152" bIns="36576" rtlCol="0" anchor="ctr">
-            <a:noAutofit/>
-          </a:bodyPr>
-          <a:lstStyle/>
-          <a:p>
-            <a:pPr algn="l" indent="0" marL="0">
-              <a:buNone/>
-            </a:pPr>
-            <a:r>
-              <a:rPr lang="en-US" sz="2200" dirty="0" b="1">
-                <a:solidFill>
-                  <a:srgbClr val="1B2236"/>
-                </a:solidFill>
-                <a:latin typeface="Lexend Deca" pitchFamily="34" charset="0"/>
-                <a:ea typeface="Lexend Deca" pitchFamily="34" charset="-122"/>
-                <a:cs typeface="Lexend Deca" pitchFamily="34" charset="-120"/>
-              </a:rPr>
-              <a:t>do</a:t>
-            </a:r>
-            <a:r>
-              <a:rPr lang="en-US" sz="2200" dirty="0">
-                <a:solidFill>
-                  <a:srgbClr val="1B2236"/>
-                </a:solidFill>
-                <a:latin typeface="Lexend Deca" pitchFamily="34" charset="0"/>
-                <a:ea typeface="Lexend Deca" pitchFamily="34" charset="-122"/>
-                <a:cs typeface="Lexend Deca" pitchFamily="34" charset="-120"/>
-              </a:rPr>
-              <a:t> you feel now?</a:t>
-            </a:r>
-            <a:endParaRPr lang="en-US" sz="2200" dirty="0"/>
-          </a:p>
-        </p:txBody>
-      </p:sp>
-      <p:sp>
-        <p:nvSpPr>
-          <p:cNvPr id="54" name="Answer bg"/>
-          <p:cNvSpPr/>
-          <p:nvPr/>
-        </p:nvSpPr>
-        <p:spPr>
-          <a:xfrm>
-            <a:off x="6949440" y="5248656"/>
-            <a:ext cx="4526280" cy="786384"/>
-          </a:xfrm>
-          <a:prstGeom prst="roundRect">
-            <a:avLst>
-              <a:gd name="adj" fmla="val 22000"/>
-            </a:avLst>
-          </a:prstGeom>
-          <a:solidFill>
-            <a:srgbClr val="FFFFFF"/>
-          </a:solidFill>
-          <a:ln w="38100">
-            <a:noFill/>
-          </a:ln>
-        </p:spPr>
-        <p:txBody>
-          <a:bodyPr wrap="square" lIns="73152" tIns="36576" rIns="73152" bIns="36576" rtlCol="0" anchor="ctr">
-            <a:noAutofit/>
-          </a:bodyPr>
-          <a:lstStyle/>
-          <a:p>
-            <a:pPr algn="l" indent="0" marL="0">
-              <a:buNone/>
-            </a:pPr>
-            <a:r>
-              <a:rPr lang="en-US" sz="2000" dirty="0">
-                <a:solidFill>
-                  <a:srgbClr val="1B2236"/>
-                </a:solidFill>
-                <a:latin typeface="Lexend Deca" pitchFamily="34" charset="0"/>
-                <a:ea typeface="Lexend Deca" pitchFamily="34" charset="-122"/>
-                <a:cs typeface="Lexend Deca" pitchFamily="34" charset="-120"/>
-              </a:rPr>
-              <a:t/>
-            </a:r>
-            <a:endParaRPr lang="en-US" sz="2000" dirty="0"/>
-          </a:p>
-        </p:txBody>
-      </p:sp>
-      <p:sp>
-        <p:nvSpPr>
-          <p:cNvPr id="53" name="Answer"/>
-          <p:cNvSpPr/>
-          <p:nvPr/>
-        </p:nvSpPr>
-        <p:spPr>
-          <a:xfrm>
-            <a:off x="6949440" y="5230368"/>
-            <a:ext cx="4526280" cy="822960"/>
-          </a:xfrm>
-          <a:prstGeom prst="rect">
-            <a:avLst/>
-          </a:prstGeom>
-          <a:noFill/>
-          <a:ln w="38100">
-            <a:noFill/>
-          </a:ln>
-        </p:spPr>
-        <p:txBody>
-          <a:bodyPr wrap="square" lIns="73152" tIns="36576" rIns="73152" bIns="36576" rtlCol="0" anchor="ctr">
-            <a:noAutofit/>
-          </a:bodyPr>
-          <a:lstStyle/>
-          <a:p>
-            <a:pPr algn="l" indent="0" marL="0">
-              <a:buNone/>
-            </a:pPr>
-            <a:r>
-              <a:rPr lang="en-US" sz="2200" dirty="0">
-                <a:solidFill>
-                  <a:srgbClr val="1B2236"/>
-                </a:solidFill>
-                <a:latin typeface="Lexend Deca" pitchFamily="34" charset="0"/>
-                <a:ea typeface="Lexend Deca" pitchFamily="34" charset="-122"/>
-                <a:cs typeface="Lexend Deca" pitchFamily="34" charset="-120"/>
-              </a:rPr>
-              <a:t>I </a:t>
-            </a:r>
-            <a:r>
-              <a:rPr lang="en-US" sz="2200" dirty="0" b="1">
-                <a:solidFill>
-                  <a:srgbClr val="1B2236"/>
-                </a:solidFill>
-                <a:latin typeface="Lexend Deca" pitchFamily="34" charset="0"/>
-                <a:ea typeface="Lexend Deca" pitchFamily="34" charset="-122"/>
-                <a:cs typeface="Lexend Deca" pitchFamily="34" charset="-120"/>
-              </a:rPr>
-              <a:t>feel</a:t>
-            </a:r>
-            <a:r>
-              <a:rPr lang="en-US" sz="2200" dirty="0">
-                <a:solidFill>
-                  <a:srgbClr val="1B2236"/>
-                </a:solidFill>
-                <a:latin typeface="Lexend Deca" pitchFamily="34" charset="0"/>
-                <a:ea typeface="Lexend Deca" pitchFamily="34" charset="-122"/>
-                <a:cs typeface="Lexend Deca" pitchFamily="34" charset="-120"/>
-              </a:rPr>
-              <a:t> proud.</a:t>
-            </a:r>
-            <a:endParaRPr lang="en-US" sz="2200" dirty="0"/>
-          </a:p>
-          <a:p>
-            <a:pPr algn="l" indent="0" marL="0">
-              <a:buNone/>
-            </a:pPr>
-            <a:r>
-              <a:rPr lang="en-US" sz="2200" dirty="0">
-                <a:solidFill>
-                  <a:srgbClr val="1B2236"/>
-                </a:solidFill>
-                <a:latin typeface="Lexend Deca" pitchFamily="34" charset="0"/>
-                <a:ea typeface="Lexend Deca" pitchFamily="34" charset="-122"/>
-                <a:cs typeface="Lexend Deca" pitchFamily="34" charset="-120"/>
-              </a:rPr>
-              <a:t>I </a:t>
-            </a:r>
-            <a:r>
-              <a:rPr lang="en-US" sz="2200" dirty="0" b="1">
-                <a:solidFill>
-                  <a:srgbClr val="1B2236"/>
-                </a:solidFill>
-                <a:latin typeface="Lexend Deca" pitchFamily="34" charset="0"/>
-                <a:ea typeface="Lexend Deca" pitchFamily="34" charset="-122"/>
-                <a:cs typeface="Lexend Deca" pitchFamily="34" charset="-120"/>
-              </a:rPr>
-              <a:t>am</a:t>
-            </a:r>
-            <a:r>
-              <a:rPr lang="en-US" sz="2200" dirty="0">
-                <a:solidFill>
-                  <a:srgbClr val="1B2236"/>
-                </a:solidFill>
-                <a:latin typeface="Lexend Deca" pitchFamily="34" charset="0"/>
-                <a:ea typeface="Lexend Deca" pitchFamily="34" charset="-122"/>
-                <a:cs typeface="Lexend Deca" pitchFamily="34" charset="-120"/>
-              </a:rPr>
-              <a:t> happy.</a:t>
-            </a:r>
-            <a:endParaRPr lang="en-US" sz="2200" dirty="0"/>
-          </a:p>
-        </p:txBody>
-      </p:sp>
-    </p:spTree>
-  </p:cSld>
-  <p:clrMapOvr>
-    <a:masterClrMapping/>
-  </p:clrMapOvr>
-  <p:timing>
-    <p:tnLst>
-      <p:par>
-        <p:cTn id="1" dur="indefinite" restart="never" nodeType="tmRoot">
-          <p:childTnLst>
-            <p:seq concurrent="1" nextAc="seek">
-              <p:cTn id="2" dur="indefinite" nodeType="mainSeq">
-                <p:childTnLst>
-                  <p:par>
-                    <p:cTn id="3" fill="hold">
-                      <p:stCondLst>
-                        <p:cond delay="indefinite"/>
-                      </p:stCondLst>
-                      <p:childTnLst>
-                        <p:par>
-                          <p:cTn id="4" fill="hold">
-                            <p:stCondLst>
-                              <p:cond delay="0"/>
-                            </p:stCondLst>
-                            <p:childTnLst>
-                              <p:par>
-                                <p:cTn id="5" presetID="10" presetClass="entr" presetSubtype="0" fill="hold" nodeType="clickEffect">
-                                  <p:stCondLst>
-                                    <p:cond delay="0"/>
-                                  </p:stCondLst>
-                                  <p:childTnLst>
-                                    <p:set>
-                                      <p:cBhvr>
-                                        <p:cTn id="6" dur="1" fill="hold">
-                                          <p:stCondLst>
-                                            <p:cond delay="0"/>
-                                          </p:stCondLst>
-                                        </p:cTn>
-                                        <p:tgtEl>
-                                          <p:spTgt spid="45"/>
-                                        </p:tgtEl>
-                                        <p:attrNameLst>
-                                          <p:attrName>style.visibility</p:attrName>
-                                        </p:attrNameLst>
-                                      </p:cBhvr>
-                                      <p:to>
-                                        <p:strVal val="visible"/>
-                                      </p:to>
-                                    </p:set>
-                                    <p:animEffect transition="in" filter="fade">
-                                      <p:cBhvr>
-                                        <p:cTn id="7" dur="400"/>
-                                        <p:tgtEl>
-                                          <p:spTgt spid="45"/>
-                                        </p:tgtEl>
-                                      </p:cBhvr>
-                                    </p:animEffect>
-                                  </p:childTnLst>
-                                </p:cTn>
-                              </p:par>
-                              <p:par>
-                                <p:cTn id="8" presetID="10" presetClass="entr" presetSubtype="0" fill="hold" nodeType="withEffect">
-                                  <p:stCondLst>
-                                    <p:cond delay="0"/>
-                                  </p:stCondLst>
-                                  <p:childTnLst>
-                                    <p:set>
-                                      <p:cBhvr>
-                                        <p:cTn id="9" dur="1" fill="hold">
-                                          <p:stCondLst>
-                                            <p:cond delay="0"/>
-                                          </p:stCondLst>
-                                        </p:cTn>
-                                        <p:tgtEl>
-                                          <p:spTgt spid="49"/>
-                                        </p:tgtEl>
-                                        <p:attrNameLst>
-                                          <p:attrName>style.visibility</p:attrName>
-                                        </p:attrNameLst>
-                                      </p:cBhvr>
-                                      <p:to>
-                                        <p:strVal val="visible"/>
-                                      </p:to>
-                                    </p:set>
-                                    <p:animEffect transition="in" filter="fade">
-                                      <p:cBhvr>
-                                        <p:cTn id="10" dur="400"/>
-                                        <p:tgtEl>
-                                          <p:spTgt spid="49"/>
-                                        </p:tgtEl>
-                                      </p:cBhvr>
-                                    </p:animEffect>
-                                  </p:childTnLst>
-                                </p:cTn>
-                              </p:par>
-                            </p:childTnLst>
-                          </p:cTn>
-                        </p:par>
-                      </p:childTnLst>
-                    </p:cTn>
-                  </p:par>
-                  <p:par>
-                    <p:cTn id="11" fill="hold">
-                      <p:stCondLst>
-                        <p:cond delay="indefinite"/>
-                      </p:stCondLst>
-                      <p:childTnLst>
-                        <p:par>
-                          <p:cTn id="12" fill="hold">
-                            <p:stCondLst>
-                              <p:cond delay="0"/>
-                            </p:stCondLst>
-                            <p:childTnLst>
-                              <p:par>
-                                <p:cTn id="13" presetID="10" presetClass="entr" presetSubtype="0" fill="hold" nodeType="clickEffect">
-                                  <p:stCondLst>
-                                    <p:cond delay="0"/>
-                                  </p:stCondLst>
-                                  <p:childTnLst>
-                                    <p:set>
-                                      <p:cBhvr>
-                                        <p:cTn id="14" dur="1" fill="hold">
-                                          <p:stCondLst>
-                                            <p:cond delay="0"/>
-                                          </p:stCondLst>
-                                        </p:cTn>
-                                        <p:tgtEl>
-                                          <p:spTgt spid="50"/>
-                                        </p:tgtEl>
-                                        <p:attrNameLst>
-                                          <p:attrName>style.visibility</p:attrName>
-                                        </p:attrNameLst>
-                                      </p:cBhvr>
-                                      <p:to>
-                                        <p:strVal val="visible"/>
-                                      </p:to>
-                                    </p:set>
-                                    <p:animEffect transition="in" filter="fade">
-                                      <p:cBhvr>
-                                        <p:cTn id="15" dur="400"/>
-                                        <p:tgtEl>
-                                          <p:spTgt spid="50"/>
-                                        </p:tgtEl>
-                                      </p:cBhvr>
-                                    </p:animEffect>
-                                  </p:childTnLst>
-                                </p:cTn>
-                              </p:par>
-                              <p:par>
-                                <p:cTn id="16" presetID="10" presetClass="entr" presetSubtype="0" fill="hold" nodeType="withEffect">
-                                  <p:stCondLst>
-                                    <p:cond delay="0"/>
-                                  </p:stCondLst>
-                                  <p:childTnLst>
-                                    <p:set>
-                                      <p:cBhvr>
-                                        <p:cTn id="17" dur="1" fill="hold">
-                                          <p:stCondLst>
-                                            <p:cond delay="0"/>
-                                          </p:stCondLst>
-                                        </p:cTn>
-                                        <p:tgtEl>
-                                          <p:spTgt spid="54"/>
-                                        </p:tgtEl>
-                                        <p:attrNameLst>
-                                          <p:attrName>style.visibility</p:attrName>
-                                        </p:attrNameLst>
-                                      </p:cBhvr>
-                                      <p:to>
-                                        <p:strVal val="visible"/>
-                                      </p:to>
-                                    </p:set>
-                                    <p:animEffect transition="in" filter="fade">
-                                      <p:cBhvr>
-                                        <p:cTn id="18" dur="400"/>
-                                        <p:tgtEl>
-                                          <p:spTgt spid="54"/>
                                         </p:tgtEl>
                                       </p:cBhvr>
                                     </p:animEffect>
@@ -13540,1755 +13540,6 @@
                                         <p:cTn id="22" dur="400"/>
                                         <p:tgtEl>
                                           <p:spTgt spid="41"/>
-                                        </p:tgtEl>
-                                      </p:cBhvr>
-                                    </p:animEffect>
-                                  </p:childTnLst>
-                                </p:cTn>
-                              </p:par>
-                            </p:childTnLst>
-                          </p:cTn>
-                        </p:par>
-                      </p:childTnLst>
-                    </p:cTn>
-                  </p:par>
-                </p:childTnLst>
-              </p:cTn>
-              <p:prevCondLst>
-                <p:cond evt="onPrev" delay="0">
-                  <p:tgtEl>
-                    <p:sldTgt/>
-                  </p:tgtEl>
-                </p:cond>
-              </p:prevCondLst>
-              <p:nextCondLst>
-                <p:cond evt="onNext" delay="0">
-                  <p:tgtEl>
-                    <p:sldTgt/>
-                  </p:tgtEl>
-                </p:cond>
-              </p:nextCondLst>
-            </p:seq>
-          </p:childTnLst>
-        </p:cTn>
-      </p:par>
-    </p:tnLst>
-  </p:timing>
-</p:sld>
-</file>
-
-<file path=ppt/slides/slide30.xml><?xml version="1.0" encoding="utf-8"?>
-<p:sld xmlns:a="http://schemas.openxmlformats.org/drawingml/2006/main" xmlns:r="http://schemas.openxmlformats.org/officeDocument/2006/relationships" xmlns:p="http://schemas.openxmlformats.org/presentationml/2006/main">
-  <p:cSld name="Slide 17">
-    <p:bg>
-      <p:bgPr>
-        <a:solidFill>
-          <a:srgbClr val="F1F5FB"/>
-        </a:solidFill>
-      </p:bgPr>
-    </p:bg>
-    <p:spTree>
-      <p:nvGrpSpPr>
-        <p:cNvPr id="1" name=""/>
-        <p:cNvGrpSpPr/>
-        <p:nvPr/>
-      </p:nvGrpSpPr>
-      <p:grpSpPr>
-        <a:xfrm>
-          <a:off x="0" y="0"/>
-          <a:ext cx="0" cy="0"/>
-          <a:chOff x="0" y="0"/>
-          <a:chExt cx="0" cy="0"/>
-        </a:xfrm>
-      </p:grpSpPr>
-      <p:sp>
-        <p:nvSpPr>
-          <p:cNvPr id="2" name="Shape 0"/>
-          <p:cNvSpPr/>
-          <p:nvPr/>
-        </p:nvSpPr>
-        <p:spPr>
-          <a:xfrm>
-            <a:off x="164592" y="2980944"/>
-            <a:ext cx="11582705" cy="3623767"/>
-          </a:xfrm>
-          <a:prstGeom prst="round1Rect">
-            <a:avLst>
-              <a:gd name="adj" fmla="val 23087"/>
-            </a:avLst>
-          </a:prstGeom>
-          <a:solidFill>
-            <a:srgbClr val="8FAFE3"/>
-          </a:solidFill>
-          <a:ln/>
-        </p:spPr>
-        <p:txBody>
-          <a:bodyPr/>
-          <a:p/>
-        </p:txBody>
-      </p:sp>
-      <p:sp>
-        <p:nvSpPr>
-          <p:cNvPr id="3" name="Shape 1"/>
-          <p:cNvSpPr/>
-          <p:nvPr/>
-        </p:nvSpPr>
-        <p:spPr>
-          <a:xfrm>
-            <a:off x="233172" y="1137194"/>
-            <a:ext cx="5607101" cy="1375258"/>
-          </a:xfrm>
-          <a:prstGeom prst="roundRect">
-            <a:avLst>
-              <a:gd name="adj" fmla="val 16667"/>
-            </a:avLst>
-          </a:prstGeom>
-          <a:solidFill>
-            <a:srgbClr val="8FAFE3"/>
-          </a:solidFill>
-          <a:ln/>
-        </p:spPr>
-        <p:txBody>
-          <a:bodyPr/>
-          <a:p/>
-        </p:txBody>
-      </p:sp>
-      <p:sp>
-        <p:nvSpPr>
-          <p:cNvPr id="4" name="Shape 2"/>
-          <p:cNvSpPr/>
-          <p:nvPr/>
-        </p:nvSpPr>
-        <p:spPr>
-          <a:xfrm>
-            <a:off x="266090" y="1080821"/>
-            <a:ext cx="5607101" cy="1375258"/>
-          </a:xfrm>
-          <a:prstGeom prst="roundRect">
-            <a:avLst>
-              <a:gd name="adj" fmla="val 16667"/>
-            </a:avLst>
-          </a:prstGeom>
-          <a:solidFill>
-            <a:srgbClr val="FFFFFF"/>
-          </a:solidFill>
-          <a:ln/>
-        </p:spPr>
-        <p:txBody>
-          <a:bodyPr/>
-          <a:p/>
-        </p:txBody>
-      </p:sp>
-      <p:sp>
-        <p:nvSpPr>
-          <p:cNvPr id="5" name="Shape 3"/>
-          <p:cNvSpPr/>
-          <p:nvPr/>
-        </p:nvSpPr>
-        <p:spPr>
-          <a:xfrm>
-            <a:off x="0" y="2856586"/>
-            <a:ext cx="11582705" cy="3623767"/>
-          </a:xfrm>
-          <a:prstGeom prst="round1Rect">
-            <a:avLst>
-              <a:gd name="adj" fmla="val 23087"/>
-            </a:avLst>
-          </a:prstGeom>
-          <a:solidFill>
-            <a:srgbClr val="B9D2F7"/>
-          </a:solidFill>
-          <a:ln/>
-        </p:spPr>
-        <p:txBody>
-          <a:bodyPr/>
-          <a:p/>
-        </p:txBody>
-      </p:sp>
-      <p:sp>
-        <p:nvSpPr>
-          <p:cNvPr id="6" name="Text 4"/>
-          <p:cNvSpPr/>
-          <p:nvPr/>
-        </p:nvSpPr>
-        <p:spPr>
-          <a:xfrm>
-            <a:off x="416052" y="1452067"/>
-            <a:ext cx="5680253" cy="947318"/>
-          </a:xfrm>
-          <a:prstGeom prst="rect">
-            <a:avLst/>
-          </a:prstGeom>
-          <a:noFill/>
-          <a:ln/>
-        </p:spPr>
-        <p:txBody>
-          <a:bodyPr wrap="square" lIns="50800" tIns="50800" rIns="50800" bIns="50800" rtlCol="0" anchor="ctr"/>
-          <a:lstStyle/>
-          <a:p>
-            <a:pPr algn="l" indent="0" marL="0">
-              <a:buNone/>
-            </a:pPr>
-            <a:r>
-              <a:rPr lang="en-US" sz="4800" dirty="0" b="1">
-                <a:solidFill>
-                  <a:srgbClr val="1B2236"/>
-                </a:solidFill>
-                <a:latin typeface="Lexend Deca" pitchFamily="34" charset="0"/>
-                <a:ea typeface="Lexend Deca" pitchFamily="34" charset="-122"/>
-                <a:cs typeface="Lexend Deca" pitchFamily="34" charset="-120"/>
-              </a:rPr>
-              <a:t>Listening A</a:t>
-            </a:r>
-            <a:endParaRPr lang="en-US" sz="4800" dirty="0"/>
-          </a:p>
-        </p:txBody>
-      </p:sp>
-      <p:sp>
-        <p:nvSpPr>
-          <p:cNvPr id="7" name="Text 5"/>
-          <p:cNvSpPr/>
-          <p:nvPr/>
-        </p:nvSpPr>
-        <p:spPr>
-          <a:xfrm>
-            <a:off x="6745529" y="1234440"/>
-            <a:ext cx="4754880" cy="1188720"/>
-          </a:xfrm>
-          <a:prstGeom prst="rect">
-            <a:avLst/>
-          </a:prstGeom>
-          <a:noFill/>
-          <a:ln/>
-        </p:spPr>
-        <p:txBody>
-          <a:bodyPr wrap="square" rtlCol="0" anchor="ctr"/>
-          <a:lstStyle/>
-          <a:p>
-            <a:pPr algn="l" indent="0" marL="0">
-              <a:spcAft>
-                <a:spcPts val="400"/>
-              </a:spcAft>
-              <a:buNone/>
-            </a:pPr>
-            <a:r>
-              <a:rPr lang="en-US" sz="2200" dirty="0">
-                <a:solidFill>
-                  <a:srgbClr val="1B2236"/>
-                </a:solidFill>
-                <a:latin typeface="Lexend Deca" pitchFamily="34" charset="0"/>
-                <a:ea typeface="Lexend Deca" pitchFamily="34" charset="-122"/>
-                <a:cs typeface="Lexend Deca" pitchFamily="34" charset="-120"/>
-              </a:rPr>
-              <a:t>Listen. Then, now,</a:t>
-            </a:r>
-            <a:endParaRPr lang="en-US" sz="2200" dirty="0"/>
-          </a:p>
-          <a:p>
-            <a:pPr algn="l" indent="0" marL="0">
-              <a:spcAft>
-                <a:spcPts val="400"/>
-              </a:spcAft>
-              <a:buNone/>
-            </a:pPr>
-            <a:r>
-              <a:rPr lang="en-US" sz="2200" dirty="0">
-                <a:solidFill>
-                  <a:srgbClr val="1B2236"/>
-                </a:solidFill>
-                <a:latin typeface="Lexend Deca" pitchFamily="34" charset="0"/>
-                <a:ea typeface="Lexend Deca" pitchFamily="34" charset="-122"/>
-                <a:cs typeface="Lexend Deca" pitchFamily="34" charset="-120"/>
-              </a:rPr>
-              <a:t>or next?</a:t>
-            </a:r>
-            <a:endParaRPr lang="en-US" sz="2200" dirty="0"/>
-          </a:p>
-        </p:txBody>
-      </p:sp>
-      <p:sp>
-        <p:nvSpPr>
-          <p:cNvPr id="24" name="Shape 22"/>
-          <p:cNvSpPr/>
-          <p:nvPr/>
-        </p:nvSpPr>
-        <p:spPr>
-          <a:xfrm>
-            <a:off x="10865815" y="2695651"/>
-            <a:ext cx="727862" cy="687570"/>
-          </a:xfrm>
-          <a:prstGeom prst="star10">
-            <a:avLst/>
-          </a:prstGeom>
-          <a:solidFill>
-            <a:srgbClr val="8FAFE3"/>
-          </a:solidFill>
-          <a:ln/>
-        </p:spPr>
-        <p:txBody>
-          <a:bodyPr/>
-          <a:p/>
-        </p:txBody>
-      </p:sp>
-      <p:sp>
-        <p:nvSpPr>
-          <p:cNvPr id="25" name="Shape 23"/>
-          <p:cNvSpPr/>
-          <p:nvPr/>
-        </p:nvSpPr>
-        <p:spPr>
-          <a:xfrm>
-            <a:off x="10924304" y="2686553"/>
-            <a:ext cx="740860" cy="740860"/>
-          </a:xfrm>
-          <a:prstGeom prst="star10">
-            <a:avLst/>
-          </a:prstGeom>
-          <a:solidFill>
-            <a:srgbClr val="FFE28C"/>
-          </a:solidFill>
-          <a:ln/>
-        </p:spPr>
-        <p:txBody>
-          <a:bodyPr/>
-          <a:p/>
-        </p:txBody>
-      </p:sp>
-      <p:sp>
-        <p:nvSpPr>
-          <p:cNvPr id="26" name="Shape 24"/>
-          <p:cNvSpPr/>
-          <p:nvPr/>
-        </p:nvSpPr>
-        <p:spPr>
-          <a:xfrm rot="900000">
-            <a:off x="11125766" y="2899063"/>
-            <a:ext cx="316490" cy="316490"/>
-          </a:xfrm>
-          <a:prstGeom prst="mathPlus">
-            <a:avLst/>
-          </a:prstGeom>
-          <a:solidFill>
-            <a:srgbClr val="1B2236"/>
-          </a:solidFill>
-          <a:ln/>
-        </p:spPr>
-        <p:txBody>
-          <a:bodyPr/>
-          <a:p/>
-        </p:txBody>
-      </p:sp>
-      <p:sp>
-        <p:nvSpPr>
-          <p:cNvPr id="67" name="Statement 1"/>
-          <p:cNvSpPr/>
-          <p:nvPr/>
-        </p:nvSpPr>
-        <p:spPr>
-          <a:xfrm>
-            <a:off x="502920" y="2834640"/>
-            <a:ext cx="5760720" cy="603504"/>
-          </a:xfrm>
-          <a:prstGeom prst="rect">
-            <a:avLst/>
-          </a:prstGeom>
-          <a:noFill/>
-          <a:ln w="38100">
-            <a:noFill/>
-          </a:ln>
-        </p:spPr>
-        <p:txBody>
-          <a:bodyPr wrap="square" lIns="73152" tIns="36576" rIns="73152" bIns="36576" rtlCol="0" anchor="ctr">
-            <a:noAutofit/>
-          </a:bodyPr>
-          <a:lstStyle/>
-          <a:p>
-            <a:pPr algn="l" indent="0" marL="0">
-              <a:buNone/>
-            </a:pPr>
-            <a:r>
-              <a:rPr lang="en-US" sz="2000" dirty="0">
-                <a:solidFill>
-                  <a:srgbClr val="1B2236"/>
-                </a:solidFill>
-                <a:latin typeface="Lexend Deca" pitchFamily="34" charset="0"/>
-                <a:ea typeface="Lexend Deca" pitchFamily="34" charset="-122"/>
-                <a:cs typeface="Lexend Deca" pitchFamily="34" charset="-120"/>
-              </a:rPr>
-              <a:t>1. She was nervous.</a:t>
-            </a:r>
-            <a:endParaRPr lang="en-US" sz="2000" dirty="0"/>
-          </a:p>
-        </p:txBody>
-      </p:sp>
-      <p:sp>
-        <p:nvSpPr>
-          <p:cNvPr id="68" name="Option 11"/>
-          <p:cNvSpPr/>
-          <p:nvPr/>
-        </p:nvSpPr>
-        <p:spPr>
-          <a:xfrm>
-            <a:off x="6492240" y="2871216"/>
-            <a:ext cx="1188720" cy="530352"/>
-          </a:xfrm>
-          <a:prstGeom prst="roundRect">
-            <a:avLst>
-              <a:gd name="adj" fmla="val 22000"/>
-            </a:avLst>
-          </a:prstGeom>
-          <a:solidFill>
-            <a:srgbClr val="FFFFFF"/>
-          </a:solidFill>
-          <a:ln w="38100">
-            <a:noFill/>
-          </a:ln>
-        </p:spPr>
-        <p:txBody>
-          <a:bodyPr wrap="square" lIns="73152" tIns="36576" rIns="73152" bIns="36576" rtlCol="0" anchor="ctr">
-            <a:noAutofit/>
-          </a:bodyPr>
-          <a:lstStyle/>
-          <a:p>
-            <a:pPr algn="ctr" indent="0" marL="0">
-              <a:buNone/>
-            </a:pPr>
-            <a:r>
-              <a:rPr lang="en-US" sz="2000" dirty="0" b="1">
-                <a:solidFill>
-                  <a:srgbClr val="1B2236"/>
-                </a:solidFill>
-                <a:latin typeface="Lexend Deca" pitchFamily="34" charset="0"/>
-                <a:ea typeface="Lexend Deca" pitchFamily="34" charset="-122"/>
-                <a:cs typeface="Lexend Deca" pitchFamily="34" charset="-120"/>
-              </a:rPr>
-              <a:t>Then</a:t>
-            </a:r>
-            <a:endParaRPr lang="en-US" sz="2000" dirty="0"/>
-          </a:p>
-        </p:txBody>
-      </p:sp>
-      <p:sp>
-        <p:nvSpPr>
-          <p:cNvPr id="69" name="Option 12"/>
-          <p:cNvSpPr/>
-          <p:nvPr/>
-        </p:nvSpPr>
-        <p:spPr>
-          <a:xfrm>
-            <a:off x="7909560" y="2871216"/>
-            <a:ext cx="1188720" cy="530352"/>
-          </a:xfrm>
-          <a:prstGeom prst="roundRect">
-            <a:avLst>
-              <a:gd name="adj" fmla="val 22000"/>
-            </a:avLst>
-          </a:prstGeom>
-          <a:solidFill>
-            <a:srgbClr val="FFFFFF"/>
-          </a:solidFill>
-          <a:ln w="38100">
-            <a:noFill/>
-          </a:ln>
-        </p:spPr>
-        <p:txBody>
-          <a:bodyPr wrap="square" lIns="73152" tIns="36576" rIns="73152" bIns="36576" rtlCol="0" anchor="ctr">
-            <a:noAutofit/>
-          </a:bodyPr>
-          <a:lstStyle/>
-          <a:p>
-            <a:pPr algn="ctr" indent="0" marL="0">
-              <a:buNone/>
-            </a:pPr>
-            <a:r>
-              <a:rPr lang="en-US" sz="2000" dirty="0" b="1">
-                <a:solidFill>
-                  <a:srgbClr val="1B2236"/>
-                </a:solidFill>
-                <a:latin typeface="Lexend Deca" pitchFamily="34" charset="0"/>
-                <a:ea typeface="Lexend Deca" pitchFamily="34" charset="-122"/>
-                <a:cs typeface="Lexend Deca" pitchFamily="34" charset="-120"/>
-              </a:rPr>
-              <a:t>Now</a:t>
-            </a:r>
-            <a:endParaRPr lang="en-US" sz="2000" dirty="0"/>
-          </a:p>
-        </p:txBody>
-      </p:sp>
-      <p:sp>
-        <p:nvSpPr>
-          <p:cNvPr id="70" name="Option 13"/>
-          <p:cNvSpPr/>
-          <p:nvPr/>
-        </p:nvSpPr>
-        <p:spPr>
-          <a:xfrm>
-            <a:off x="9326880" y="2871216"/>
-            <a:ext cx="1188720" cy="530352"/>
-          </a:xfrm>
-          <a:prstGeom prst="roundRect">
-            <a:avLst>
-              <a:gd name="adj" fmla="val 22000"/>
-            </a:avLst>
-          </a:prstGeom>
-          <a:solidFill>
-            <a:srgbClr val="FFFFFF"/>
-          </a:solidFill>
-          <a:ln w="38100">
-            <a:noFill/>
-          </a:ln>
-        </p:spPr>
-        <p:txBody>
-          <a:bodyPr wrap="square" lIns="73152" tIns="36576" rIns="73152" bIns="36576" rtlCol="0" anchor="ctr">
-            <a:noAutofit/>
-          </a:bodyPr>
-          <a:lstStyle/>
-          <a:p>
-            <a:pPr algn="ctr" indent="0" marL="0">
-              <a:buNone/>
-            </a:pPr>
-            <a:r>
-              <a:rPr lang="en-US" sz="2000" dirty="0" b="1">
-                <a:solidFill>
-                  <a:srgbClr val="1B2236"/>
-                </a:solidFill>
-                <a:latin typeface="Lexend Deca" pitchFamily="34" charset="0"/>
-                <a:ea typeface="Lexend Deca" pitchFamily="34" charset="-122"/>
-                <a:cs typeface="Lexend Deca" pitchFamily="34" charset="-120"/>
-              </a:rPr>
-              <a:t>Next</a:t>
-            </a:r>
-            <a:endParaRPr lang="en-US" sz="2000" dirty="0"/>
-          </a:p>
-        </p:txBody>
-      </p:sp>
-      <p:sp>
-        <p:nvSpPr>
-          <p:cNvPr id="71" name="Circle 1"/>
-          <p:cNvSpPr/>
-          <p:nvPr/>
-        </p:nvSpPr>
-        <p:spPr>
-          <a:xfrm>
-            <a:off x="6364224" y="2807208"/>
-            <a:ext cx="1444752" cy="658368"/>
-          </a:xfrm>
-          <a:prstGeom prst="ellipse">
-            <a:avLst/>
-          </a:prstGeom>
-          <a:noFill/>
-          <a:ln w="50800">
-            <a:solidFill>
-              <a:srgbClr val="5B3FC4"/>
-            </a:solidFill>
-          </a:ln>
-        </p:spPr>
-        <p:txBody>
-          <a:bodyPr wrap="square" lIns="73152" tIns="36576" rIns="73152" bIns="36576" rtlCol="0" anchor="ctr">
-            <a:noAutofit/>
-          </a:bodyPr>
-          <a:lstStyle/>
-          <a:p>
-            <a:pPr algn="l" indent="0" marL="0">
-              <a:buNone/>
-            </a:pPr>
-            <a:r>
-              <a:rPr lang="en-US" sz="2000" dirty="0">
-                <a:solidFill>
-                  <a:srgbClr val="1B2236"/>
-                </a:solidFill>
-                <a:latin typeface="Lexend Deca" pitchFamily="34" charset="0"/>
-                <a:ea typeface="Lexend Deca" pitchFamily="34" charset="-122"/>
-                <a:cs typeface="Lexend Deca" pitchFamily="34" charset="-120"/>
-              </a:rPr>
-              <a:t/>
-            </a:r>
-            <a:endParaRPr lang="en-US" sz="2000" dirty="0"/>
-          </a:p>
-        </p:txBody>
-      </p:sp>
-      <p:sp>
-        <p:nvSpPr>
-          <p:cNvPr id="72" name="Statement 2"/>
-          <p:cNvSpPr/>
-          <p:nvPr/>
-        </p:nvSpPr>
-        <p:spPr>
-          <a:xfrm>
-            <a:off x="502920" y="3566160"/>
-            <a:ext cx="5760720" cy="603504"/>
-          </a:xfrm>
-          <a:prstGeom prst="rect">
-            <a:avLst/>
-          </a:prstGeom>
-          <a:noFill/>
-          <a:ln w="38100">
-            <a:noFill/>
-          </a:ln>
-        </p:spPr>
-        <p:txBody>
-          <a:bodyPr wrap="square" lIns="73152" tIns="36576" rIns="73152" bIns="36576" rtlCol="0" anchor="ctr">
-            <a:noAutofit/>
-          </a:bodyPr>
-          <a:lstStyle/>
-          <a:p>
-            <a:pPr algn="l" indent="0" marL="0">
-              <a:buNone/>
-            </a:pPr>
-            <a:r>
-              <a:rPr lang="en-US" sz="2000" dirty="0">
-                <a:solidFill>
-                  <a:srgbClr val="1B2236"/>
-                </a:solidFill>
-                <a:latin typeface="Lexend Deca" pitchFamily="34" charset="0"/>
-                <a:ea typeface="Lexend Deca" pitchFamily="34" charset="-122"/>
-                <a:cs typeface="Lexend Deca" pitchFamily="34" charset="-120"/>
-              </a:rPr>
-              <a:t>2. She works at a bakery.</a:t>
-            </a:r>
-            <a:endParaRPr lang="en-US" sz="2000" dirty="0"/>
-          </a:p>
-        </p:txBody>
-      </p:sp>
-      <p:sp>
-        <p:nvSpPr>
-          <p:cNvPr id="73" name="Option 21"/>
-          <p:cNvSpPr/>
-          <p:nvPr/>
-        </p:nvSpPr>
-        <p:spPr>
-          <a:xfrm>
-            <a:off x="6492240" y="3602736"/>
-            <a:ext cx="1188720" cy="530352"/>
-          </a:xfrm>
-          <a:prstGeom prst="roundRect">
-            <a:avLst>
-              <a:gd name="adj" fmla="val 22000"/>
-            </a:avLst>
-          </a:prstGeom>
-          <a:solidFill>
-            <a:srgbClr val="FFFFFF"/>
-          </a:solidFill>
-          <a:ln w="38100">
-            <a:noFill/>
-          </a:ln>
-        </p:spPr>
-        <p:txBody>
-          <a:bodyPr wrap="square" lIns="73152" tIns="36576" rIns="73152" bIns="36576" rtlCol="0" anchor="ctr">
-            <a:noAutofit/>
-          </a:bodyPr>
-          <a:lstStyle/>
-          <a:p>
-            <a:pPr algn="ctr" indent="0" marL="0">
-              <a:buNone/>
-            </a:pPr>
-            <a:r>
-              <a:rPr lang="en-US" sz="2000" dirty="0" b="1">
-                <a:solidFill>
-                  <a:srgbClr val="1B2236"/>
-                </a:solidFill>
-                <a:latin typeface="Lexend Deca" pitchFamily="34" charset="0"/>
-                <a:ea typeface="Lexend Deca" pitchFamily="34" charset="-122"/>
-                <a:cs typeface="Lexend Deca" pitchFamily="34" charset="-120"/>
-              </a:rPr>
-              <a:t>Then</a:t>
-            </a:r>
-            <a:endParaRPr lang="en-US" sz="2000" dirty="0"/>
-          </a:p>
-        </p:txBody>
-      </p:sp>
-      <p:sp>
-        <p:nvSpPr>
-          <p:cNvPr id="74" name="Option 22"/>
-          <p:cNvSpPr/>
-          <p:nvPr/>
-        </p:nvSpPr>
-        <p:spPr>
-          <a:xfrm>
-            <a:off x="7909560" y="3602736"/>
-            <a:ext cx="1188720" cy="530352"/>
-          </a:xfrm>
-          <a:prstGeom prst="roundRect">
-            <a:avLst>
-              <a:gd name="adj" fmla="val 22000"/>
-            </a:avLst>
-          </a:prstGeom>
-          <a:solidFill>
-            <a:srgbClr val="FFFFFF"/>
-          </a:solidFill>
-          <a:ln w="38100">
-            <a:noFill/>
-          </a:ln>
-        </p:spPr>
-        <p:txBody>
-          <a:bodyPr wrap="square" lIns="73152" tIns="36576" rIns="73152" bIns="36576" rtlCol="0" anchor="ctr">
-            <a:noAutofit/>
-          </a:bodyPr>
-          <a:lstStyle/>
-          <a:p>
-            <a:pPr algn="ctr" indent="0" marL="0">
-              <a:buNone/>
-            </a:pPr>
-            <a:r>
-              <a:rPr lang="en-US" sz="2000" dirty="0" b="1">
-                <a:solidFill>
-                  <a:srgbClr val="1B2236"/>
-                </a:solidFill>
-                <a:latin typeface="Lexend Deca" pitchFamily="34" charset="0"/>
-                <a:ea typeface="Lexend Deca" pitchFamily="34" charset="-122"/>
-                <a:cs typeface="Lexend Deca" pitchFamily="34" charset="-120"/>
-              </a:rPr>
-              <a:t>Now</a:t>
-            </a:r>
-            <a:endParaRPr lang="en-US" sz="2000" dirty="0"/>
-          </a:p>
-        </p:txBody>
-      </p:sp>
-      <p:sp>
-        <p:nvSpPr>
-          <p:cNvPr id="75" name="Option 23"/>
-          <p:cNvSpPr/>
-          <p:nvPr/>
-        </p:nvSpPr>
-        <p:spPr>
-          <a:xfrm>
-            <a:off x="9326880" y="3602736"/>
-            <a:ext cx="1188720" cy="530352"/>
-          </a:xfrm>
-          <a:prstGeom prst="roundRect">
-            <a:avLst>
-              <a:gd name="adj" fmla="val 22000"/>
-            </a:avLst>
-          </a:prstGeom>
-          <a:solidFill>
-            <a:srgbClr val="FFFFFF"/>
-          </a:solidFill>
-          <a:ln w="38100">
-            <a:noFill/>
-          </a:ln>
-        </p:spPr>
-        <p:txBody>
-          <a:bodyPr wrap="square" lIns="73152" tIns="36576" rIns="73152" bIns="36576" rtlCol="0" anchor="ctr">
-            <a:noAutofit/>
-          </a:bodyPr>
-          <a:lstStyle/>
-          <a:p>
-            <a:pPr algn="ctr" indent="0" marL="0">
-              <a:buNone/>
-            </a:pPr>
-            <a:r>
-              <a:rPr lang="en-US" sz="2000" dirty="0" b="1">
-                <a:solidFill>
-                  <a:srgbClr val="1B2236"/>
-                </a:solidFill>
-                <a:latin typeface="Lexend Deca" pitchFamily="34" charset="0"/>
-                <a:ea typeface="Lexend Deca" pitchFamily="34" charset="-122"/>
-                <a:cs typeface="Lexend Deca" pitchFamily="34" charset="-120"/>
-              </a:rPr>
-              <a:t>Next</a:t>
-            </a:r>
-            <a:endParaRPr lang="en-US" sz="2000" dirty="0"/>
-          </a:p>
-        </p:txBody>
-      </p:sp>
-      <p:sp>
-        <p:nvSpPr>
-          <p:cNvPr id="76" name="Circle 2"/>
-          <p:cNvSpPr/>
-          <p:nvPr/>
-        </p:nvSpPr>
-        <p:spPr>
-          <a:xfrm>
-            <a:off x="7781544" y="3538728"/>
-            <a:ext cx="1444752" cy="658368"/>
-          </a:xfrm>
-          <a:prstGeom prst="ellipse">
-            <a:avLst/>
-          </a:prstGeom>
-          <a:noFill/>
-          <a:ln w="50800">
-            <a:solidFill>
-              <a:srgbClr val="5B3FC4"/>
-            </a:solidFill>
-          </a:ln>
-        </p:spPr>
-        <p:txBody>
-          <a:bodyPr wrap="square" lIns="73152" tIns="36576" rIns="73152" bIns="36576" rtlCol="0" anchor="ctr">
-            <a:noAutofit/>
-          </a:bodyPr>
-          <a:lstStyle/>
-          <a:p>
-            <a:pPr algn="l" indent="0" marL="0">
-              <a:buNone/>
-            </a:pPr>
-            <a:r>
-              <a:rPr lang="en-US" sz="2000" dirty="0">
-                <a:solidFill>
-                  <a:srgbClr val="1B2236"/>
-                </a:solidFill>
-                <a:latin typeface="Lexend Deca" pitchFamily="34" charset="0"/>
-                <a:ea typeface="Lexend Deca" pitchFamily="34" charset="-122"/>
-                <a:cs typeface="Lexend Deca" pitchFamily="34" charset="-120"/>
-              </a:rPr>
-              <a:t/>
-            </a:r>
-            <a:endParaRPr lang="en-US" sz="2000" dirty="0"/>
-          </a:p>
-        </p:txBody>
-      </p:sp>
-      <p:sp>
-        <p:nvSpPr>
-          <p:cNvPr id="77" name="Statement 3"/>
-          <p:cNvSpPr/>
-          <p:nvPr/>
-        </p:nvSpPr>
-        <p:spPr>
-          <a:xfrm>
-            <a:off x="502920" y="4297680"/>
-            <a:ext cx="5760720" cy="603504"/>
-          </a:xfrm>
-          <a:prstGeom prst="rect">
-            <a:avLst/>
-          </a:prstGeom>
-          <a:noFill/>
-          <a:ln w="38100">
-            <a:noFill/>
-          </a:ln>
-        </p:spPr>
-        <p:txBody>
-          <a:bodyPr wrap="square" lIns="73152" tIns="36576" rIns="73152" bIns="36576" rtlCol="0" anchor="ctr">
-            <a:noAutofit/>
-          </a:bodyPr>
-          <a:lstStyle/>
-          <a:p>
-            <a:pPr algn="l" indent="0" marL="0">
-              <a:buNone/>
-            </a:pPr>
-            <a:r>
-              <a:rPr lang="en-US" sz="2000" dirty="0">
-                <a:solidFill>
-                  <a:srgbClr val="1B2236"/>
-                </a:solidFill>
-                <a:latin typeface="Lexend Deca" pitchFamily="34" charset="0"/>
-                <a:ea typeface="Lexend Deca" pitchFamily="34" charset="-122"/>
-                <a:cs typeface="Lexend Deca" pitchFamily="34" charset="-120"/>
-              </a:rPr>
-              <a:t>3. She makes her own appointments.</a:t>
-            </a:r>
-            <a:endParaRPr lang="en-US" sz="2000" dirty="0"/>
-          </a:p>
-        </p:txBody>
-      </p:sp>
-      <p:sp>
-        <p:nvSpPr>
-          <p:cNvPr id="78" name="Option 31"/>
-          <p:cNvSpPr/>
-          <p:nvPr/>
-        </p:nvSpPr>
-        <p:spPr>
-          <a:xfrm>
-            <a:off x="6492240" y="4334256"/>
-            <a:ext cx="1188720" cy="530352"/>
-          </a:xfrm>
-          <a:prstGeom prst="roundRect">
-            <a:avLst>
-              <a:gd name="adj" fmla="val 22000"/>
-            </a:avLst>
-          </a:prstGeom>
-          <a:solidFill>
-            <a:srgbClr val="FFFFFF"/>
-          </a:solidFill>
-          <a:ln w="38100">
-            <a:noFill/>
-          </a:ln>
-        </p:spPr>
-        <p:txBody>
-          <a:bodyPr wrap="square" lIns="73152" tIns="36576" rIns="73152" bIns="36576" rtlCol="0" anchor="ctr">
-            <a:noAutofit/>
-          </a:bodyPr>
-          <a:lstStyle/>
-          <a:p>
-            <a:pPr algn="ctr" indent="0" marL="0">
-              <a:buNone/>
-            </a:pPr>
-            <a:r>
-              <a:rPr lang="en-US" sz="2000" dirty="0" b="1">
-                <a:solidFill>
-                  <a:srgbClr val="1B2236"/>
-                </a:solidFill>
-                <a:latin typeface="Lexend Deca" pitchFamily="34" charset="0"/>
-                <a:ea typeface="Lexend Deca" pitchFamily="34" charset="-122"/>
-                <a:cs typeface="Lexend Deca" pitchFamily="34" charset="-120"/>
-              </a:rPr>
-              <a:t>Then</a:t>
-            </a:r>
-            <a:endParaRPr lang="en-US" sz="2000" dirty="0"/>
-          </a:p>
-        </p:txBody>
-      </p:sp>
-      <p:sp>
-        <p:nvSpPr>
-          <p:cNvPr id="79" name="Option 32"/>
-          <p:cNvSpPr/>
-          <p:nvPr/>
-        </p:nvSpPr>
-        <p:spPr>
-          <a:xfrm>
-            <a:off x="7909560" y="4334256"/>
-            <a:ext cx="1188720" cy="530352"/>
-          </a:xfrm>
-          <a:prstGeom prst="roundRect">
-            <a:avLst>
-              <a:gd name="adj" fmla="val 22000"/>
-            </a:avLst>
-          </a:prstGeom>
-          <a:solidFill>
-            <a:srgbClr val="FFFFFF"/>
-          </a:solidFill>
-          <a:ln w="38100">
-            <a:noFill/>
-          </a:ln>
-        </p:spPr>
-        <p:txBody>
-          <a:bodyPr wrap="square" lIns="73152" tIns="36576" rIns="73152" bIns="36576" rtlCol="0" anchor="ctr">
-            <a:noAutofit/>
-          </a:bodyPr>
-          <a:lstStyle/>
-          <a:p>
-            <a:pPr algn="ctr" indent="0" marL="0">
-              <a:buNone/>
-            </a:pPr>
-            <a:r>
-              <a:rPr lang="en-US" sz="2000" dirty="0" b="1">
-                <a:solidFill>
-                  <a:srgbClr val="1B2236"/>
-                </a:solidFill>
-                <a:latin typeface="Lexend Deca" pitchFamily="34" charset="0"/>
-                <a:ea typeface="Lexend Deca" pitchFamily="34" charset="-122"/>
-                <a:cs typeface="Lexend Deca" pitchFamily="34" charset="-120"/>
-              </a:rPr>
-              <a:t>Now</a:t>
-            </a:r>
-            <a:endParaRPr lang="en-US" sz="2000" dirty="0"/>
-          </a:p>
-        </p:txBody>
-      </p:sp>
-      <p:sp>
-        <p:nvSpPr>
-          <p:cNvPr id="80" name="Option 33"/>
-          <p:cNvSpPr/>
-          <p:nvPr/>
-        </p:nvSpPr>
-        <p:spPr>
-          <a:xfrm>
-            <a:off x="9326880" y="4334256"/>
-            <a:ext cx="1188720" cy="530352"/>
-          </a:xfrm>
-          <a:prstGeom prst="roundRect">
-            <a:avLst>
-              <a:gd name="adj" fmla="val 22000"/>
-            </a:avLst>
-          </a:prstGeom>
-          <a:solidFill>
-            <a:srgbClr val="FFFFFF"/>
-          </a:solidFill>
-          <a:ln w="38100">
-            <a:noFill/>
-          </a:ln>
-        </p:spPr>
-        <p:txBody>
-          <a:bodyPr wrap="square" lIns="73152" tIns="36576" rIns="73152" bIns="36576" rtlCol="0" anchor="ctr">
-            <a:noAutofit/>
-          </a:bodyPr>
-          <a:lstStyle/>
-          <a:p>
-            <a:pPr algn="ctr" indent="0" marL="0">
-              <a:buNone/>
-            </a:pPr>
-            <a:r>
-              <a:rPr lang="en-US" sz="2000" dirty="0" b="1">
-                <a:solidFill>
-                  <a:srgbClr val="1B2236"/>
-                </a:solidFill>
-                <a:latin typeface="Lexend Deca" pitchFamily="34" charset="0"/>
-                <a:ea typeface="Lexend Deca" pitchFamily="34" charset="-122"/>
-                <a:cs typeface="Lexend Deca" pitchFamily="34" charset="-120"/>
-              </a:rPr>
-              <a:t>Next</a:t>
-            </a:r>
-            <a:endParaRPr lang="en-US" sz="2000" dirty="0"/>
-          </a:p>
-        </p:txBody>
-      </p:sp>
-      <p:sp>
-        <p:nvSpPr>
-          <p:cNvPr id="81" name="Circle 3"/>
-          <p:cNvSpPr/>
-          <p:nvPr/>
-        </p:nvSpPr>
-        <p:spPr>
-          <a:xfrm>
-            <a:off x="7781544" y="4270248"/>
-            <a:ext cx="1444752" cy="658368"/>
-          </a:xfrm>
-          <a:prstGeom prst="ellipse">
-            <a:avLst/>
-          </a:prstGeom>
-          <a:noFill/>
-          <a:ln w="50800">
-            <a:solidFill>
-              <a:srgbClr val="5B3FC4"/>
-            </a:solidFill>
-          </a:ln>
-        </p:spPr>
-        <p:txBody>
-          <a:bodyPr wrap="square" lIns="73152" tIns="36576" rIns="73152" bIns="36576" rtlCol="0" anchor="ctr">
-            <a:noAutofit/>
-          </a:bodyPr>
-          <a:lstStyle/>
-          <a:p>
-            <a:pPr algn="l" indent="0" marL="0">
-              <a:buNone/>
-            </a:pPr>
-            <a:r>
-              <a:rPr lang="en-US" sz="2000" dirty="0">
-                <a:solidFill>
-                  <a:srgbClr val="1B2236"/>
-                </a:solidFill>
-                <a:latin typeface="Lexend Deca" pitchFamily="34" charset="0"/>
-                <a:ea typeface="Lexend Deca" pitchFamily="34" charset="-122"/>
-                <a:cs typeface="Lexend Deca" pitchFamily="34" charset="-120"/>
-              </a:rPr>
-              <a:t/>
-            </a:r>
-            <a:endParaRPr lang="en-US" sz="2000" dirty="0"/>
-          </a:p>
-        </p:txBody>
-      </p:sp>
-      <p:sp>
-        <p:nvSpPr>
-          <p:cNvPr id="82" name="Statement 4"/>
-          <p:cNvSpPr/>
-          <p:nvPr/>
-        </p:nvSpPr>
-        <p:spPr>
-          <a:xfrm>
-            <a:off x="502920" y="5029200"/>
-            <a:ext cx="5760720" cy="603504"/>
-          </a:xfrm>
-          <a:prstGeom prst="rect">
-            <a:avLst/>
-          </a:prstGeom>
-          <a:noFill/>
-          <a:ln w="38100">
-            <a:noFill/>
-          </a:ln>
-        </p:spPr>
-        <p:txBody>
-          <a:bodyPr wrap="square" lIns="73152" tIns="36576" rIns="73152" bIns="36576" rtlCol="0" anchor="ctr">
-            <a:noAutofit/>
-          </a:bodyPr>
-          <a:lstStyle/>
-          <a:p>
-            <a:pPr algn="l" indent="0" marL="0">
-              <a:buNone/>
-            </a:pPr>
-            <a:r>
-              <a:rPr lang="en-US" sz="2000" dirty="0">
-                <a:solidFill>
-                  <a:srgbClr val="1B2236"/>
-                </a:solidFill>
-                <a:latin typeface="Lexend Deca" pitchFamily="34" charset="0"/>
-                <a:ea typeface="Lexend Deca" pitchFamily="34" charset="-122"/>
-                <a:cs typeface="Lexend Deca" pitchFamily="34" charset="-120"/>
-              </a:rPr>
-              <a:t>4. She is going to take a computer class.</a:t>
-            </a:r>
-            <a:endParaRPr lang="en-US" sz="2000" dirty="0"/>
-          </a:p>
-        </p:txBody>
-      </p:sp>
-      <p:sp>
-        <p:nvSpPr>
-          <p:cNvPr id="83" name="Option 41"/>
-          <p:cNvSpPr/>
-          <p:nvPr/>
-        </p:nvSpPr>
-        <p:spPr>
-          <a:xfrm>
-            <a:off x="6492240" y="5065776"/>
-            <a:ext cx="1188720" cy="530352"/>
-          </a:xfrm>
-          <a:prstGeom prst="roundRect">
-            <a:avLst>
-              <a:gd name="adj" fmla="val 22000"/>
-            </a:avLst>
-          </a:prstGeom>
-          <a:solidFill>
-            <a:srgbClr val="FFFFFF"/>
-          </a:solidFill>
-          <a:ln w="38100">
-            <a:noFill/>
-          </a:ln>
-        </p:spPr>
-        <p:txBody>
-          <a:bodyPr wrap="square" lIns="73152" tIns="36576" rIns="73152" bIns="36576" rtlCol="0" anchor="ctr">
-            <a:noAutofit/>
-          </a:bodyPr>
-          <a:lstStyle/>
-          <a:p>
-            <a:pPr algn="ctr" indent="0" marL="0">
-              <a:buNone/>
-            </a:pPr>
-            <a:r>
-              <a:rPr lang="en-US" sz="2000" dirty="0" b="1">
-                <a:solidFill>
-                  <a:srgbClr val="1B2236"/>
-                </a:solidFill>
-                <a:latin typeface="Lexend Deca" pitchFamily="34" charset="0"/>
-                <a:ea typeface="Lexend Deca" pitchFamily="34" charset="-122"/>
-                <a:cs typeface="Lexend Deca" pitchFamily="34" charset="-120"/>
-              </a:rPr>
-              <a:t>Then</a:t>
-            </a:r>
-            <a:endParaRPr lang="en-US" sz="2000" dirty="0"/>
-          </a:p>
-        </p:txBody>
-      </p:sp>
-      <p:sp>
-        <p:nvSpPr>
-          <p:cNvPr id="84" name="Option 42"/>
-          <p:cNvSpPr/>
-          <p:nvPr/>
-        </p:nvSpPr>
-        <p:spPr>
-          <a:xfrm>
-            <a:off x="7909560" y="5065776"/>
-            <a:ext cx="1188720" cy="530352"/>
-          </a:xfrm>
-          <a:prstGeom prst="roundRect">
-            <a:avLst>
-              <a:gd name="adj" fmla="val 22000"/>
-            </a:avLst>
-          </a:prstGeom>
-          <a:solidFill>
-            <a:srgbClr val="FFFFFF"/>
-          </a:solidFill>
-          <a:ln w="38100">
-            <a:noFill/>
-          </a:ln>
-        </p:spPr>
-        <p:txBody>
-          <a:bodyPr wrap="square" lIns="73152" tIns="36576" rIns="73152" bIns="36576" rtlCol="0" anchor="ctr">
-            <a:noAutofit/>
-          </a:bodyPr>
-          <a:lstStyle/>
-          <a:p>
-            <a:pPr algn="ctr" indent="0" marL="0">
-              <a:buNone/>
-            </a:pPr>
-            <a:r>
-              <a:rPr lang="en-US" sz="2000" dirty="0" b="1">
-                <a:solidFill>
-                  <a:srgbClr val="1B2236"/>
-                </a:solidFill>
-                <a:latin typeface="Lexend Deca" pitchFamily="34" charset="0"/>
-                <a:ea typeface="Lexend Deca" pitchFamily="34" charset="-122"/>
-                <a:cs typeface="Lexend Deca" pitchFamily="34" charset="-120"/>
-              </a:rPr>
-              <a:t>Now</a:t>
-            </a:r>
-            <a:endParaRPr lang="en-US" sz="2000" dirty="0"/>
-          </a:p>
-        </p:txBody>
-      </p:sp>
-      <p:sp>
-        <p:nvSpPr>
-          <p:cNvPr id="85" name="Option 43"/>
-          <p:cNvSpPr/>
-          <p:nvPr/>
-        </p:nvSpPr>
-        <p:spPr>
-          <a:xfrm>
-            <a:off x="9326880" y="5065776"/>
-            <a:ext cx="1188720" cy="530352"/>
-          </a:xfrm>
-          <a:prstGeom prst="roundRect">
-            <a:avLst>
-              <a:gd name="adj" fmla="val 22000"/>
-            </a:avLst>
-          </a:prstGeom>
-          <a:solidFill>
-            <a:srgbClr val="FFFFFF"/>
-          </a:solidFill>
-          <a:ln w="38100">
-            <a:noFill/>
-          </a:ln>
-        </p:spPr>
-        <p:txBody>
-          <a:bodyPr wrap="square" lIns="73152" tIns="36576" rIns="73152" bIns="36576" rtlCol="0" anchor="ctr">
-            <a:noAutofit/>
-          </a:bodyPr>
-          <a:lstStyle/>
-          <a:p>
-            <a:pPr algn="ctr" indent="0" marL="0">
-              <a:buNone/>
-            </a:pPr>
-            <a:r>
-              <a:rPr lang="en-US" sz="2000" dirty="0" b="1">
-                <a:solidFill>
-                  <a:srgbClr val="1B2236"/>
-                </a:solidFill>
-                <a:latin typeface="Lexend Deca" pitchFamily="34" charset="0"/>
-                <a:ea typeface="Lexend Deca" pitchFamily="34" charset="-122"/>
-                <a:cs typeface="Lexend Deca" pitchFamily="34" charset="-120"/>
-              </a:rPr>
-              <a:t>Next</a:t>
-            </a:r>
-            <a:endParaRPr lang="en-US" sz="2000" dirty="0"/>
-          </a:p>
-        </p:txBody>
-      </p:sp>
-      <p:sp>
-        <p:nvSpPr>
-          <p:cNvPr id="86" name="Circle 4"/>
-          <p:cNvSpPr/>
-          <p:nvPr/>
-        </p:nvSpPr>
-        <p:spPr>
-          <a:xfrm>
-            <a:off x="9198864" y="5001768"/>
-            <a:ext cx="1444752" cy="658368"/>
-          </a:xfrm>
-          <a:prstGeom prst="ellipse">
-            <a:avLst/>
-          </a:prstGeom>
-          <a:noFill/>
-          <a:ln w="50800">
-            <a:solidFill>
-              <a:srgbClr val="5B3FC4"/>
-            </a:solidFill>
-          </a:ln>
-        </p:spPr>
-        <p:txBody>
-          <a:bodyPr wrap="square" lIns="73152" tIns="36576" rIns="73152" bIns="36576" rtlCol="0" anchor="ctr">
-            <a:noAutofit/>
-          </a:bodyPr>
-          <a:lstStyle/>
-          <a:p>
-            <a:pPr algn="l" indent="0" marL="0">
-              <a:buNone/>
-            </a:pPr>
-            <a:r>
-              <a:rPr lang="en-US" sz="2000" dirty="0">
-                <a:solidFill>
-                  <a:srgbClr val="1B2236"/>
-                </a:solidFill>
-                <a:latin typeface="Lexend Deca" pitchFamily="34" charset="0"/>
-                <a:ea typeface="Lexend Deca" pitchFamily="34" charset="-122"/>
-                <a:cs typeface="Lexend Deca" pitchFamily="34" charset="-120"/>
-              </a:rPr>
-              <a:t/>
-            </a:r>
-            <a:endParaRPr lang="en-US" sz="2000" dirty="0"/>
-          </a:p>
-        </p:txBody>
-      </p:sp>
-      <p:sp>
-        <p:nvSpPr>
-          <p:cNvPr id="87" name="Statement 5"/>
-          <p:cNvSpPr/>
-          <p:nvPr/>
-        </p:nvSpPr>
-        <p:spPr>
-          <a:xfrm>
-            <a:off x="502920" y="5760720"/>
-            <a:ext cx="5760720" cy="603504"/>
-          </a:xfrm>
-          <a:prstGeom prst="rect">
-            <a:avLst/>
-          </a:prstGeom>
-          <a:noFill/>
-          <a:ln w="38100">
-            <a:noFill/>
-          </a:ln>
-        </p:spPr>
-        <p:txBody>
-          <a:bodyPr wrap="square" lIns="73152" tIns="36576" rIns="73152" bIns="36576" rtlCol="0" anchor="ctr">
-            <a:noAutofit/>
-          </a:bodyPr>
-          <a:lstStyle/>
-          <a:p>
-            <a:pPr algn="l" indent="0" marL="0">
-              <a:buNone/>
-            </a:pPr>
-            <a:r>
-              <a:rPr lang="en-US" sz="2000" dirty="0">
-                <a:solidFill>
-                  <a:srgbClr val="1B2236"/>
-                </a:solidFill>
-                <a:latin typeface="Lexend Deca" pitchFamily="34" charset="0"/>
-                <a:ea typeface="Lexend Deca" pitchFamily="34" charset="-122"/>
-                <a:cs typeface="Lexend Deca" pitchFamily="34" charset="-120"/>
-              </a:rPr>
-              <a:t>5. She is going to get an office job.</a:t>
-            </a:r>
-            <a:endParaRPr lang="en-US" sz="2000" dirty="0"/>
-          </a:p>
-        </p:txBody>
-      </p:sp>
-      <p:sp>
-        <p:nvSpPr>
-          <p:cNvPr id="88" name="Option 51"/>
-          <p:cNvSpPr/>
-          <p:nvPr/>
-        </p:nvSpPr>
-        <p:spPr>
-          <a:xfrm>
-            <a:off x="6492240" y="5797296"/>
-            <a:ext cx="1188720" cy="530352"/>
-          </a:xfrm>
-          <a:prstGeom prst="roundRect">
-            <a:avLst>
-              <a:gd name="adj" fmla="val 22000"/>
-            </a:avLst>
-          </a:prstGeom>
-          <a:solidFill>
-            <a:srgbClr val="FFFFFF"/>
-          </a:solidFill>
-          <a:ln w="38100">
-            <a:noFill/>
-          </a:ln>
-        </p:spPr>
-        <p:txBody>
-          <a:bodyPr wrap="square" lIns="73152" tIns="36576" rIns="73152" bIns="36576" rtlCol="0" anchor="ctr">
-            <a:noAutofit/>
-          </a:bodyPr>
-          <a:lstStyle/>
-          <a:p>
-            <a:pPr algn="ctr" indent="0" marL="0">
-              <a:buNone/>
-            </a:pPr>
-            <a:r>
-              <a:rPr lang="en-US" sz="2000" dirty="0" b="1">
-                <a:solidFill>
-                  <a:srgbClr val="1B2236"/>
-                </a:solidFill>
-                <a:latin typeface="Lexend Deca" pitchFamily="34" charset="0"/>
-                <a:ea typeface="Lexend Deca" pitchFamily="34" charset="-122"/>
-                <a:cs typeface="Lexend Deca" pitchFamily="34" charset="-120"/>
-              </a:rPr>
-              <a:t>Then</a:t>
-            </a:r>
-            <a:endParaRPr lang="en-US" sz="2000" dirty="0"/>
-          </a:p>
-        </p:txBody>
-      </p:sp>
-      <p:sp>
-        <p:nvSpPr>
-          <p:cNvPr id="89" name="Option 52"/>
-          <p:cNvSpPr/>
-          <p:nvPr/>
-        </p:nvSpPr>
-        <p:spPr>
-          <a:xfrm>
-            <a:off x="7909560" y="5797296"/>
-            <a:ext cx="1188720" cy="530352"/>
-          </a:xfrm>
-          <a:prstGeom prst="roundRect">
-            <a:avLst>
-              <a:gd name="adj" fmla="val 22000"/>
-            </a:avLst>
-          </a:prstGeom>
-          <a:solidFill>
-            <a:srgbClr val="FFFFFF"/>
-          </a:solidFill>
-          <a:ln w="38100">
-            <a:noFill/>
-          </a:ln>
-        </p:spPr>
-        <p:txBody>
-          <a:bodyPr wrap="square" lIns="73152" tIns="36576" rIns="73152" bIns="36576" rtlCol="0" anchor="ctr">
-            <a:noAutofit/>
-          </a:bodyPr>
-          <a:lstStyle/>
-          <a:p>
-            <a:pPr algn="ctr" indent="0" marL="0">
-              <a:buNone/>
-            </a:pPr>
-            <a:r>
-              <a:rPr lang="en-US" sz="2000" dirty="0" b="1">
-                <a:solidFill>
-                  <a:srgbClr val="1B2236"/>
-                </a:solidFill>
-                <a:latin typeface="Lexend Deca" pitchFamily="34" charset="0"/>
-                <a:ea typeface="Lexend Deca" pitchFamily="34" charset="-122"/>
-                <a:cs typeface="Lexend Deca" pitchFamily="34" charset="-120"/>
-              </a:rPr>
-              <a:t>Now</a:t>
-            </a:r>
-            <a:endParaRPr lang="en-US" sz="2000" dirty="0"/>
-          </a:p>
-        </p:txBody>
-      </p:sp>
-      <p:sp>
-        <p:nvSpPr>
-          <p:cNvPr id="90" name="Option 53"/>
-          <p:cNvSpPr/>
-          <p:nvPr/>
-        </p:nvSpPr>
-        <p:spPr>
-          <a:xfrm>
-            <a:off x="9326880" y="5797296"/>
-            <a:ext cx="1188720" cy="530352"/>
-          </a:xfrm>
-          <a:prstGeom prst="roundRect">
-            <a:avLst>
-              <a:gd name="adj" fmla="val 22000"/>
-            </a:avLst>
-          </a:prstGeom>
-          <a:solidFill>
-            <a:srgbClr val="FFFFFF"/>
-          </a:solidFill>
-          <a:ln w="38100">
-            <a:noFill/>
-          </a:ln>
-        </p:spPr>
-        <p:txBody>
-          <a:bodyPr wrap="square" lIns="73152" tIns="36576" rIns="73152" bIns="36576" rtlCol="0" anchor="ctr">
-            <a:noAutofit/>
-          </a:bodyPr>
-          <a:lstStyle/>
-          <a:p>
-            <a:pPr algn="ctr" indent="0" marL="0">
-              <a:buNone/>
-            </a:pPr>
-            <a:r>
-              <a:rPr lang="en-US" sz="2000" dirty="0" b="1">
-                <a:solidFill>
-                  <a:srgbClr val="1B2236"/>
-                </a:solidFill>
-                <a:latin typeface="Lexend Deca" pitchFamily="34" charset="0"/>
-                <a:ea typeface="Lexend Deca" pitchFamily="34" charset="-122"/>
-                <a:cs typeface="Lexend Deca" pitchFamily="34" charset="-120"/>
-              </a:rPr>
-              <a:t>Next</a:t>
-            </a:r>
-            <a:endParaRPr lang="en-US" sz="2000" dirty="0"/>
-          </a:p>
-        </p:txBody>
-      </p:sp>
-      <p:sp>
-        <p:nvSpPr>
-          <p:cNvPr id="91" name="Circle 5"/>
-          <p:cNvSpPr/>
-          <p:nvPr/>
-        </p:nvSpPr>
-        <p:spPr>
-          <a:xfrm>
-            <a:off x="9198864" y="5733288"/>
-            <a:ext cx="1444752" cy="658368"/>
-          </a:xfrm>
-          <a:prstGeom prst="ellipse">
-            <a:avLst/>
-          </a:prstGeom>
-          <a:noFill/>
-          <a:ln w="50800">
-            <a:solidFill>
-              <a:srgbClr val="5B3FC4"/>
-            </a:solidFill>
-          </a:ln>
-        </p:spPr>
-        <p:txBody>
-          <a:bodyPr wrap="square" lIns="73152" tIns="36576" rIns="73152" bIns="36576" rtlCol="0" anchor="ctr">
-            <a:noAutofit/>
-          </a:bodyPr>
-          <a:lstStyle/>
-          <a:p>
-            <a:pPr algn="l" indent="0" marL="0">
-              <a:buNone/>
-            </a:pPr>
-            <a:r>
-              <a:rPr lang="en-US" sz="2000" dirty="0">
-                <a:solidFill>
-                  <a:srgbClr val="1B2236"/>
-                </a:solidFill>
-                <a:latin typeface="Lexend Deca" pitchFamily="34" charset="0"/>
-                <a:ea typeface="Lexend Deca" pitchFamily="34" charset="-122"/>
-                <a:cs typeface="Lexend Deca" pitchFamily="34" charset="-120"/>
-              </a:rPr>
-              <a:t/>
-            </a:r>
-            <a:endParaRPr lang="en-US" sz="2000" dirty="0"/>
-          </a:p>
-        </p:txBody>
-      </p:sp>
-    </p:spTree>
-  </p:cSld>
-  <p:clrMapOvr>
-    <a:masterClrMapping/>
-  </p:clrMapOvr>
-  <p:timing>
-    <p:tnLst>
-      <p:par>
-        <p:cTn id="1" dur="indefinite" restart="never" nodeType="tmRoot">
-          <p:childTnLst>
-            <p:seq concurrent="1" nextAc="seek">
-              <p:cTn id="2" dur="indefinite" nodeType="mainSeq">
-                <p:childTnLst>
-                  <p:par>
-                    <p:cTn id="3" fill="hold">
-                      <p:stCondLst>
-                        <p:cond delay="indefinite"/>
-                      </p:stCondLst>
-                      <p:childTnLst>
-                        <p:par>
-                          <p:cTn id="4" fill="hold">
-                            <p:stCondLst>
-                              <p:cond delay="0"/>
-                            </p:stCondLst>
-                            <p:childTnLst>
-                              <p:par>
-                                <p:cTn id="5" presetID="10" presetClass="entr" presetSubtype="0" fill="hold" nodeType="clickEffect">
-                                  <p:stCondLst>
-                                    <p:cond delay="0"/>
-                                  </p:stCondLst>
-                                  <p:childTnLst>
-                                    <p:set>
-                                      <p:cBhvr>
-                                        <p:cTn id="6" dur="1" fill="hold">
-                                          <p:stCondLst>
-                                            <p:cond delay="0"/>
-                                          </p:stCondLst>
-                                        </p:cTn>
-                                        <p:tgtEl>
-                                          <p:spTgt spid="71"/>
-                                        </p:tgtEl>
-                                        <p:attrNameLst>
-                                          <p:attrName>style.visibility</p:attrName>
-                                        </p:attrNameLst>
-                                      </p:cBhvr>
-                                      <p:to>
-                                        <p:strVal val="visible"/>
-                                      </p:to>
-                                    </p:set>
-                                    <p:animEffect transition="in" filter="fade">
-                                      <p:cBhvr>
-                                        <p:cTn id="7" dur="400"/>
-                                        <p:tgtEl>
-                                          <p:spTgt spid="71"/>
-                                        </p:tgtEl>
-                                      </p:cBhvr>
-                                    </p:animEffect>
-                                  </p:childTnLst>
-                                </p:cTn>
-                              </p:par>
-                            </p:childTnLst>
-                          </p:cTn>
-                        </p:par>
-                      </p:childTnLst>
-                    </p:cTn>
-                  </p:par>
-                  <p:par>
-                    <p:cTn id="8" fill="hold">
-                      <p:stCondLst>
-                        <p:cond delay="indefinite"/>
-                      </p:stCondLst>
-                      <p:childTnLst>
-                        <p:par>
-                          <p:cTn id="9" fill="hold">
-                            <p:stCondLst>
-                              <p:cond delay="0"/>
-                            </p:stCondLst>
-                            <p:childTnLst>
-                              <p:par>
-                                <p:cTn id="10" presetID="10" presetClass="entr" presetSubtype="0" fill="hold" nodeType="clickEffect">
-                                  <p:stCondLst>
-                                    <p:cond delay="0"/>
-                                  </p:stCondLst>
-                                  <p:childTnLst>
-                                    <p:set>
-                                      <p:cBhvr>
-                                        <p:cTn id="11" dur="1" fill="hold">
-                                          <p:stCondLst>
-                                            <p:cond delay="0"/>
-                                          </p:stCondLst>
-                                        </p:cTn>
-                                        <p:tgtEl>
-                                          <p:spTgt spid="76"/>
-                                        </p:tgtEl>
-                                        <p:attrNameLst>
-                                          <p:attrName>style.visibility</p:attrName>
-                                        </p:attrNameLst>
-                                      </p:cBhvr>
-                                      <p:to>
-                                        <p:strVal val="visible"/>
-                                      </p:to>
-                                    </p:set>
-                                    <p:animEffect transition="in" filter="fade">
-                                      <p:cBhvr>
-                                        <p:cTn id="12" dur="400"/>
-                                        <p:tgtEl>
-                                          <p:spTgt spid="76"/>
-                                        </p:tgtEl>
-                                      </p:cBhvr>
-                                    </p:animEffect>
-                                  </p:childTnLst>
-                                </p:cTn>
-                              </p:par>
-                            </p:childTnLst>
-                          </p:cTn>
-                        </p:par>
-                      </p:childTnLst>
-                    </p:cTn>
-                  </p:par>
-                  <p:par>
-                    <p:cTn id="13" fill="hold">
-                      <p:stCondLst>
-                        <p:cond delay="indefinite"/>
-                      </p:stCondLst>
-                      <p:childTnLst>
-                        <p:par>
-                          <p:cTn id="14" fill="hold">
-                            <p:stCondLst>
-                              <p:cond delay="0"/>
-                            </p:stCondLst>
-                            <p:childTnLst>
-                              <p:par>
-                                <p:cTn id="15" presetID="10" presetClass="entr" presetSubtype="0" fill="hold" nodeType="clickEffect">
-                                  <p:stCondLst>
-                                    <p:cond delay="0"/>
-                                  </p:stCondLst>
-                                  <p:childTnLst>
-                                    <p:set>
-                                      <p:cBhvr>
-                                        <p:cTn id="16" dur="1" fill="hold">
-                                          <p:stCondLst>
-                                            <p:cond delay="0"/>
-                                          </p:stCondLst>
-                                        </p:cTn>
-                                        <p:tgtEl>
-                                          <p:spTgt spid="81"/>
-                                        </p:tgtEl>
-                                        <p:attrNameLst>
-                                          <p:attrName>style.visibility</p:attrName>
-                                        </p:attrNameLst>
-                                      </p:cBhvr>
-                                      <p:to>
-                                        <p:strVal val="visible"/>
-                                      </p:to>
-                                    </p:set>
-                                    <p:animEffect transition="in" filter="fade">
-                                      <p:cBhvr>
-                                        <p:cTn id="17" dur="400"/>
-                                        <p:tgtEl>
-                                          <p:spTgt spid="81"/>
-                                        </p:tgtEl>
-                                      </p:cBhvr>
-                                    </p:animEffect>
-                                  </p:childTnLst>
-                                </p:cTn>
-                              </p:par>
-                            </p:childTnLst>
-                          </p:cTn>
-                        </p:par>
-                      </p:childTnLst>
-                    </p:cTn>
-                  </p:par>
-                  <p:par>
-                    <p:cTn id="18" fill="hold">
-                      <p:stCondLst>
-                        <p:cond delay="indefinite"/>
-                      </p:stCondLst>
-                      <p:childTnLst>
-                        <p:par>
-                          <p:cTn id="19" fill="hold">
-                            <p:stCondLst>
-                              <p:cond delay="0"/>
-                            </p:stCondLst>
-                            <p:childTnLst>
-                              <p:par>
-                                <p:cTn id="20" presetID="10" presetClass="entr" presetSubtype="0" fill="hold" nodeType="clickEffect">
-                                  <p:stCondLst>
-                                    <p:cond delay="0"/>
-                                  </p:stCondLst>
-                                  <p:childTnLst>
-                                    <p:set>
-                                      <p:cBhvr>
-                                        <p:cTn id="21" dur="1" fill="hold">
-                                          <p:stCondLst>
-                                            <p:cond delay="0"/>
-                                          </p:stCondLst>
-                                        </p:cTn>
-                                        <p:tgtEl>
-                                          <p:spTgt spid="86"/>
-                                        </p:tgtEl>
-                                        <p:attrNameLst>
-                                          <p:attrName>style.visibility</p:attrName>
-                                        </p:attrNameLst>
-                                      </p:cBhvr>
-                                      <p:to>
-                                        <p:strVal val="visible"/>
-                                      </p:to>
-                                    </p:set>
-                                    <p:animEffect transition="in" filter="fade">
-                                      <p:cBhvr>
-                                        <p:cTn id="22" dur="400"/>
-                                        <p:tgtEl>
-                                          <p:spTgt spid="86"/>
-                                        </p:tgtEl>
-                                      </p:cBhvr>
-                                    </p:animEffect>
-                                  </p:childTnLst>
-                                </p:cTn>
-                              </p:par>
-                            </p:childTnLst>
-                          </p:cTn>
-                        </p:par>
-                      </p:childTnLst>
-                    </p:cTn>
-                  </p:par>
-                  <p:par>
-                    <p:cTn id="23" fill="hold">
-                      <p:stCondLst>
-                        <p:cond delay="indefinite"/>
-                      </p:stCondLst>
-                      <p:childTnLst>
-                        <p:par>
-                          <p:cTn id="24" fill="hold">
-                            <p:stCondLst>
-                              <p:cond delay="0"/>
-                            </p:stCondLst>
-                            <p:childTnLst>
-                              <p:par>
-                                <p:cTn id="25" presetID="10" presetClass="entr" presetSubtype="0" fill="hold" nodeType="clickEffect">
-                                  <p:stCondLst>
-                                    <p:cond delay="0"/>
-                                  </p:stCondLst>
-                                  <p:childTnLst>
-                                    <p:set>
-                                      <p:cBhvr>
-                                        <p:cTn id="26" dur="1" fill="hold">
-                                          <p:stCondLst>
-                                            <p:cond delay="0"/>
-                                          </p:stCondLst>
-                                        </p:cTn>
-                                        <p:tgtEl>
-                                          <p:spTgt spid="91"/>
-                                        </p:tgtEl>
-                                        <p:attrNameLst>
-                                          <p:attrName>style.visibility</p:attrName>
-                                        </p:attrNameLst>
-                                      </p:cBhvr>
-                                      <p:to>
-                                        <p:strVal val="visible"/>
-                                      </p:to>
-                                    </p:set>
-                                    <p:animEffect transition="in" filter="fade">
-                                      <p:cBhvr>
-                                        <p:cTn id="27" dur="400"/>
-                                        <p:tgtEl>
-                                          <p:spTgt spid="91"/>
                                         </p:tgtEl>
                                       </p:cBhvr>
                                     </p:animEffect>
@@ -17495,6 +15746,1755 @@
                                         <p:cTn id="32" dur="400"/>
                                         <p:tgtEl>
                                           <p:spTgt spid="50"/>
+                                        </p:tgtEl>
+                                      </p:cBhvr>
+                                    </p:animEffect>
+                                  </p:childTnLst>
+                                </p:cTn>
+                              </p:par>
+                            </p:childTnLst>
+                          </p:cTn>
+                        </p:par>
+                      </p:childTnLst>
+                    </p:cTn>
+                  </p:par>
+                </p:childTnLst>
+              </p:cTn>
+              <p:prevCondLst>
+                <p:cond evt="onPrev" delay="0">
+                  <p:tgtEl>
+                    <p:sldTgt/>
+                  </p:tgtEl>
+                </p:cond>
+              </p:prevCondLst>
+              <p:nextCondLst>
+                <p:cond evt="onNext" delay="0">
+                  <p:tgtEl>
+                    <p:sldTgt/>
+                  </p:tgtEl>
+                </p:cond>
+              </p:nextCondLst>
+            </p:seq>
+          </p:childTnLst>
+        </p:cTn>
+      </p:par>
+    </p:tnLst>
+  </p:timing>
+</p:sld>
+</file>
+
+<file path=ppt/slides/slide6.xml><?xml version="1.0" encoding="utf-8"?>
+<p:sld xmlns:a="http://schemas.openxmlformats.org/drawingml/2006/main" xmlns:r="http://schemas.openxmlformats.org/officeDocument/2006/relationships" xmlns:p="http://schemas.openxmlformats.org/presentationml/2006/main">
+  <p:cSld name="Slide 17">
+    <p:bg>
+      <p:bgPr>
+        <a:solidFill>
+          <a:srgbClr val="F1F5FB"/>
+        </a:solidFill>
+      </p:bgPr>
+    </p:bg>
+    <p:spTree>
+      <p:nvGrpSpPr>
+        <p:cNvPr id="1" name=""/>
+        <p:cNvGrpSpPr/>
+        <p:nvPr/>
+      </p:nvGrpSpPr>
+      <p:grpSpPr>
+        <a:xfrm>
+          <a:off x="0" y="0"/>
+          <a:ext cx="0" cy="0"/>
+          <a:chOff x="0" y="0"/>
+          <a:chExt cx="0" cy="0"/>
+        </a:xfrm>
+      </p:grpSpPr>
+      <p:sp>
+        <p:nvSpPr>
+          <p:cNvPr id="2" name="Shape 0"/>
+          <p:cNvSpPr/>
+          <p:nvPr/>
+        </p:nvSpPr>
+        <p:spPr>
+          <a:xfrm>
+            <a:off x="164592" y="2980944"/>
+            <a:ext cx="11582705" cy="3623767"/>
+          </a:xfrm>
+          <a:prstGeom prst="round1Rect">
+            <a:avLst>
+              <a:gd name="adj" fmla="val 23087"/>
+            </a:avLst>
+          </a:prstGeom>
+          <a:solidFill>
+            <a:srgbClr val="8FAFE3"/>
+          </a:solidFill>
+          <a:ln/>
+        </p:spPr>
+        <p:txBody>
+          <a:bodyPr/>
+          <a:p/>
+        </p:txBody>
+      </p:sp>
+      <p:sp>
+        <p:nvSpPr>
+          <p:cNvPr id="3" name="Shape 1"/>
+          <p:cNvSpPr/>
+          <p:nvPr/>
+        </p:nvSpPr>
+        <p:spPr>
+          <a:xfrm>
+            <a:off x="233172" y="1137194"/>
+            <a:ext cx="5607101" cy="1375258"/>
+          </a:xfrm>
+          <a:prstGeom prst="roundRect">
+            <a:avLst>
+              <a:gd name="adj" fmla="val 16667"/>
+            </a:avLst>
+          </a:prstGeom>
+          <a:solidFill>
+            <a:srgbClr val="8FAFE3"/>
+          </a:solidFill>
+          <a:ln/>
+        </p:spPr>
+        <p:txBody>
+          <a:bodyPr/>
+          <a:p/>
+        </p:txBody>
+      </p:sp>
+      <p:sp>
+        <p:nvSpPr>
+          <p:cNvPr id="4" name="Shape 2"/>
+          <p:cNvSpPr/>
+          <p:nvPr/>
+        </p:nvSpPr>
+        <p:spPr>
+          <a:xfrm>
+            <a:off x="266090" y="1080821"/>
+            <a:ext cx="5607101" cy="1375258"/>
+          </a:xfrm>
+          <a:prstGeom prst="roundRect">
+            <a:avLst>
+              <a:gd name="adj" fmla="val 16667"/>
+            </a:avLst>
+          </a:prstGeom>
+          <a:solidFill>
+            <a:srgbClr val="FFFFFF"/>
+          </a:solidFill>
+          <a:ln/>
+        </p:spPr>
+        <p:txBody>
+          <a:bodyPr/>
+          <a:p/>
+        </p:txBody>
+      </p:sp>
+      <p:sp>
+        <p:nvSpPr>
+          <p:cNvPr id="5" name="Shape 3"/>
+          <p:cNvSpPr/>
+          <p:nvPr/>
+        </p:nvSpPr>
+        <p:spPr>
+          <a:xfrm>
+            <a:off x="0" y="2856586"/>
+            <a:ext cx="11582705" cy="3623767"/>
+          </a:xfrm>
+          <a:prstGeom prst="round1Rect">
+            <a:avLst>
+              <a:gd name="adj" fmla="val 23087"/>
+            </a:avLst>
+          </a:prstGeom>
+          <a:solidFill>
+            <a:srgbClr val="B9D2F7"/>
+          </a:solidFill>
+          <a:ln/>
+        </p:spPr>
+        <p:txBody>
+          <a:bodyPr/>
+          <a:p/>
+        </p:txBody>
+      </p:sp>
+      <p:sp>
+        <p:nvSpPr>
+          <p:cNvPr id="6" name="Text 4"/>
+          <p:cNvSpPr/>
+          <p:nvPr/>
+        </p:nvSpPr>
+        <p:spPr>
+          <a:xfrm>
+            <a:off x="416052" y="1452067"/>
+            <a:ext cx="5680253" cy="947318"/>
+          </a:xfrm>
+          <a:prstGeom prst="rect">
+            <a:avLst/>
+          </a:prstGeom>
+          <a:noFill/>
+          <a:ln/>
+        </p:spPr>
+        <p:txBody>
+          <a:bodyPr wrap="square" lIns="50800" tIns="50800" rIns="50800" bIns="50800" rtlCol="0" anchor="ctr"/>
+          <a:lstStyle/>
+          <a:p>
+            <a:pPr algn="l" indent="0" marL="0">
+              <a:buNone/>
+            </a:pPr>
+            <a:r>
+              <a:rPr lang="en-US" sz="4800" dirty="0" b="1">
+                <a:solidFill>
+                  <a:srgbClr val="1B2236"/>
+                </a:solidFill>
+                <a:latin typeface="Lexend Deca" pitchFamily="34" charset="0"/>
+                <a:ea typeface="Lexend Deca" pitchFamily="34" charset="-122"/>
+                <a:cs typeface="Lexend Deca" pitchFamily="34" charset="-120"/>
+              </a:rPr>
+              <a:t>Listening A</a:t>
+            </a:r>
+            <a:endParaRPr lang="en-US" sz="4800" dirty="0"/>
+          </a:p>
+        </p:txBody>
+      </p:sp>
+      <p:sp>
+        <p:nvSpPr>
+          <p:cNvPr id="7" name="Text 5"/>
+          <p:cNvSpPr/>
+          <p:nvPr/>
+        </p:nvSpPr>
+        <p:spPr>
+          <a:xfrm>
+            <a:off x="6745529" y="1234440"/>
+            <a:ext cx="4754880" cy="1188720"/>
+          </a:xfrm>
+          <a:prstGeom prst="rect">
+            <a:avLst/>
+          </a:prstGeom>
+          <a:noFill/>
+          <a:ln/>
+        </p:spPr>
+        <p:txBody>
+          <a:bodyPr wrap="square" rtlCol="0" anchor="ctr"/>
+          <a:lstStyle/>
+          <a:p>
+            <a:pPr algn="l" indent="0" marL="0">
+              <a:spcAft>
+                <a:spcPts val="400"/>
+              </a:spcAft>
+              <a:buNone/>
+            </a:pPr>
+            <a:r>
+              <a:rPr lang="en-US" sz="2200" dirty="0">
+                <a:solidFill>
+                  <a:srgbClr val="1B2236"/>
+                </a:solidFill>
+                <a:latin typeface="Lexend Deca" pitchFamily="34" charset="0"/>
+                <a:ea typeface="Lexend Deca" pitchFamily="34" charset="-122"/>
+                <a:cs typeface="Lexend Deca" pitchFamily="34" charset="-120"/>
+              </a:rPr>
+              <a:t>Listen. Then, now,</a:t>
+            </a:r>
+            <a:endParaRPr lang="en-US" sz="2200" dirty="0"/>
+          </a:p>
+          <a:p>
+            <a:pPr algn="l" indent="0" marL="0">
+              <a:spcAft>
+                <a:spcPts val="400"/>
+              </a:spcAft>
+              <a:buNone/>
+            </a:pPr>
+            <a:r>
+              <a:rPr lang="en-US" sz="2200" dirty="0">
+                <a:solidFill>
+                  <a:srgbClr val="1B2236"/>
+                </a:solidFill>
+                <a:latin typeface="Lexend Deca" pitchFamily="34" charset="0"/>
+                <a:ea typeface="Lexend Deca" pitchFamily="34" charset="-122"/>
+                <a:cs typeface="Lexend Deca" pitchFamily="34" charset="-120"/>
+              </a:rPr>
+              <a:t>or next?</a:t>
+            </a:r>
+            <a:endParaRPr lang="en-US" sz="2200" dirty="0"/>
+          </a:p>
+        </p:txBody>
+      </p:sp>
+      <p:sp>
+        <p:nvSpPr>
+          <p:cNvPr id="24" name="Shape 22"/>
+          <p:cNvSpPr/>
+          <p:nvPr/>
+        </p:nvSpPr>
+        <p:spPr>
+          <a:xfrm>
+            <a:off x="10865815" y="2695651"/>
+            <a:ext cx="727862" cy="687570"/>
+          </a:xfrm>
+          <a:prstGeom prst="star10">
+            <a:avLst/>
+          </a:prstGeom>
+          <a:solidFill>
+            <a:srgbClr val="8FAFE3"/>
+          </a:solidFill>
+          <a:ln/>
+        </p:spPr>
+        <p:txBody>
+          <a:bodyPr/>
+          <a:p/>
+        </p:txBody>
+      </p:sp>
+      <p:sp>
+        <p:nvSpPr>
+          <p:cNvPr id="25" name="Shape 23"/>
+          <p:cNvSpPr/>
+          <p:nvPr/>
+        </p:nvSpPr>
+        <p:spPr>
+          <a:xfrm>
+            <a:off x="10924304" y="2686553"/>
+            <a:ext cx="740860" cy="740860"/>
+          </a:xfrm>
+          <a:prstGeom prst="star10">
+            <a:avLst/>
+          </a:prstGeom>
+          <a:solidFill>
+            <a:srgbClr val="FFE28C"/>
+          </a:solidFill>
+          <a:ln/>
+        </p:spPr>
+        <p:txBody>
+          <a:bodyPr/>
+          <a:p/>
+        </p:txBody>
+      </p:sp>
+      <p:sp>
+        <p:nvSpPr>
+          <p:cNvPr id="26" name="Shape 24"/>
+          <p:cNvSpPr/>
+          <p:nvPr/>
+        </p:nvSpPr>
+        <p:spPr>
+          <a:xfrm rot="900000">
+            <a:off x="11125766" y="2899063"/>
+            <a:ext cx="316490" cy="316490"/>
+          </a:xfrm>
+          <a:prstGeom prst="mathPlus">
+            <a:avLst/>
+          </a:prstGeom>
+          <a:solidFill>
+            <a:srgbClr val="1B2236"/>
+          </a:solidFill>
+          <a:ln/>
+        </p:spPr>
+        <p:txBody>
+          <a:bodyPr/>
+          <a:p/>
+        </p:txBody>
+      </p:sp>
+      <p:sp>
+        <p:nvSpPr>
+          <p:cNvPr id="67" name="Statement 1"/>
+          <p:cNvSpPr/>
+          <p:nvPr/>
+        </p:nvSpPr>
+        <p:spPr>
+          <a:xfrm>
+            <a:off x="502920" y="2834640"/>
+            <a:ext cx="5760720" cy="603504"/>
+          </a:xfrm>
+          <a:prstGeom prst="rect">
+            <a:avLst/>
+          </a:prstGeom>
+          <a:noFill/>
+          <a:ln w="38100">
+            <a:noFill/>
+          </a:ln>
+        </p:spPr>
+        <p:txBody>
+          <a:bodyPr wrap="square" lIns="73152" tIns="36576" rIns="73152" bIns="36576" rtlCol="0" anchor="ctr">
+            <a:noAutofit/>
+          </a:bodyPr>
+          <a:lstStyle/>
+          <a:p>
+            <a:pPr algn="l" indent="0" marL="0">
+              <a:buNone/>
+            </a:pPr>
+            <a:r>
+              <a:rPr lang="en-US" sz="2000" dirty="0">
+                <a:solidFill>
+                  <a:srgbClr val="1B2236"/>
+                </a:solidFill>
+                <a:latin typeface="Lexend Deca" pitchFamily="34" charset="0"/>
+                <a:ea typeface="Lexend Deca" pitchFamily="34" charset="-122"/>
+                <a:cs typeface="Lexend Deca" pitchFamily="34" charset="-120"/>
+              </a:rPr>
+              <a:t>1. She was nervous.</a:t>
+            </a:r>
+            <a:endParaRPr lang="en-US" sz="2000" dirty="0"/>
+          </a:p>
+        </p:txBody>
+      </p:sp>
+      <p:sp>
+        <p:nvSpPr>
+          <p:cNvPr id="68" name="Option 11"/>
+          <p:cNvSpPr/>
+          <p:nvPr/>
+        </p:nvSpPr>
+        <p:spPr>
+          <a:xfrm>
+            <a:off x="6492240" y="2871216"/>
+            <a:ext cx="1188720" cy="530352"/>
+          </a:xfrm>
+          <a:prstGeom prst="roundRect">
+            <a:avLst>
+              <a:gd name="adj" fmla="val 22000"/>
+            </a:avLst>
+          </a:prstGeom>
+          <a:solidFill>
+            <a:srgbClr val="FFFFFF"/>
+          </a:solidFill>
+          <a:ln w="38100">
+            <a:noFill/>
+          </a:ln>
+        </p:spPr>
+        <p:txBody>
+          <a:bodyPr wrap="square" lIns="73152" tIns="36576" rIns="73152" bIns="36576" rtlCol="0" anchor="ctr">
+            <a:noAutofit/>
+          </a:bodyPr>
+          <a:lstStyle/>
+          <a:p>
+            <a:pPr algn="ctr" indent="0" marL="0">
+              <a:buNone/>
+            </a:pPr>
+            <a:r>
+              <a:rPr lang="en-US" sz="2000" dirty="0" b="1">
+                <a:solidFill>
+                  <a:srgbClr val="1B2236"/>
+                </a:solidFill>
+                <a:latin typeface="Lexend Deca" pitchFamily="34" charset="0"/>
+                <a:ea typeface="Lexend Deca" pitchFamily="34" charset="-122"/>
+                <a:cs typeface="Lexend Deca" pitchFamily="34" charset="-120"/>
+              </a:rPr>
+              <a:t>Then</a:t>
+            </a:r>
+            <a:endParaRPr lang="en-US" sz="2000" dirty="0"/>
+          </a:p>
+        </p:txBody>
+      </p:sp>
+      <p:sp>
+        <p:nvSpPr>
+          <p:cNvPr id="69" name="Option 12"/>
+          <p:cNvSpPr/>
+          <p:nvPr/>
+        </p:nvSpPr>
+        <p:spPr>
+          <a:xfrm>
+            <a:off x="7909560" y="2871216"/>
+            <a:ext cx="1188720" cy="530352"/>
+          </a:xfrm>
+          <a:prstGeom prst="roundRect">
+            <a:avLst>
+              <a:gd name="adj" fmla="val 22000"/>
+            </a:avLst>
+          </a:prstGeom>
+          <a:solidFill>
+            <a:srgbClr val="FFFFFF"/>
+          </a:solidFill>
+          <a:ln w="38100">
+            <a:noFill/>
+          </a:ln>
+        </p:spPr>
+        <p:txBody>
+          <a:bodyPr wrap="square" lIns="73152" tIns="36576" rIns="73152" bIns="36576" rtlCol="0" anchor="ctr">
+            <a:noAutofit/>
+          </a:bodyPr>
+          <a:lstStyle/>
+          <a:p>
+            <a:pPr algn="ctr" indent="0" marL="0">
+              <a:buNone/>
+            </a:pPr>
+            <a:r>
+              <a:rPr lang="en-US" sz="2000" dirty="0" b="1">
+                <a:solidFill>
+                  <a:srgbClr val="1B2236"/>
+                </a:solidFill>
+                <a:latin typeface="Lexend Deca" pitchFamily="34" charset="0"/>
+                <a:ea typeface="Lexend Deca" pitchFamily="34" charset="-122"/>
+                <a:cs typeface="Lexend Deca" pitchFamily="34" charset="-120"/>
+              </a:rPr>
+              <a:t>Now</a:t>
+            </a:r>
+            <a:endParaRPr lang="en-US" sz="2000" dirty="0"/>
+          </a:p>
+        </p:txBody>
+      </p:sp>
+      <p:sp>
+        <p:nvSpPr>
+          <p:cNvPr id="70" name="Option 13"/>
+          <p:cNvSpPr/>
+          <p:nvPr/>
+        </p:nvSpPr>
+        <p:spPr>
+          <a:xfrm>
+            <a:off x="9326880" y="2871216"/>
+            <a:ext cx="1188720" cy="530352"/>
+          </a:xfrm>
+          <a:prstGeom prst="roundRect">
+            <a:avLst>
+              <a:gd name="adj" fmla="val 22000"/>
+            </a:avLst>
+          </a:prstGeom>
+          <a:solidFill>
+            <a:srgbClr val="FFFFFF"/>
+          </a:solidFill>
+          <a:ln w="38100">
+            <a:noFill/>
+          </a:ln>
+        </p:spPr>
+        <p:txBody>
+          <a:bodyPr wrap="square" lIns="73152" tIns="36576" rIns="73152" bIns="36576" rtlCol="0" anchor="ctr">
+            <a:noAutofit/>
+          </a:bodyPr>
+          <a:lstStyle/>
+          <a:p>
+            <a:pPr algn="ctr" indent="0" marL="0">
+              <a:buNone/>
+            </a:pPr>
+            <a:r>
+              <a:rPr lang="en-US" sz="2000" dirty="0" b="1">
+                <a:solidFill>
+                  <a:srgbClr val="1B2236"/>
+                </a:solidFill>
+                <a:latin typeface="Lexend Deca" pitchFamily="34" charset="0"/>
+                <a:ea typeface="Lexend Deca" pitchFamily="34" charset="-122"/>
+                <a:cs typeface="Lexend Deca" pitchFamily="34" charset="-120"/>
+              </a:rPr>
+              <a:t>Next</a:t>
+            </a:r>
+            <a:endParaRPr lang="en-US" sz="2000" dirty="0"/>
+          </a:p>
+        </p:txBody>
+      </p:sp>
+      <p:sp>
+        <p:nvSpPr>
+          <p:cNvPr id="71" name="Circle 1"/>
+          <p:cNvSpPr/>
+          <p:nvPr/>
+        </p:nvSpPr>
+        <p:spPr>
+          <a:xfrm>
+            <a:off x="6364224" y="2807208"/>
+            <a:ext cx="1444752" cy="658368"/>
+          </a:xfrm>
+          <a:prstGeom prst="ellipse">
+            <a:avLst/>
+          </a:prstGeom>
+          <a:noFill/>
+          <a:ln w="50800">
+            <a:solidFill>
+              <a:srgbClr val="5B3FC4"/>
+            </a:solidFill>
+          </a:ln>
+        </p:spPr>
+        <p:txBody>
+          <a:bodyPr wrap="square" lIns="73152" tIns="36576" rIns="73152" bIns="36576" rtlCol="0" anchor="ctr">
+            <a:noAutofit/>
+          </a:bodyPr>
+          <a:lstStyle/>
+          <a:p>
+            <a:pPr algn="l" indent="0" marL="0">
+              <a:buNone/>
+            </a:pPr>
+            <a:r>
+              <a:rPr lang="en-US" sz="2000" dirty="0">
+                <a:solidFill>
+                  <a:srgbClr val="1B2236"/>
+                </a:solidFill>
+                <a:latin typeface="Lexend Deca" pitchFamily="34" charset="0"/>
+                <a:ea typeface="Lexend Deca" pitchFamily="34" charset="-122"/>
+                <a:cs typeface="Lexend Deca" pitchFamily="34" charset="-120"/>
+              </a:rPr>
+              <a:t/>
+            </a:r>
+            <a:endParaRPr lang="en-US" sz="2000" dirty="0"/>
+          </a:p>
+        </p:txBody>
+      </p:sp>
+      <p:sp>
+        <p:nvSpPr>
+          <p:cNvPr id="72" name="Statement 2"/>
+          <p:cNvSpPr/>
+          <p:nvPr/>
+        </p:nvSpPr>
+        <p:spPr>
+          <a:xfrm>
+            <a:off x="502920" y="3566160"/>
+            <a:ext cx="5760720" cy="603504"/>
+          </a:xfrm>
+          <a:prstGeom prst="rect">
+            <a:avLst/>
+          </a:prstGeom>
+          <a:noFill/>
+          <a:ln w="38100">
+            <a:noFill/>
+          </a:ln>
+        </p:spPr>
+        <p:txBody>
+          <a:bodyPr wrap="square" lIns="73152" tIns="36576" rIns="73152" bIns="36576" rtlCol="0" anchor="ctr">
+            <a:noAutofit/>
+          </a:bodyPr>
+          <a:lstStyle/>
+          <a:p>
+            <a:pPr algn="l" indent="0" marL="0">
+              <a:buNone/>
+            </a:pPr>
+            <a:r>
+              <a:rPr lang="en-US" sz="2000" dirty="0">
+                <a:solidFill>
+                  <a:srgbClr val="1B2236"/>
+                </a:solidFill>
+                <a:latin typeface="Lexend Deca" pitchFamily="34" charset="0"/>
+                <a:ea typeface="Lexend Deca" pitchFamily="34" charset="-122"/>
+                <a:cs typeface="Lexend Deca" pitchFamily="34" charset="-120"/>
+              </a:rPr>
+              <a:t>2. She works at a bakery.</a:t>
+            </a:r>
+            <a:endParaRPr lang="en-US" sz="2000" dirty="0"/>
+          </a:p>
+        </p:txBody>
+      </p:sp>
+      <p:sp>
+        <p:nvSpPr>
+          <p:cNvPr id="73" name="Option 21"/>
+          <p:cNvSpPr/>
+          <p:nvPr/>
+        </p:nvSpPr>
+        <p:spPr>
+          <a:xfrm>
+            <a:off x="6492240" y="3602736"/>
+            <a:ext cx="1188720" cy="530352"/>
+          </a:xfrm>
+          <a:prstGeom prst="roundRect">
+            <a:avLst>
+              <a:gd name="adj" fmla="val 22000"/>
+            </a:avLst>
+          </a:prstGeom>
+          <a:solidFill>
+            <a:srgbClr val="FFFFFF"/>
+          </a:solidFill>
+          <a:ln w="38100">
+            <a:noFill/>
+          </a:ln>
+        </p:spPr>
+        <p:txBody>
+          <a:bodyPr wrap="square" lIns="73152" tIns="36576" rIns="73152" bIns="36576" rtlCol="0" anchor="ctr">
+            <a:noAutofit/>
+          </a:bodyPr>
+          <a:lstStyle/>
+          <a:p>
+            <a:pPr algn="ctr" indent="0" marL="0">
+              <a:buNone/>
+            </a:pPr>
+            <a:r>
+              <a:rPr lang="en-US" sz="2000" dirty="0" b="1">
+                <a:solidFill>
+                  <a:srgbClr val="1B2236"/>
+                </a:solidFill>
+                <a:latin typeface="Lexend Deca" pitchFamily="34" charset="0"/>
+                <a:ea typeface="Lexend Deca" pitchFamily="34" charset="-122"/>
+                <a:cs typeface="Lexend Deca" pitchFamily="34" charset="-120"/>
+              </a:rPr>
+              <a:t>Then</a:t>
+            </a:r>
+            <a:endParaRPr lang="en-US" sz="2000" dirty="0"/>
+          </a:p>
+        </p:txBody>
+      </p:sp>
+      <p:sp>
+        <p:nvSpPr>
+          <p:cNvPr id="74" name="Option 22"/>
+          <p:cNvSpPr/>
+          <p:nvPr/>
+        </p:nvSpPr>
+        <p:spPr>
+          <a:xfrm>
+            <a:off x="7909560" y="3602736"/>
+            <a:ext cx="1188720" cy="530352"/>
+          </a:xfrm>
+          <a:prstGeom prst="roundRect">
+            <a:avLst>
+              <a:gd name="adj" fmla="val 22000"/>
+            </a:avLst>
+          </a:prstGeom>
+          <a:solidFill>
+            <a:srgbClr val="FFFFFF"/>
+          </a:solidFill>
+          <a:ln w="38100">
+            <a:noFill/>
+          </a:ln>
+        </p:spPr>
+        <p:txBody>
+          <a:bodyPr wrap="square" lIns="73152" tIns="36576" rIns="73152" bIns="36576" rtlCol="0" anchor="ctr">
+            <a:noAutofit/>
+          </a:bodyPr>
+          <a:lstStyle/>
+          <a:p>
+            <a:pPr algn="ctr" indent="0" marL="0">
+              <a:buNone/>
+            </a:pPr>
+            <a:r>
+              <a:rPr lang="en-US" sz="2000" dirty="0" b="1">
+                <a:solidFill>
+                  <a:srgbClr val="1B2236"/>
+                </a:solidFill>
+                <a:latin typeface="Lexend Deca" pitchFamily="34" charset="0"/>
+                <a:ea typeface="Lexend Deca" pitchFamily="34" charset="-122"/>
+                <a:cs typeface="Lexend Deca" pitchFamily="34" charset="-120"/>
+              </a:rPr>
+              <a:t>Now</a:t>
+            </a:r>
+            <a:endParaRPr lang="en-US" sz="2000" dirty="0"/>
+          </a:p>
+        </p:txBody>
+      </p:sp>
+      <p:sp>
+        <p:nvSpPr>
+          <p:cNvPr id="75" name="Option 23"/>
+          <p:cNvSpPr/>
+          <p:nvPr/>
+        </p:nvSpPr>
+        <p:spPr>
+          <a:xfrm>
+            <a:off x="9326880" y="3602736"/>
+            <a:ext cx="1188720" cy="530352"/>
+          </a:xfrm>
+          <a:prstGeom prst="roundRect">
+            <a:avLst>
+              <a:gd name="adj" fmla="val 22000"/>
+            </a:avLst>
+          </a:prstGeom>
+          <a:solidFill>
+            <a:srgbClr val="FFFFFF"/>
+          </a:solidFill>
+          <a:ln w="38100">
+            <a:noFill/>
+          </a:ln>
+        </p:spPr>
+        <p:txBody>
+          <a:bodyPr wrap="square" lIns="73152" tIns="36576" rIns="73152" bIns="36576" rtlCol="0" anchor="ctr">
+            <a:noAutofit/>
+          </a:bodyPr>
+          <a:lstStyle/>
+          <a:p>
+            <a:pPr algn="ctr" indent="0" marL="0">
+              <a:buNone/>
+            </a:pPr>
+            <a:r>
+              <a:rPr lang="en-US" sz="2000" dirty="0" b="1">
+                <a:solidFill>
+                  <a:srgbClr val="1B2236"/>
+                </a:solidFill>
+                <a:latin typeface="Lexend Deca" pitchFamily="34" charset="0"/>
+                <a:ea typeface="Lexend Deca" pitchFamily="34" charset="-122"/>
+                <a:cs typeface="Lexend Deca" pitchFamily="34" charset="-120"/>
+              </a:rPr>
+              <a:t>Next</a:t>
+            </a:r>
+            <a:endParaRPr lang="en-US" sz="2000" dirty="0"/>
+          </a:p>
+        </p:txBody>
+      </p:sp>
+      <p:sp>
+        <p:nvSpPr>
+          <p:cNvPr id="76" name="Circle 2"/>
+          <p:cNvSpPr/>
+          <p:nvPr/>
+        </p:nvSpPr>
+        <p:spPr>
+          <a:xfrm>
+            <a:off x="7781544" y="3538728"/>
+            <a:ext cx="1444752" cy="658368"/>
+          </a:xfrm>
+          <a:prstGeom prst="ellipse">
+            <a:avLst/>
+          </a:prstGeom>
+          <a:noFill/>
+          <a:ln w="50800">
+            <a:solidFill>
+              <a:srgbClr val="5B3FC4"/>
+            </a:solidFill>
+          </a:ln>
+        </p:spPr>
+        <p:txBody>
+          <a:bodyPr wrap="square" lIns="73152" tIns="36576" rIns="73152" bIns="36576" rtlCol="0" anchor="ctr">
+            <a:noAutofit/>
+          </a:bodyPr>
+          <a:lstStyle/>
+          <a:p>
+            <a:pPr algn="l" indent="0" marL="0">
+              <a:buNone/>
+            </a:pPr>
+            <a:r>
+              <a:rPr lang="en-US" sz="2000" dirty="0">
+                <a:solidFill>
+                  <a:srgbClr val="1B2236"/>
+                </a:solidFill>
+                <a:latin typeface="Lexend Deca" pitchFamily="34" charset="0"/>
+                <a:ea typeface="Lexend Deca" pitchFamily="34" charset="-122"/>
+                <a:cs typeface="Lexend Deca" pitchFamily="34" charset="-120"/>
+              </a:rPr>
+              <a:t/>
+            </a:r>
+            <a:endParaRPr lang="en-US" sz="2000" dirty="0"/>
+          </a:p>
+        </p:txBody>
+      </p:sp>
+      <p:sp>
+        <p:nvSpPr>
+          <p:cNvPr id="77" name="Statement 3"/>
+          <p:cNvSpPr/>
+          <p:nvPr/>
+        </p:nvSpPr>
+        <p:spPr>
+          <a:xfrm>
+            <a:off x="502920" y="4297680"/>
+            <a:ext cx="5760720" cy="603504"/>
+          </a:xfrm>
+          <a:prstGeom prst="rect">
+            <a:avLst/>
+          </a:prstGeom>
+          <a:noFill/>
+          <a:ln w="38100">
+            <a:noFill/>
+          </a:ln>
+        </p:spPr>
+        <p:txBody>
+          <a:bodyPr wrap="square" lIns="73152" tIns="36576" rIns="73152" bIns="36576" rtlCol="0" anchor="ctr">
+            <a:noAutofit/>
+          </a:bodyPr>
+          <a:lstStyle/>
+          <a:p>
+            <a:pPr algn="l" indent="0" marL="0">
+              <a:buNone/>
+            </a:pPr>
+            <a:r>
+              <a:rPr lang="en-US" sz="2000" dirty="0">
+                <a:solidFill>
+                  <a:srgbClr val="1B2236"/>
+                </a:solidFill>
+                <a:latin typeface="Lexend Deca" pitchFamily="34" charset="0"/>
+                <a:ea typeface="Lexend Deca" pitchFamily="34" charset="-122"/>
+                <a:cs typeface="Lexend Deca" pitchFamily="34" charset="-120"/>
+              </a:rPr>
+              <a:t>3. She makes her own appointments.</a:t>
+            </a:r>
+            <a:endParaRPr lang="en-US" sz="2000" dirty="0"/>
+          </a:p>
+        </p:txBody>
+      </p:sp>
+      <p:sp>
+        <p:nvSpPr>
+          <p:cNvPr id="78" name="Option 31"/>
+          <p:cNvSpPr/>
+          <p:nvPr/>
+        </p:nvSpPr>
+        <p:spPr>
+          <a:xfrm>
+            <a:off x="6492240" y="4334256"/>
+            <a:ext cx="1188720" cy="530352"/>
+          </a:xfrm>
+          <a:prstGeom prst="roundRect">
+            <a:avLst>
+              <a:gd name="adj" fmla="val 22000"/>
+            </a:avLst>
+          </a:prstGeom>
+          <a:solidFill>
+            <a:srgbClr val="FFFFFF"/>
+          </a:solidFill>
+          <a:ln w="38100">
+            <a:noFill/>
+          </a:ln>
+        </p:spPr>
+        <p:txBody>
+          <a:bodyPr wrap="square" lIns="73152" tIns="36576" rIns="73152" bIns="36576" rtlCol="0" anchor="ctr">
+            <a:noAutofit/>
+          </a:bodyPr>
+          <a:lstStyle/>
+          <a:p>
+            <a:pPr algn="ctr" indent="0" marL="0">
+              <a:buNone/>
+            </a:pPr>
+            <a:r>
+              <a:rPr lang="en-US" sz="2000" dirty="0" b="1">
+                <a:solidFill>
+                  <a:srgbClr val="1B2236"/>
+                </a:solidFill>
+                <a:latin typeface="Lexend Deca" pitchFamily="34" charset="0"/>
+                <a:ea typeface="Lexend Deca" pitchFamily="34" charset="-122"/>
+                <a:cs typeface="Lexend Deca" pitchFamily="34" charset="-120"/>
+              </a:rPr>
+              <a:t>Then</a:t>
+            </a:r>
+            <a:endParaRPr lang="en-US" sz="2000" dirty="0"/>
+          </a:p>
+        </p:txBody>
+      </p:sp>
+      <p:sp>
+        <p:nvSpPr>
+          <p:cNvPr id="79" name="Option 32"/>
+          <p:cNvSpPr/>
+          <p:nvPr/>
+        </p:nvSpPr>
+        <p:spPr>
+          <a:xfrm>
+            <a:off x="7909560" y="4334256"/>
+            <a:ext cx="1188720" cy="530352"/>
+          </a:xfrm>
+          <a:prstGeom prst="roundRect">
+            <a:avLst>
+              <a:gd name="adj" fmla="val 22000"/>
+            </a:avLst>
+          </a:prstGeom>
+          <a:solidFill>
+            <a:srgbClr val="FFFFFF"/>
+          </a:solidFill>
+          <a:ln w="38100">
+            <a:noFill/>
+          </a:ln>
+        </p:spPr>
+        <p:txBody>
+          <a:bodyPr wrap="square" lIns="73152" tIns="36576" rIns="73152" bIns="36576" rtlCol="0" anchor="ctr">
+            <a:noAutofit/>
+          </a:bodyPr>
+          <a:lstStyle/>
+          <a:p>
+            <a:pPr algn="ctr" indent="0" marL="0">
+              <a:buNone/>
+            </a:pPr>
+            <a:r>
+              <a:rPr lang="en-US" sz="2000" dirty="0" b="1">
+                <a:solidFill>
+                  <a:srgbClr val="1B2236"/>
+                </a:solidFill>
+                <a:latin typeface="Lexend Deca" pitchFamily="34" charset="0"/>
+                <a:ea typeface="Lexend Deca" pitchFamily="34" charset="-122"/>
+                <a:cs typeface="Lexend Deca" pitchFamily="34" charset="-120"/>
+              </a:rPr>
+              <a:t>Now</a:t>
+            </a:r>
+            <a:endParaRPr lang="en-US" sz="2000" dirty="0"/>
+          </a:p>
+        </p:txBody>
+      </p:sp>
+      <p:sp>
+        <p:nvSpPr>
+          <p:cNvPr id="80" name="Option 33"/>
+          <p:cNvSpPr/>
+          <p:nvPr/>
+        </p:nvSpPr>
+        <p:spPr>
+          <a:xfrm>
+            <a:off x="9326880" y="4334256"/>
+            <a:ext cx="1188720" cy="530352"/>
+          </a:xfrm>
+          <a:prstGeom prst="roundRect">
+            <a:avLst>
+              <a:gd name="adj" fmla="val 22000"/>
+            </a:avLst>
+          </a:prstGeom>
+          <a:solidFill>
+            <a:srgbClr val="FFFFFF"/>
+          </a:solidFill>
+          <a:ln w="38100">
+            <a:noFill/>
+          </a:ln>
+        </p:spPr>
+        <p:txBody>
+          <a:bodyPr wrap="square" lIns="73152" tIns="36576" rIns="73152" bIns="36576" rtlCol="0" anchor="ctr">
+            <a:noAutofit/>
+          </a:bodyPr>
+          <a:lstStyle/>
+          <a:p>
+            <a:pPr algn="ctr" indent="0" marL="0">
+              <a:buNone/>
+            </a:pPr>
+            <a:r>
+              <a:rPr lang="en-US" sz="2000" dirty="0" b="1">
+                <a:solidFill>
+                  <a:srgbClr val="1B2236"/>
+                </a:solidFill>
+                <a:latin typeface="Lexend Deca" pitchFamily="34" charset="0"/>
+                <a:ea typeface="Lexend Deca" pitchFamily="34" charset="-122"/>
+                <a:cs typeface="Lexend Deca" pitchFamily="34" charset="-120"/>
+              </a:rPr>
+              <a:t>Next</a:t>
+            </a:r>
+            <a:endParaRPr lang="en-US" sz="2000" dirty="0"/>
+          </a:p>
+        </p:txBody>
+      </p:sp>
+      <p:sp>
+        <p:nvSpPr>
+          <p:cNvPr id="81" name="Circle 3"/>
+          <p:cNvSpPr/>
+          <p:nvPr/>
+        </p:nvSpPr>
+        <p:spPr>
+          <a:xfrm>
+            <a:off x="7781544" y="4270248"/>
+            <a:ext cx="1444752" cy="658368"/>
+          </a:xfrm>
+          <a:prstGeom prst="ellipse">
+            <a:avLst/>
+          </a:prstGeom>
+          <a:noFill/>
+          <a:ln w="50800">
+            <a:solidFill>
+              <a:srgbClr val="5B3FC4"/>
+            </a:solidFill>
+          </a:ln>
+        </p:spPr>
+        <p:txBody>
+          <a:bodyPr wrap="square" lIns="73152" tIns="36576" rIns="73152" bIns="36576" rtlCol="0" anchor="ctr">
+            <a:noAutofit/>
+          </a:bodyPr>
+          <a:lstStyle/>
+          <a:p>
+            <a:pPr algn="l" indent="0" marL="0">
+              <a:buNone/>
+            </a:pPr>
+            <a:r>
+              <a:rPr lang="en-US" sz="2000" dirty="0">
+                <a:solidFill>
+                  <a:srgbClr val="1B2236"/>
+                </a:solidFill>
+                <a:latin typeface="Lexend Deca" pitchFamily="34" charset="0"/>
+                <a:ea typeface="Lexend Deca" pitchFamily="34" charset="-122"/>
+                <a:cs typeface="Lexend Deca" pitchFamily="34" charset="-120"/>
+              </a:rPr>
+              <a:t/>
+            </a:r>
+            <a:endParaRPr lang="en-US" sz="2000" dirty="0"/>
+          </a:p>
+        </p:txBody>
+      </p:sp>
+      <p:sp>
+        <p:nvSpPr>
+          <p:cNvPr id="82" name="Statement 4"/>
+          <p:cNvSpPr/>
+          <p:nvPr/>
+        </p:nvSpPr>
+        <p:spPr>
+          <a:xfrm>
+            <a:off x="502920" y="5029200"/>
+            <a:ext cx="5760720" cy="603504"/>
+          </a:xfrm>
+          <a:prstGeom prst="rect">
+            <a:avLst/>
+          </a:prstGeom>
+          <a:noFill/>
+          <a:ln w="38100">
+            <a:noFill/>
+          </a:ln>
+        </p:spPr>
+        <p:txBody>
+          <a:bodyPr wrap="square" lIns="73152" tIns="36576" rIns="73152" bIns="36576" rtlCol="0" anchor="ctr">
+            <a:noAutofit/>
+          </a:bodyPr>
+          <a:lstStyle/>
+          <a:p>
+            <a:pPr algn="l" indent="0" marL="0">
+              <a:buNone/>
+            </a:pPr>
+            <a:r>
+              <a:rPr lang="en-US" sz="2000" dirty="0">
+                <a:solidFill>
+                  <a:srgbClr val="1B2236"/>
+                </a:solidFill>
+                <a:latin typeface="Lexend Deca" pitchFamily="34" charset="0"/>
+                <a:ea typeface="Lexend Deca" pitchFamily="34" charset="-122"/>
+                <a:cs typeface="Lexend Deca" pitchFamily="34" charset="-120"/>
+              </a:rPr>
+              <a:t>4. She is going to take a computer class.</a:t>
+            </a:r>
+            <a:endParaRPr lang="en-US" sz="2000" dirty="0"/>
+          </a:p>
+        </p:txBody>
+      </p:sp>
+      <p:sp>
+        <p:nvSpPr>
+          <p:cNvPr id="83" name="Option 41"/>
+          <p:cNvSpPr/>
+          <p:nvPr/>
+        </p:nvSpPr>
+        <p:spPr>
+          <a:xfrm>
+            <a:off x="6492240" y="5065776"/>
+            <a:ext cx="1188720" cy="530352"/>
+          </a:xfrm>
+          <a:prstGeom prst="roundRect">
+            <a:avLst>
+              <a:gd name="adj" fmla="val 22000"/>
+            </a:avLst>
+          </a:prstGeom>
+          <a:solidFill>
+            <a:srgbClr val="FFFFFF"/>
+          </a:solidFill>
+          <a:ln w="38100">
+            <a:noFill/>
+          </a:ln>
+        </p:spPr>
+        <p:txBody>
+          <a:bodyPr wrap="square" lIns="73152" tIns="36576" rIns="73152" bIns="36576" rtlCol="0" anchor="ctr">
+            <a:noAutofit/>
+          </a:bodyPr>
+          <a:lstStyle/>
+          <a:p>
+            <a:pPr algn="ctr" indent="0" marL="0">
+              <a:buNone/>
+            </a:pPr>
+            <a:r>
+              <a:rPr lang="en-US" sz="2000" dirty="0" b="1">
+                <a:solidFill>
+                  <a:srgbClr val="1B2236"/>
+                </a:solidFill>
+                <a:latin typeface="Lexend Deca" pitchFamily="34" charset="0"/>
+                <a:ea typeface="Lexend Deca" pitchFamily="34" charset="-122"/>
+                <a:cs typeface="Lexend Deca" pitchFamily="34" charset="-120"/>
+              </a:rPr>
+              <a:t>Then</a:t>
+            </a:r>
+            <a:endParaRPr lang="en-US" sz="2000" dirty="0"/>
+          </a:p>
+        </p:txBody>
+      </p:sp>
+      <p:sp>
+        <p:nvSpPr>
+          <p:cNvPr id="84" name="Option 42"/>
+          <p:cNvSpPr/>
+          <p:nvPr/>
+        </p:nvSpPr>
+        <p:spPr>
+          <a:xfrm>
+            <a:off x="7909560" y="5065776"/>
+            <a:ext cx="1188720" cy="530352"/>
+          </a:xfrm>
+          <a:prstGeom prst="roundRect">
+            <a:avLst>
+              <a:gd name="adj" fmla="val 22000"/>
+            </a:avLst>
+          </a:prstGeom>
+          <a:solidFill>
+            <a:srgbClr val="FFFFFF"/>
+          </a:solidFill>
+          <a:ln w="38100">
+            <a:noFill/>
+          </a:ln>
+        </p:spPr>
+        <p:txBody>
+          <a:bodyPr wrap="square" lIns="73152" tIns="36576" rIns="73152" bIns="36576" rtlCol="0" anchor="ctr">
+            <a:noAutofit/>
+          </a:bodyPr>
+          <a:lstStyle/>
+          <a:p>
+            <a:pPr algn="ctr" indent="0" marL="0">
+              <a:buNone/>
+            </a:pPr>
+            <a:r>
+              <a:rPr lang="en-US" sz="2000" dirty="0" b="1">
+                <a:solidFill>
+                  <a:srgbClr val="1B2236"/>
+                </a:solidFill>
+                <a:latin typeface="Lexend Deca" pitchFamily="34" charset="0"/>
+                <a:ea typeface="Lexend Deca" pitchFamily="34" charset="-122"/>
+                <a:cs typeface="Lexend Deca" pitchFamily="34" charset="-120"/>
+              </a:rPr>
+              <a:t>Now</a:t>
+            </a:r>
+            <a:endParaRPr lang="en-US" sz="2000" dirty="0"/>
+          </a:p>
+        </p:txBody>
+      </p:sp>
+      <p:sp>
+        <p:nvSpPr>
+          <p:cNvPr id="85" name="Option 43"/>
+          <p:cNvSpPr/>
+          <p:nvPr/>
+        </p:nvSpPr>
+        <p:spPr>
+          <a:xfrm>
+            <a:off x="9326880" y="5065776"/>
+            <a:ext cx="1188720" cy="530352"/>
+          </a:xfrm>
+          <a:prstGeom prst="roundRect">
+            <a:avLst>
+              <a:gd name="adj" fmla="val 22000"/>
+            </a:avLst>
+          </a:prstGeom>
+          <a:solidFill>
+            <a:srgbClr val="FFFFFF"/>
+          </a:solidFill>
+          <a:ln w="38100">
+            <a:noFill/>
+          </a:ln>
+        </p:spPr>
+        <p:txBody>
+          <a:bodyPr wrap="square" lIns="73152" tIns="36576" rIns="73152" bIns="36576" rtlCol="0" anchor="ctr">
+            <a:noAutofit/>
+          </a:bodyPr>
+          <a:lstStyle/>
+          <a:p>
+            <a:pPr algn="ctr" indent="0" marL="0">
+              <a:buNone/>
+            </a:pPr>
+            <a:r>
+              <a:rPr lang="en-US" sz="2000" dirty="0" b="1">
+                <a:solidFill>
+                  <a:srgbClr val="1B2236"/>
+                </a:solidFill>
+                <a:latin typeface="Lexend Deca" pitchFamily="34" charset="0"/>
+                <a:ea typeface="Lexend Deca" pitchFamily="34" charset="-122"/>
+                <a:cs typeface="Lexend Deca" pitchFamily="34" charset="-120"/>
+              </a:rPr>
+              <a:t>Next</a:t>
+            </a:r>
+            <a:endParaRPr lang="en-US" sz="2000" dirty="0"/>
+          </a:p>
+        </p:txBody>
+      </p:sp>
+      <p:sp>
+        <p:nvSpPr>
+          <p:cNvPr id="86" name="Circle 4"/>
+          <p:cNvSpPr/>
+          <p:nvPr/>
+        </p:nvSpPr>
+        <p:spPr>
+          <a:xfrm>
+            <a:off x="9198864" y="5001768"/>
+            <a:ext cx="1444752" cy="658368"/>
+          </a:xfrm>
+          <a:prstGeom prst="ellipse">
+            <a:avLst/>
+          </a:prstGeom>
+          <a:noFill/>
+          <a:ln w="50800">
+            <a:solidFill>
+              <a:srgbClr val="5B3FC4"/>
+            </a:solidFill>
+          </a:ln>
+        </p:spPr>
+        <p:txBody>
+          <a:bodyPr wrap="square" lIns="73152" tIns="36576" rIns="73152" bIns="36576" rtlCol="0" anchor="ctr">
+            <a:noAutofit/>
+          </a:bodyPr>
+          <a:lstStyle/>
+          <a:p>
+            <a:pPr algn="l" indent="0" marL="0">
+              <a:buNone/>
+            </a:pPr>
+            <a:r>
+              <a:rPr lang="en-US" sz="2000" dirty="0">
+                <a:solidFill>
+                  <a:srgbClr val="1B2236"/>
+                </a:solidFill>
+                <a:latin typeface="Lexend Deca" pitchFamily="34" charset="0"/>
+                <a:ea typeface="Lexend Deca" pitchFamily="34" charset="-122"/>
+                <a:cs typeface="Lexend Deca" pitchFamily="34" charset="-120"/>
+              </a:rPr>
+              <a:t/>
+            </a:r>
+            <a:endParaRPr lang="en-US" sz="2000" dirty="0"/>
+          </a:p>
+        </p:txBody>
+      </p:sp>
+      <p:sp>
+        <p:nvSpPr>
+          <p:cNvPr id="87" name="Statement 5"/>
+          <p:cNvSpPr/>
+          <p:nvPr/>
+        </p:nvSpPr>
+        <p:spPr>
+          <a:xfrm>
+            <a:off x="502920" y="5760720"/>
+            <a:ext cx="5760720" cy="603504"/>
+          </a:xfrm>
+          <a:prstGeom prst="rect">
+            <a:avLst/>
+          </a:prstGeom>
+          <a:noFill/>
+          <a:ln w="38100">
+            <a:noFill/>
+          </a:ln>
+        </p:spPr>
+        <p:txBody>
+          <a:bodyPr wrap="square" lIns="73152" tIns="36576" rIns="73152" bIns="36576" rtlCol="0" anchor="ctr">
+            <a:noAutofit/>
+          </a:bodyPr>
+          <a:lstStyle/>
+          <a:p>
+            <a:pPr algn="l" indent="0" marL="0">
+              <a:buNone/>
+            </a:pPr>
+            <a:r>
+              <a:rPr lang="en-US" sz="2000" dirty="0">
+                <a:solidFill>
+                  <a:srgbClr val="1B2236"/>
+                </a:solidFill>
+                <a:latin typeface="Lexend Deca" pitchFamily="34" charset="0"/>
+                <a:ea typeface="Lexend Deca" pitchFamily="34" charset="-122"/>
+                <a:cs typeface="Lexend Deca" pitchFamily="34" charset="-120"/>
+              </a:rPr>
+              <a:t>5. She is going to get an office job.</a:t>
+            </a:r>
+            <a:endParaRPr lang="en-US" sz="2000" dirty="0"/>
+          </a:p>
+        </p:txBody>
+      </p:sp>
+      <p:sp>
+        <p:nvSpPr>
+          <p:cNvPr id="88" name="Option 51"/>
+          <p:cNvSpPr/>
+          <p:nvPr/>
+        </p:nvSpPr>
+        <p:spPr>
+          <a:xfrm>
+            <a:off x="6492240" y="5797296"/>
+            <a:ext cx="1188720" cy="530352"/>
+          </a:xfrm>
+          <a:prstGeom prst="roundRect">
+            <a:avLst>
+              <a:gd name="adj" fmla="val 22000"/>
+            </a:avLst>
+          </a:prstGeom>
+          <a:solidFill>
+            <a:srgbClr val="FFFFFF"/>
+          </a:solidFill>
+          <a:ln w="38100">
+            <a:noFill/>
+          </a:ln>
+        </p:spPr>
+        <p:txBody>
+          <a:bodyPr wrap="square" lIns="73152" tIns="36576" rIns="73152" bIns="36576" rtlCol="0" anchor="ctr">
+            <a:noAutofit/>
+          </a:bodyPr>
+          <a:lstStyle/>
+          <a:p>
+            <a:pPr algn="ctr" indent="0" marL="0">
+              <a:buNone/>
+            </a:pPr>
+            <a:r>
+              <a:rPr lang="en-US" sz="2000" dirty="0" b="1">
+                <a:solidFill>
+                  <a:srgbClr val="1B2236"/>
+                </a:solidFill>
+                <a:latin typeface="Lexend Deca" pitchFamily="34" charset="0"/>
+                <a:ea typeface="Lexend Deca" pitchFamily="34" charset="-122"/>
+                <a:cs typeface="Lexend Deca" pitchFamily="34" charset="-120"/>
+              </a:rPr>
+              <a:t>Then</a:t>
+            </a:r>
+            <a:endParaRPr lang="en-US" sz="2000" dirty="0"/>
+          </a:p>
+        </p:txBody>
+      </p:sp>
+      <p:sp>
+        <p:nvSpPr>
+          <p:cNvPr id="89" name="Option 52"/>
+          <p:cNvSpPr/>
+          <p:nvPr/>
+        </p:nvSpPr>
+        <p:spPr>
+          <a:xfrm>
+            <a:off x="7909560" y="5797296"/>
+            <a:ext cx="1188720" cy="530352"/>
+          </a:xfrm>
+          <a:prstGeom prst="roundRect">
+            <a:avLst>
+              <a:gd name="adj" fmla="val 22000"/>
+            </a:avLst>
+          </a:prstGeom>
+          <a:solidFill>
+            <a:srgbClr val="FFFFFF"/>
+          </a:solidFill>
+          <a:ln w="38100">
+            <a:noFill/>
+          </a:ln>
+        </p:spPr>
+        <p:txBody>
+          <a:bodyPr wrap="square" lIns="73152" tIns="36576" rIns="73152" bIns="36576" rtlCol="0" anchor="ctr">
+            <a:noAutofit/>
+          </a:bodyPr>
+          <a:lstStyle/>
+          <a:p>
+            <a:pPr algn="ctr" indent="0" marL="0">
+              <a:buNone/>
+            </a:pPr>
+            <a:r>
+              <a:rPr lang="en-US" sz="2000" dirty="0" b="1">
+                <a:solidFill>
+                  <a:srgbClr val="1B2236"/>
+                </a:solidFill>
+                <a:latin typeface="Lexend Deca" pitchFamily="34" charset="0"/>
+                <a:ea typeface="Lexend Deca" pitchFamily="34" charset="-122"/>
+                <a:cs typeface="Lexend Deca" pitchFamily="34" charset="-120"/>
+              </a:rPr>
+              <a:t>Now</a:t>
+            </a:r>
+            <a:endParaRPr lang="en-US" sz="2000" dirty="0"/>
+          </a:p>
+        </p:txBody>
+      </p:sp>
+      <p:sp>
+        <p:nvSpPr>
+          <p:cNvPr id="90" name="Option 53"/>
+          <p:cNvSpPr/>
+          <p:nvPr/>
+        </p:nvSpPr>
+        <p:spPr>
+          <a:xfrm>
+            <a:off x="9326880" y="5797296"/>
+            <a:ext cx="1188720" cy="530352"/>
+          </a:xfrm>
+          <a:prstGeom prst="roundRect">
+            <a:avLst>
+              <a:gd name="adj" fmla="val 22000"/>
+            </a:avLst>
+          </a:prstGeom>
+          <a:solidFill>
+            <a:srgbClr val="FFFFFF"/>
+          </a:solidFill>
+          <a:ln w="38100">
+            <a:noFill/>
+          </a:ln>
+        </p:spPr>
+        <p:txBody>
+          <a:bodyPr wrap="square" lIns="73152" tIns="36576" rIns="73152" bIns="36576" rtlCol="0" anchor="ctr">
+            <a:noAutofit/>
+          </a:bodyPr>
+          <a:lstStyle/>
+          <a:p>
+            <a:pPr algn="ctr" indent="0" marL="0">
+              <a:buNone/>
+            </a:pPr>
+            <a:r>
+              <a:rPr lang="en-US" sz="2000" dirty="0" b="1">
+                <a:solidFill>
+                  <a:srgbClr val="1B2236"/>
+                </a:solidFill>
+                <a:latin typeface="Lexend Deca" pitchFamily="34" charset="0"/>
+                <a:ea typeface="Lexend Deca" pitchFamily="34" charset="-122"/>
+                <a:cs typeface="Lexend Deca" pitchFamily="34" charset="-120"/>
+              </a:rPr>
+              <a:t>Next</a:t>
+            </a:r>
+            <a:endParaRPr lang="en-US" sz="2000" dirty="0"/>
+          </a:p>
+        </p:txBody>
+      </p:sp>
+      <p:sp>
+        <p:nvSpPr>
+          <p:cNvPr id="91" name="Circle 5"/>
+          <p:cNvSpPr/>
+          <p:nvPr/>
+        </p:nvSpPr>
+        <p:spPr>
+          <a:xfrm>
+            <a:off x="9198864" y="5733288"/>
+            <a:ext cx="1444752" cy="658368"/>
+          </a:xfrm>
+          <a:prstGeom prst="ellipse">
+            <a:avLst/>
+          </a:prstGeom>
+          <a:noFill/>
+          <a:ln w="50800">
+            <a:solidFill>
+              <a:srgbClr val="5B3FC4"/>
+            </a:solidFill>
+          </a:ln>
+        </p:spPr>
+        <p:txBody>
+          <a:bodyPr wrap="square" lIns="73152" tIns="36576" rIns="73152" bIns="36576" rtlCol="0" anchor="ctr">
+            <a:noAutofit/>
+          </a:bodyPr>
+          <a:lstStyle/>
+          <a:p>
+            <a:pPr algn="l" indent="0" marL="0">
+              <a:buNone/>
+            </a:pPr>
+            <a:r>
+              <a:rPr lang="en-US" sz="2000" dirty="0">
+                <a:solidFill>
+                  <a:srgbClr val="1B2236"/>
+                </a:solidFill>
+                <a:latin typeface="Lexend Deca" pitchFamily="34" charset="0"/>
+                <a:ea typeface="Lexend Deca" pitchFamily="34" charset="-122"/>
+                <a:cs typeface="Lexend Deca" pitchFamily="34" charset="-120"/>
+              </a:rPr>
+              <a:t/>
+            </a:r>
+            <a:endParaRPr lang="en-US" sz="2000" dirty="0"/>
+          </a:p>
+        </p:txBody>
+      </p:sp>
+    </p:spTree>
+  </p:cSld>
+  <p:clrMapOvr>
+    <a:masterClrMapping/>
+  </p:clrMapOvr>
+  <p:timing>
+    <p:tnLst>
+      <p:par>
+        <p:cTn id="1" dur="indefinite" restart="never" nodeType="tmRoot">
+          <p:childTnLst>
+            <p:seq concurrent="1" nextAc="seek">
+              <p:cTn id="2" dur="indefinite" nodeType="mainSeq">
+                <p:childTnLst>
+                  <p:par>
+                    <p:cTn id="3" fill="hold">
+                      <p:stCondLst>
+                        <p:cond delay="indefinite"/>
+                      </p:stCondLst>
+                      <p:childTnLst>
+                        <p:par>
+                          <p:cTn id="4" fill="hold">
+                            <p:stCondLst>
+                              <p:cond delay="0"/>
+                            </p:stCondLst>
+                            <p:childTnLst>
+                              <p:par>
+                                <p:cTn id="5" presetID="10" presetClass="entr" presetSubtype="0" fill="hold" nodeType="clickEffect">
+                                  <p:stCondLst>
+                                    <p:cond delay="0"/>
+                                  </p:stCondLst>
+                                  <p:childTnLst>
+                                    <p:set>
+                                      <p:cBhvr>
+                                        <p:cTn id="6" dur="1" fill="hold">
+                                          <p:stCondLst>
+                                            <p:cond delay="0"/>
+                                          </p:stCondLst>
+                                        </p:cTn>
+                                        <p:tgtEl>
+                                          <p:spTgt spid="71"/>
+                                        </p:tgtEl>
+                                        <p:attrNameLst>
+                                          <p:attrName>style.visibility</p:attrName>
+                                        </p:attrNameLst>
+                                      </p:cBhvr>
+                                      <p:to>
+                                        <p:strVal val="visible"/>
+                                      </p:to>
+                                    </p:set>
+                                    <p:animEffect transition="in" filter="fade">
+                                      <p:cBhvr>
+                                        <p:cTn id="7" dur="400"/>
+                                        <p:tgtEl>
+                                          <p:spTgt spid="71"/>
+                                        </p:tgtEl>
+                                      </p:cBhvr>
+                                    </p:animEffect>
+                                  </p:childTnLst>
+                                </p:cTn>
+                              </p:par>
+                            </p:childTnLst>
+                          </p:cTn>
+                        </p:par>
+                      </p:childTnLst>
+                    </p:cTn>
+                  </p:par>
+                  <p:par>
+                    <p:cTn id="8" fill="hold">
+                      <p:stCondLst>
+                        <p:cond delay="indefinite"/>
+                      </p:stCondLst>
+                      <p:childTnLst>
+                        <p:par>
+                          <p:cTn id="9" fill="hold">
+                            <p:stCondLst>
+                              <p:cond delay="0"/>
+                            </p:stCondLst>
+                            <p:childTnLst>
+                              <p:par>
+                                <p:cTn id="10" presetID="10" presetClass="entr" presetSubtype="0" fill="hold" nodeType="clickEffect">
+                                  <p:stCondLst>
+                                    <p:cond delay="0"/>
+                                  </p:stCondLst>
+                                  <p:childTnLst>
+                                    <p:set>
+                                      <p:cBhvr>
+                                        <p:cTn id="11" dur="1" fill="hold">
+                                          <p:stCondLst>
+                                            <p:cond delay="0"/>
+                                          </p:stCondLst>
+                                        </p:cTn>
+                                        <p:tgtEl>
+                                          <p:spTgt spid="76"/>
+                                        </p:tgtEl>
+                                        <p:attrNameLst>
+                                          <p:attrName>style.visibility</p:attrName>
+                                        </p:attrNameLst>
+                                      </p:cBhvr>
+                                      <p:to>
+                                        <p:strVal val="visible"/>
+                                      </p:to>
+                                    </p:set>
+                                    <p:animEffect transition="in" filter="fade">
+                                      <p:cBhvr>
+                                        <p:cTn id="12" dur="400"/>
+                                        <p:tgtEl>
+                                          <p:spTgt spid="76"/>
+                                        </p:tgtEl>
+                                      </p:cBhvr>
+                                    </p:animEffect>
+                                  </p:childTnLst>
+                                </p:cTn>
+                              </p:par>
+                            </p:childTnLst>
+                          </p:cTn>
+                        </p:par>
+                      </p:childTnLst>
+                    </p:cTn>
+                  </p:par>
+                  <p:par>
+                    <p:cTn id="13" fill="hold">
+                      <p:stCondLst>
+                        <p:cond delay="indefinite"/>
+                      </p:stCondLst>
+                      <p:childTnLst>
+                        <p:par>
+                          <p:cTn id="14" fill="hold">
+                            <p:stCondLst>
+                              <p:cond delay="0"/>
+                            </p:stCondLst>
+                            <p:childTnLst>
+                              <p:par>
+                                <p:cTn id="15" presetID="10" presetClass="entr" presetSubtype="0" fill="hold" nodeType="clickEffect">
+                                  <p:stCondLst>
+                                    <p:cond delay="0"/>
+                                  </p:stCondLst>
+                                  <p:childTnLst>
+                                    <p:set>
+                                      <p:cBhvr>
+                                        <p:cTn id="16" dur="1" fill="hold">
+                                          <p:stCondLst>
+                                            <p:cond delay="0"/>
+                                          </p:stCondLst>
+                                        </p:cTn>
+                                        <p:tgtEl>
+                                          <p:spTgt spid="81"/>
+                                        </p:tgtEl>
+                                        <p:attrNameLst>
+                                          <p:attrName>style.visibility</p:attrName>
+                                        </p:attrNameLst>
+                                      </p:cBhvr>
+                                      <p:to>
+                                        <p:strVal val="visible"/>
+                                      </p:to>
+                                    </p:set>
+                                    <p:animEffect transition="in" filter="fade">
+                                      <p:cBhvr>
+                                        <p:cTn id="17" dur="400"/>
+                                        <p:tgtEl>
+                                          <p:spTgt spid="81"/>
+                                        </p:tgtEl>
+                                      </p:cBhvr>
+                                    </p:animEffect>
+                                  </p:childTnLst>
+                                </p:cTn>
+                              </p:par>
+                            </p:childTnLst>
+                          </p:cTn>
+                        </p:par>
+                      </p:childTnLst>
+                    </p:cTn>
+                  </p:par>
+                  <p:par>
+                    <p:cTn id="18" fill="hold">
+                      <p:stCondLst>
+                        <p:cond delay="indefinite"/>
+                      </p:stCondLst>
+                      <p:childTnLst>
+                        <p:par>
+                          <p:cTn id="19" fill="hold">
+                            <p:stCondLst>
+                              <p:cond delay="0"/>
+                            </p:stCondLst>
+                            <p:childTnLst>
+                              <p:par>
+                                <p:cTn id="20" presetID="10" presetClass="entr" presetSubtype="0" fill="hold" nodeType="clickEffect">
+                                  <p:stCondLst>
+                                    <p:cond delay="0"/>
+                                  </p:stCondLst>
+                                  <p:childTnLst>
+                                    <p:set>
+                                      <p:cBhvr>
+                                        <p:cTn id="21" dur="1" fill="hold">
+                                          <p:stCondLst>
+                                            <p:cond delay="0"/>
+                                          </p:stCondLst>
+                                        </p:cTn>
+                                        <p:tgtEl>
+                                          <p:spTgt spid="86"/>
+                                        </p:tgtEl>
+                                        <p:attrNameLst>
+                                          <p:attrName>style.visibility</p:attrName>
+                                        </p:attrNameLst>
+                                      </p:cBhvr>
+                                      <p:to>
+                                        <p:strVal val="visible"/>
+                                      </p:to>
+                                    </p:set>
+                                    <p:animEffect transition="in" filter="fade">
+                                      <p:cBhvr>
+                                        <p:cTn id="22" dur="400"/>
+                                        <p:tgtEl>
+                                          <p:spTgt spid="86"/>
+                                        </p:tgtEl>
+                                      </p:cBhvr>
+                                    </p:animEffect>
+                                  </p:childTnLst>
+                                </p:cTn>
+                              </p:par>
+                            </p:childTnLst>
+                          </p:cTn>
+                        </p:par>
+                      </p:childTnLst>
+                    </p:cTn>
+                  </p:par>
+                  <p:par>
+                    <p:cTn id="23" fill="hold">
+                      <p:stCondLst>
+                        <p:cond delay="indefinite"/>
+                      </p:stCondLst>
+                      <p:childTnLst>
+                        <p:par>
+                          <p:cTn id="24" fill="hold">
+                            <p:stCondLst>
+                              <p:cond delay="0"/>
+                            </p:stCondLst>
+                            <p:childTnLst>
+                              <p:par>
+                                <p:cTn id="25" presetID="10" presetClass="entr" presetSubtype="0" fill="hold" nodeType="clickEffect">
+                                  <p:stCondLst>
+                                    <p:cond delay="0"/>
+                                  </p:stCondLst>
+                                  <p:childTnLst>
+                                    <p:set>
+                                      <p:cBhvr>
+                                        <p:cTn id="26" dur="1" fill="hold">
+                                          <p:stCondLst>
+                                            <p:cond delay="0"/>
+                                          </p:stCondLst>
+                                        </p:cTn>
+                                        <p:tgtEl>
+                                          <p:spTgt spid="91"/>
+                                        </p:tgtEl>
+                                        <p:attrNameLst>
+                                          <p:attrName>style.visibility</p:attrName>
+                                        </p:attrNameLst>
+                                      </p:cBhvr>
+                                      <p:to>
+                                        <p:strVal val="visible"/>
+                                      </p:to>
+                                    </p:set>
+                                    <p:animEffect transition="in" filter="fade">
+                                      <p:cBhvr>
+                                        <p:cTn id="27" dur="400"/>
+                                        <p:tgtEl>
+                                          <p:spTgt spid="91"/>
                                         </p:tgtEl>
                                       </p:cBhvr>
                                     </p:animEffect>
